--- a/project1/Proj1_Present_Energy_Ouspenskaia.pptx
+++ b/project1/Proj1_Present_Energy_Ouspenskaia.pptx
@@ -4,10 +4,14 @@
   <p:sldMasterIdLst>
     <p:sldMasterId id="2147483762" r:id="rId1"/>
   </p:sldMasterIdLst>
+  <p:notesMasterIdLst>
+    <p:notesMasterId r:id="rId6"/>
+  </p:notesMasterIdLst>
   <p:sldIdLst>
     <p:sldId id="256" r:id="rId2"/>
     <p:sldId id="258" r:id="rId3"/>
     <p:sldId id="259" r:id="rId4"/>
+    <p:sldId id="260" r:id="rId5"/>
   </p:sldIdLst>
   <p:sldSz cx="12192000" cy="6858000"/>
   <p:notesSz cx="6858000" cy="9144000"/>
@@ -112,6 +116,658 @@
     </p:ext>
   </p:extLst>
 </p:presentation>
+</file>
+
+<file path=ppt/notesMasters/notesMaster1.xml><?xml version="1.0" encoding="utf-8"?>
+<p:notesMaster xmlns:a="http://schemas.openxmlformats.org/drawingml/2006/main" xmlns:r="http://schemas.openxmlformats.org/officeDocument/2006/relationships" xmlns:p="http://schemas.openxmlformats.org/presentationml/2006/main">
+  <p:cSld>
+    <p:bg>
+      <p:bgRef idx="1001">
+        <a:schemeClr val="bg1"/>
+      </p:bgRef>
+    </p:bg>
+    <p:spTree>
+      <p:nvGrpSpPr>
+        <p:cNvPr id="1" name=""/>
+        <p:cNvGrpSpPr/>
+        <p:nvPr/>
+      </p:nvGrpSpPr>
+      <p:grpSpPr>
+        <a:xfrm>
+          <a:off x="0" y="0"/>
+          <a:ext cx="0" cy="0"/>
+          <a:chOff x="0" y="0"/>
+          <a:chExt cx="0" cy="0"/>
+        </a:xfrm>
+      </p:grpSpPr>
+      <p:sp>
+        <p:nvSpPr>
+          <p:cNvPr id="2" name="Header Placeholder 1"/>
+          <p:cNvSpPr>
+            <a:spLocks noGrp="1"/>
+          </p:cNvSpPr>
+          <p:nvPr>
+            <p:ph type="hdr" sz="quarter"/>
+          </p:nvPr>
+        </p:nvSpPr>
+        <p:spPr>
+          <a:xfrm>
+            <a:off x="0" y="0"/>
+            <a:ext cx="2971800" cy="458788"/>
+          </a:xfrm>
+          <a:prstGeom prst="rect">
+            <a:avLst/>
+          </a:prstGeom>
+        </p:spPr>
+        <p:txBody>
+          <a:bodyPr vert="horz" lIns="91440" tIns="45720" rIns="91440" bIns="45720" rtlCol="0"/>
+          <a:lstStyle>
+            <a:lvl1pPr algn="l">
+              <a:defRPr sz="1200"/>
+            </a:lvl1pPr>
+          </a:lstStyle>
+          <a:p>
+            <a:endParaRPr lang="en-US"/>
+          </a:p>
+        </p:txBody>
+      </p:sp>
+      <p:sp>
+        <p:nvSpPr>
+          <p:cNvPr id="3" name="Date Placeholder 2"/>
+          <p:cNvSpPr>
+            <a:spLocks noGrp="1"/>
+          </p:cNvSpPr>
+          <p:nvPr>
+            <p:ph type="dt" idx="1"/>
+          </p:nvPr>
+        </p:nvSpPr>
+        <p:spPr>
+          <a:xfrm>
+            <a:off x="3884613" y="0"/>
+            <a:ext cx="2971800" cy="458788"/>
+          </a:xfrm>
+          <a:prstGeom prst="rect">
+            <a:avLst/>
+          </a:prstGeom>
+        </p:spPr>
+        <p:txBody>
+          <a:bodyPr vert="horz" lIns="91440" tIns="45720" rIns="91440" bIns="45720" rtlCol="0"/>
+          <a:lstStyle>
+            <a:lvl1pPr algn="r">
+              <a:defRPr sz="1200"/>
+            </a:lvl1pPr>
+          </a:lstStyle>
+          <a:p>
+            <a:fld id="{C26A4829-75DB-8043-86C0-4BF09ABC0866}" type="datetimeFigureOut">
+              <a:rPr lang="en-US" smtClean="0"/>
+              <a:t>10/28/26</a:t>
+            </a:fld>
+            <a:endParaRPr lang="en-US"/>
+          </a:p>
+        </p:txBody>
+      </p:sp>
+      <p:sp>
+        <p:nvSpPr>
+          <p:cNvPr id="4" name="Slide Image Placeholder 3"/>
+          <p:cNvSpPr>
+            <a:spLocks noGrp="1" noRot="1" noChangeAspect="1"/>
+          </p:cNvSpPr>
+          <p:nvPr>
+            <p:ph type="sldImg" idx="2"/>
+          </p:nvPr>
+        </p:nvSpPr>
+        <p:spPr>
+          <a:xfrm>
+            <a:off x="685800" y="1143000"/>
+            <a:ext cx="5486400" cy="3086100"/>
+          </a:xfrm>
+          <a:prstGeom prst="rect">
+            <a:avLst/>
+          </a:prstGeom>
+          <a:noFill/>
+          <a:ln w="12700">
+            <a:solidFill>
+              <a:prstClr val="black"/>
+            </a:solidFill>
+          </a:ln>
+        </p:spPr>
+        <p:txBody>
+          <a:bodyPr vert="horz" lIns="91440" tIns="45720" rIns="91440" bIns="45720" rtlCol="0" anchor="ctr"/>
+          <a:lstStyle/>
+          <a:p>
+            <a:endParaRPr lang="en-US"/>
+          </a:p>
+        </p:txBody>
+      </p:sp>
+      <p:sp>
+        <p:nvSpPr>
+          <p:cNvPr id="5" name="Notes Placeholder 4"/>
+          <p:cNvSpPr>
+            <a:spLocks noGrp="1"/>
+          </p:cNvSpPr>
+          <p:nvPr>
+            <p:ph type="body" sz="quarter" idx="3"/>
+          </p:nvPr>
+        </p:nvSpPr>
+        <p:spPr>
+          <a:xfrm>
+            <a:off x="685800" y="4400550"/>
+            <a:ext cx="5486400" cy="3600450"/>
+          </a:xfrm>
+          <a:prstGeom prst="rect">
+            <a:avLst/>
+          </a:prstGeom>
+        </p:spPr>
+        <p:txBody>
+          <a:bodyPr vert="horz" lIns="91440" tIns="45720" rIns="91440" bIns="45720" rtlCol="0"/>
+          <a:lstStyle/>
+          <a:p>
+            <a:pPr lvl="0"/>
+            <a:r>
+              <a:rPr lang="en-US"/>
+              <a:t>Click to edit Master text styles</a:t>
+            </a:r>
+          </a:p>
+          <a:p>
+            <a:pPr lvl="1"/>
+            <a:r>
+              <a:rPr lang="en-US"/>
+              <a:t>Second level</a:t>
+            </a:r>
+          </a:p>
+          <a:p>
+            <a:pPr lvl="2"/>
+            <a:r>
+              <a:rPr lang="en-US"/>
+              <a:t>Third level</a:t>
+            </a:r>
+          </a:p>
+          <a:p>
+            <a:pPr lvl="3"/>
+            <a:r>
+              <a:rPr lang="en-US"/>
+              <a:t>Fourth level</a:t>
+            </a:r>
+          </a:p>
+          <a:p>
+            <a:pPr lvl="4"/>
+            <a:r>
+              <a:rPr lang="en-US"/>
+              <a:t>Fifth level</a:t>
+            </a:r>
+          </a:p>
+        </p:txBody>
+      </p:sp>
+      <p:sp>
+        <p:nvSpPr>
+          <p:cNvPr id="6" name="Footer Placeholder 5"/>
+          <p:cNvSpPr>
+            <a:spLocks noGrp="1"/>
+          </p:cNvSpPr>
+          <p:nvPr>
+            <p:ph type="ftr" sz="quarter" idx="4"/>
+          </p:nvPr>
+        </p:nvSpPr>
+        <p:spPr>
+          <a:xfrm>
+            <a:off x="0" y="8685213"/>
+            <a:ext cx="2971800" cy="458787"/>
+          </a:xfrm>
+          <a:prstGeom prst="rect">
+            <a:avLst/>
+          </a:prstGeom>
+        </p:spPr>
+        <p:txBody>
+          <a:bodyPr vert="horz" lIns="91440" tIns="45720" rIns="91440" bIns="45720" rtlCol="0" anchor="b"/>
+          <a:lstStyle>
+            <a:lvl1pPr algn="l">
+              <a:defRPr sz="1200"/>
+            </a:lvl1pPr>
+          </a:lstStyle>
+          <a:p>
+            <a:endParaRPr lang="en-US"/>
+          </a:p>
+        </p:txBody>
+      </p:sp>
+      <p:sp>
+        <p:nvSpPr>
+          <p:cNvPr id="7" name="Slide Number Placeholder 6"/>
+          <p:cNvSpPr>
+            <a:spLocks noGrp="1"/>
+          </p:cNvSpPr>
+          <p:nvPr>
+            <p:ph type="sldNum" sz="quarter" idx="5"/>
+          </p:nvPr>
+        </p:nvSpPr>
+        <p:spPr>
+          <a:xfrm>
+            <a:off x="3884613" y="8685213"/>
+            <a:ext cx="2971800" cy="458787"/>
+          </a:xfrm>
+          <a:prstGeom prst="rect">
+            <a:avLst/>
+          </a:prstGeom>
+        </p:spPr>
+        <p:txBody>
+          <a:bodyPr vert="horz" lIns="91440" tIns="45720" rIns="91440" bIns="45720" rtlCol="0" anchor="b"/>
+          <a:lstStyle>
+            <a:lvl1pPr algn="r">
+              <a:defRPr sz="1200"/>
+            </a:lvl1pPr>
+          </a:lstStyle>
+          <a:p>
+            <a:fld id="{433F17CF-9CB7-1F41-9F3B-9D2A483692EC}" type="slidenum">
+              <a:rPr lang="en-US" smtClean="0"/>
+              <a:t>‹#›</a:t>
+            </a:fld>
+            <a:endParaRPr lang="en-US"/>
+          </a:p>
+        </p:txBody>
+      </p:sp>
+    </p:spTree>
+    <p:extLst>
+      <p:ext uri="{BB962C8B-B14F-4D97-AF65-F5344CB8AC3E}">
+        <p14:creationId xmlns:p14="http://schemas.microsoft.com/office/powerpoint/2010/main" val="246278906"/>
+      </p:ext>
+    </p:extLst>
+  </p:cSld>
+  <p:clrMap bg1="lt1" tx1="dk1" bg2="lt2" tx2="dk2" accent1="accent1" accent2="accent2" accent3="accent3" accent4="accent4" accent5="accent5" accent6="accent6" hlink="hlink" folHlink="folHlink"/>
+  <p:notesStyle>
+    <a:lvl1pPr marL="0" algn="l" defTabSz="914400" rtl="0" eaLnBrk="1" latinLnBrk="0" hangingPunct="1">
+      <a:defRPr sz="1200" kern="1200">
+        <a:solidFill>
+          <a:schemeClr val="tx1"/>
+        </a:solidFill>
+        <a:latin typeface="+mn-lt"/>
+        <a:ea typeface="+mn-ea"/>
+        <a:cs typeface="+mn-cs"/>
+      </a:defRPr>
+    </a:lvl1pPr>
+    <a:lvl2pPr marL="457200" algn="l" defTabSz="914400" rtl="0" eaLnBrk="1" latinLnBrk="0" hangingPunct="1">
+      <a:defRPr sz="1200" kern="1200">
+        <a:solidFill>
+          <a:schemeClr val="tx1"/>
+        </a:solidFill>
+        <a:latin typeface="+mn-lt"/>
+        <a:ea typeface="+mn-ea"/>
+        <a:cs typeface="+mn-cs"/>
+      </a:defRPr>
+    </a:lvl2pPr>
+    <a:lvl3pPr marL="914400" algn="l" defTabSz="914400" rtl="0" eaLnBrk="1" latinLnBrk="0" hangingPunct="1">
+      <a:defRPr sz="1200" kern="1200">
+        <a:solidFill>
+          <a:schemeClr val="tx1"/>
+        </a:solidFill>
+        <a:latin typeface="+mn-lt"/>
+        <a:ea typeface="+mn-ea"/>
+        <a:cs typeface="+mn-cs"/>
+      </a:defRPr>
+    </a:lvl3pPr>
+    <a:lvl4pPr marL="1371600" algn="l" defTabSz="914400" rtl="0" eaLnBrk="1" latinLnBrk="0" hangingPunct="1">
+      <a:defRPr sz="1200" kern="1200">
+        <a:solidFill>
+          <a:schemeClr val="tx1"/>
+        </a:solidFill>
+        <a:latin typeface="+mn-lt"/>
+        <a:ea typeface="+mn-ea"/>
+        <a:cs typeface="+mn-cs"/>
+      </a:defRPr>
+    </a:lvl4pPr>
+    <a:lvl5pPr marL="1828800" algn="l" defTabSz="914400" rtl="0" eaLnBrk="1" latinLnBrk="0" hangingPunct="1">
+      <a:defRPr sz="1200" kern="1200">
+        <a:solidFill>
+          <a:schemeClr val="tx1"/>
+        </a:solidFill>
+        <a:latin typeface="+mn-lt"/>
+        <a:ea typeface="+mn-ea"/>
+        <a:cs typeface="+mn-cs"/>
+      </a:defRPr>
+    </a:lvl5pPr>
+    <a:lvl6pPr marL="2286000" algn="l" defTabSz="914400" rtl="0" eaLnBrk="1" latinLnBrk="0" hangingPunct="1">
+      <a:defRPr sz="1200" kern="1200">
+        <a:solidFill>
+          <a:schemeClr val="tx1"/>
+        </a:solidFill>
+        <a:latin typeface="+mn-lt"/>
+        <a:ea typeface="+mn-ea"/>
+        <a:cs typeface="+mn-cs"/>
+      </a:defRPr>
+    </a:lvl6pPr>
+    <a:lvl7pPr marL="2743200" algn="l" defTabSz="914400" rtl="0" eaLnBrk="1" latinLnBrk="0" hangingPunct="1">
+      <a:defRPr sz="1200" kern="1200">
+        <a:solidFill>
+          <a:schemeClr val="tx1"/>
+        </a:solidFill>
+        <a:latin typeface="+mn-lt"/>
+        <a:ea typeface="+mn-ea"/>
+        <a:cs typeface="+mn-cs"/>
+      </a:defRPr>
+    </a:lvl7pPr>
+    <a:lvl8pPr marL="3200400" algn="l" defTabSz="914400" rtl="0" eaLnBrk="1" latinLnBrk="0" hangingPunct="1">
+      <a:defRPr sz="1200" kern="1200">
+        <a:solidFill>
+          <a:schemeClr val="tx1"/>
+        </a:solidFill>
+        <a:latin typeface="+mn-lt"/>
+        <a:ea typeface="+mn-ea"/>
+        <a:cs typeface="+mn-cs"/>
+      </a:defRPr>
+    </a:lvl8pPr>
+    <a:lvl9pPr marL="3657600" algn="l" defTabSz="914400" rtl="0" eaLnBrk="1" latinLnBrk="0" hangingPunct="1">
+      <a:defRPr sz="1200" kern="1200">
+        <a:solidFill>
+          <a:schemeClr val="tx1"/>
+        </a:solidFill>
+        <a:latin typeface="+mn-lt"/>
+        <a:ea typeface="+mn-ea"/>
+        <a:cs typeface="+mn-cs"/>
+      </a:defRPr>
+    </a:lvl9pPr>
+  </p:notesStyle>
+</p:notesMaster>
+</file>
+
+<file path=ppt/notesSlides/notesSlide1.xml><?xml version="1.0" encoding="utf-8"?>
+<p:notes xmlns:a="http://schemas.openxmlformats.org/drawingml/2006/main" xmlns:r="http://schemas.openxmlformats.org/officeDocument/2006/relationships" xmlns:p="http://schemas.openxmlformats.org/presentationml/2006/main">
+  <p:cSld>
+    <p:spTree>
+      <p:nvGrpSpPr>
+        <p:cNvPr id="1" name=""/>
+        <p:cNvGrpSpPr/>
+        <p:nvPr/>
+      </p:nvGrpSpPr>
+      <p:grpSpPr>
+        <a:xfrm>
+          <a:off x="0" y="0"/>
+          <a:ext cx="0" cy="0"/>
+          <a:chOff x="0" y="0"/>
+          <a:chExt cx="0" cy="0"/>
+        </a:xfrm>
+      </p:grpSpPr>
+      <p:sp>
+        <p:nvSpPr>
+          <p:cNvPr id="2" name="Slide Image Placeholder 1"/>
+          <p:cNvSpPr>
+            <a:spLocks noGrp="1" noRot="1" noChangeAspect="1"/>
+          </p:cNvSpPr>
+          <p:nvPr>
+            <p:ph type="sldImg"/>
+          </p:nvPr>
+        </p:nvSpPr>
+        <p:spPr/>
+        <p:txBody>
+          <a:bodyPr/>
+          <a:lstStyle/>
+          <a:p>
+            <a:endParaRPr lang="en-US"/>
+          </a:p>
+        </p:txBody>
+      </p:sp>
+      <p:sp>
+        <p:nvSpPr>
+          <p:cNvPr id="3" name="Notes Placeholder 2"/>
+          <p:cNvSpPr>
+            <a:spLocks noGrp="1"/>
+          </p:cNvSpPr>
+          <p:nvPr>
+            <p:ph type="body" idx="1"/>
+          </p:nvPr>
+        </p:nvSpPr>
+        <p:spPr/>
+        <p:txBody>
+          <a:bodyPr/>
+          <a:lstStyle/>
+          <a:p>
+            <a:pPr marL="0" marR="0" indent="0" algn="l" defTabSz="914400" rtl="0" eaLnBrk="1" fontAlgn="auto" latinLnBrk="0" hangingPunct="1">
+              <a:lnSpc>
+                <a:spcPct val="100000"/>
+              </a:lnSpc>
+              <a:spcBef>
+                <a:spcPts val="0"/>
+              </a:spcBef>
+              <a:spcAft>
+                <a:spcPts val="0"/>
+              </a:spcAft>
+              <a:buClrTx/>
+              <a:buSzTx/>
+              <a:buFontTx/>
+              <a:buNone/>
+              <a:tabLst/>
+              <a:defRPr/>
+            </a:pPr>
+            <a:r>
+              <a:rPr lang="en-US" sz="2800" b="0" i="0" u="none" strike="noStrike" baseline="0" dirty="0">
+                <a:solidFill>
+                  <a:srgbClr val="E3E3E3"/>
+                </a:solidFill>
+                <a:effectLst/>
+                <a:latin typeface="Google Sans Text"/>
+              </a:rPr>
+              <a:t>Measuring and comparing a building’s energy use to similar buildings, past consumption, </a:t>
+            </a:r>
+          </a:p>
+          <a:p>
+            <a:pPr marL="0" marR="0" indent="0" algn="l" defTabSz="914400" rtl="0" eaLnBrk="1" fontAlgn="auto" latinLnBrk="0" hangingPunct="1">
+              <a:lnSpc>
+                <a:spcPct val="100000"/>
+              </a:lnSpc>
+              <a:spcBef>
+                <a:spcPts val="0"/>
+              </a:spcBef>
+              <a:spcAft>
+                <a:spcPts val="0"/>
+              </a:spcAft>
+              <a:buClrTx/>
+              <a:buSzTx/>
+              <a:buFontTx/>
+              <a:buNone/>
+              <a:tabLst/>
+              <a:defRPr/>
+            </a:pPr>
+            <a:r>
+              <a:rPr lang="en-US" sz="2800" b="0" i="0" u="none" strike="noStrike" baseline="0" dirty="0">
+                <a:solidFill>
+                  <a:srgbClr val="E3E3E3"/>
+                </a:solidFill>
+                <a:effectLst/>
+                <a:latin typeface="Google Sans Text"/>
+              </a:rPr>
+              <a:t>or a reference performance level.</a:t>
+            </a:r>
+          </a:p>
+          <a:p>
+            <a:pPr marL="0" marR="0" lvl="0" indent="0" algn="l" defTabSz="914400" rtl="0" eaLnBrk="1" fontAlgn="auto" latinLnBrk="0" hangingPunct="1">
+              <a:lnSpc>
+                <a:spcPct val="100000"/>
+              </a:lnSpc>
+              <a:spcBef>
+                <a:spcPts val="0"/>
+              </a:spcBef>
+              <a:spcAft>
+                <a:spcPts val="0"/>
+              </a:spcAft>
+              <a:buClrTx/>
+              <a:buSzTx/>
+              <a:buFontTx/>
+              <a:buNone/>
+              <a:tabLst/>
+              <a:defRPr/>
+            </a:pPr>
+            <a:r>
+              <a:rPr lang="en-US" sz="2800" dirty="0"/>
+              <a:t>Energy Star: 1–100 score, which rates energy performance in comparison to </a:t>
+            </a:r>
+          </a:p>
+          <a:p>
+            <a:pPr marL="0" marR="0" lvl="0" indent="0" algn="l" defTabSz="914400" rtl="0" eaLnBrk="1" fontAlgn="auto" latinLnBrk="0" hangingPunct="1">
+              <a:lnSpc>
+                <a:spcPct val="100000"/>
+              </a:lnSpc>
+              <a:spcBef>
+                <a:spcPts val="0"/>
+              </a:spcBef>
+              <a:spcAft>
+                <a:spcPts val="0"/>
+              </a:spcAft>
+              <a:buClrTx/>
+              <a:buSzTx/>
+              <a:buFontTx/>
+              <a:buNone/>
+              <a:tabLst/>
+              <a:defRPr/>
+            </a:pPr>
+            <a:r>
+              <a:rPr lang="en-US" sz="2800" dirty="0"/>
+              <a:t>similar buildings across the country</a:t>
+            </a:r>
+          </a:p>
+          <a:p>
+            <a:pPr marL="0" marR="0" indent="0" algn="l" defTabSz="914400" rtl="0" eaLnBrk="1" fontAlgn="auto" latinLnBrk="0" hangingPunct="1">
+              <a:lnSpc>
+                <a:spcPct val="100000"/>
+              </a:lnSpc>
+              <a:spcBef>
+                <a:spcPts val="0"/>
+              </a:spcBef>
+              <a:spcAft>
+                <a:spcPts val="0"/>
+              </a:spcAft>
+              <a:buClrTx/>
+              <a:buSzTx/>
+              <a:buFontTx/>
+              <a:buNone/>
+              <a:tabLst/>
+              <a:defRPr/>
+            </a:pPr>
+            <a:endParaRPr lang="en-US" sz="2800" baseline="0" dirty="0"/>
+          </a:p>
+        </p:txBody>
+      </p:sp>
+      <p:sp>
+        <p:nvSpPr>
+          <p:cNvPr id="4" name="Slide Number Placeholder 3"/>
+          <p:cNvSpPr>
+            <a:spLocks noGrp="1"/>
+          </p:cNvSpPr>
+          <p:nvPr>
+            <p:ph type="sldNum" sz="quarter" idx="5"/>
+          </p:nvPr>
+        </p:nvSpPr>
+        <p:spPr/>
+        <p:txBody>
+          <a:bodyPr/>
+          <a:lstStyle/>
+          <a:p>
+            <a:fld id="{433F17CF-9CB7-1F41-9F3B-9D2A483692EC}" type="slidenum">
+              <a:rPr lang="en-US" smtClean="0"/>
+              <a:t>3</a:t>
+            </a:fld>
+            <a:endParaRPr lang="en-US"/>
+          </a:p>
+        </p:txBody>
+      </p:sp>
+    </p:spTree>
+    <p:extLst>
+      <p:ext uri="{BB962C8B-B14F-4D97-AF65-F5344CB8AC3E}">
+        <p14:creationId xmlns:p14="http://schemas.microsoft.com/office/powerpoint/2010/main" val="2176010800"/>
+      </p:ext>
+    </p:extLst>
+  </p:cSld>
+  <p:clrMapOvr>
+    <a:masterClrMapping/>
+  </p:clrMapOvr>
+</p:notes>
+</file>
+
+<file path=ppt/notesSlides/notesSlide2.xml><?xml version="1.0" encoding="utf-8"?>
+<p:notes xmlns:a="http://schemas.openxmlformats.org/drawingml/2006/main" xmlns:r="http://schemas.openxmlformats.org/officeDocument/2006/relationships" xmlns:p="http://schemas.openxmlformats.org/presentationml/2006/main">
+  <p:cSld>
+    <p:spTree>
+      <p:nvGrpSpPr>
+        <p:cNvPr id="1" name=""/>
+        <p:cNvGrpSpPr/>
+        <p:nvPr/>
+      </p:nvGrpSpPr>
+      <p:grpSpPr>
+        <a:xfrm>
+          <a:off x="0" y="0"/>
+          <a:ext cx="0" cy="0"/>
+          <a:chOff x="0" y="0"/>
+          <a:chExt cx="0" cy="0"/>
+        </a:xfrm>
+      </p:grpSpPr>
+      <p:sp>
+        <p:nvSpPr>
+          <p:cNvPr id="2" name="Slide Image Placeholder 1"/>
+          <p:cNvSpPr>
+            <a:spLocks noGrp="1" noRot="1" noChangeAspect="1"/>
+          </p:cNvSpPr>
+          <p:nvPr>
+            <p:ph type="sldImg"/>
+          </p:nvPr>
+        </p:nvSpPr>
+        <p:spPr/>
+        <p:txBody>
+          <a:bodyPr/>
+          <a:lstStyle/>
+          <a:p>
+            <a:endParaRPr lang="en-US"/>
+          </a:p>
+        </p:txBody>
+      </p:sp>
+      <p:sp>
+        <p:nvSpPr>
+          <p:cNvPr id="3" name="Notes Placeholder 2"/>
+          <p:cNvSpPr>
+            <a:spLocks noGrp="1"/>
+          </p:cNvSpPr>
+          <p:nvPr>
+            <p:ph type="body" idx="1"/>
+          </p:nvPr>
+        </p:nvSpPr>
+        <p:spPr/>
+        <p:txBody>
+          <a:bodyPr/>
+          <a:lstStyle/>
+          <a:p>
+            <a:endParaRPr lang="en-US"/>
+          </a:p>
+        </p:txBody>
+      </p:sp>
+      <p:sp>
+        <p:nvSpPr>
+          <p:cNvPr id="4" name="Slide Number Placeholder 3"/>
+          <p:cNvSpPr>
+            <a:spLocks noGrp="1"/>
+          </p:cNvSpPr>
+          <p:nvPr>
+            <p:ph type="sldNum" sz="quarter" idx="5"/>
+          </p:nvPr>
+        </p:nvSpPr>
+        <p:spPr/>
+        <p:txBody>
+          <a:bodyPr/>
+          <a:lstStyle/>
+          <a:p>
+            <a:fld id="{433F17CF-9CB7-1F41-9F3B-9D2A483692EC}" type="slidenum">
+              <a:rPr lang="en-US" smtClean="0"/>
+              <a:t>4</a:t>
+            </a:fld>
+            <a:endParaRPr lang="en-US"/>
+          </a:p>
+        </p:txBody>
+      </p:sp>
+    </p:spTree>
+    <p:extLst>
+      <p:ext uri="{BB962C8B-B14F-4D97-AF65-F5344CB8AC3E}">
+        <p14:creationId xmlns:p14="http://schemas.microsoft.com/office/powerpoint/2010/main" val="3353820539"/>
+      </p:ext>
+    </p:extLst>
+  </p:cSld>
+  <p:clrMapOvr>
+    <a:masterClrMapping/>
+  </p:clrMapOvr>
+</p:notes>
 </file>
 
 <file path=ppt/slideLayouts/slideLayout1.xml><?xml version="1.0" encoding="utf-8"?>
@@ -9044,11 +9700,26 @@
             <p:ph type="ctrTitle"/>
           </p:nvPr>
         </p:nvSpPr>
-        <p:spPr/>
-        <p:txBody>
-          <a:bodyPr/>
+        <p:spPr>
+          <a:xfrm>
+            <a:off x="451821" y="451821"/>
+            <a:ext cx="11521440" cy="1731981"/>
+          </a:xfrm>
+        </p:spPr>
+        <p:txBody>
+          <a:bodyPr>
+            <a:normAutofit/>
+          </a:bodyPr>
           <a:lstStyle/>
           <a:p>
+            <a:r>
+              <a:rPr lang="en-US" sz="4400" dirty="0">
+                <a:solidFill>
+                  <a:schemeClr val="tx1"/>
+                </a:solidFill>
+              </a:rPr>
+              <a:t>Which types of buildings in Montgomery County are Energy – Efficient?</a:t>
+            </a:r>
             <a:endParaRPr lang="en-US" dirty="0">
               <a:solidFill>
                 <a:schemeClr val="tx1"/>
@@ -9073,19 +9744,53 @@
             <p:ph type="subTitle" idx="1"/>
           </p:nvPr>
         </p:nvSpPr>
-        <p:spPr/>
-        <p:txBody>
-          <a:bodyPr/>
+        <p:spPr>
+          <a:xfrm>
+            <a:off x="2420471" y="2635625"/>
+            <a:ext cx="7691717" cy="3227294"/>
+          </a:xfrm>
+        </p:spPr>
+        <p:txBody>
+          <a:bodyPr>
+            <a:normAutofit/>
+          </a:bodyPr>
           <a:lstStyle/>
           <a:p>
             <a:r>
-              <a:rPr lang="en-US">
+              <a:rPr lang="en-US" sz="3200" dirty="0">
                 <a:solidFill>
                   <a:schemeClr val="tx1"/>
                 </a:solidFill>
               </a:rPr>
               <a:t>Alissa Ouspenskaia</a:t>
             </a:r>
+          </a:p>
+          <a:p>
+            <a:r>
+              <a:rPr lang="en-US" sz="3200" dirty="0">
+                <a:solidFill>
+                  <a:schemeClr val="tx1"/>
+                </a:solidFill>
+              </a:rPr>
+              <a:t>DATA 110 </a:t>
+            </a:r>
+          </a:p>
+          <a:p>
+            <a:r>
+              <a:rPr lang="en-US" sz="3200" dirty="0">
+                <a:solidFill>
+                  <a:schemeClr val="tx1"/>
+                </a:solidFill>
+              </a:rPr>
+              <a:t>Montgomery College, Fall 2026</a:t>
+            </a:r>
+          </a:p>
+          <a:p>
+            <a:endParaRPr lang="en-US" sz="3200" dirty="0">
+              <a:solidFill>
+                <a:schemeClr val="tx1"/>
+              </a:solidFill>
+            </a:endParaRPr>
           </a:p>
         </p:txBody>
       </p:sp>
@@ -9140,7 +9845,66 @@
           <a:bodyPr/>
           <a:lstStyle/>
           <a:p>
-            <a:endParaRPr lang="en-US"/>
+            <a:r>
+              <a:rPr lang="en-US" dirty="0"/>
+              <a:t>Source Dataset</a:t>
+            </a:r>
+          </a:p>
+        </p:txBody>
+      </p:sp>
+      <p:sp>
+        <p:nvSpPr>
+          <p:cNvPr id="3" name="TextBox 2">
+            <a:extLst>
+              <a:ext uri="{FF2B5EF4-FFF2-40B4-BE49-F238E27FC236}">
+                <a16:creationId xmlns:a16="http://schemas.microsoft.com/office/drawing/2014/main" id="{6D7B41C1-F479-119B-6FA0-B15CF19CB19B}"/>
+              </a:ext>
+            </a:extLst>
+          </p:cNvPr>
+          <p:cNvSpPr txBox="1"/>
+          <p:nvPr/>
+        </p:nvSpPr>
+        <p:spPr>
+          <a:xfrm>
+            <a:off x="1021976" y="1188720"/>
+            <a:ext cx="8127403" cy="1754326"/>
+          </a:xfrm>
+          <a:prstGeom prst="rect">
+            <a:avLst/>
+          </a:prstGeom>
+          <a:noFill/>
+        </p:spPr>
+        <p:txBody>
+          <a:bodyPr wrap="square">
+            <a:spAutoFit/>
+          </a:bodyPr>
+          <a:lstStyle/>
+          <a:p>
+            <a:r>
+              <a:rPr lang="en-US" sz="1800" dirty="0"/>
+              <a:t>2023 Energy Benchmarking All Sites</a:t>
+            </a:r>
+          </a:p>
+          <a:p>
+            <a:endParaRPr lang="en-US" dirty="0"/>
+          </a:p>
+          <a:p>
+            <a:endParaRPr lang="en-US" sz="1800" dirty="0"/>
+          </a:p>
+          <a:p>
+            <a:r>
+              <a:rPr lang="en-US" dirty="0">
+                <a:hlinkClick r:id="rId2"/>
+              </a:rPr>
+              <a:t>https://data.montgomerycountymd.gov</a:t>
+            </a:r>
+            <a:endParaRPr lang="en-US" dirty="0"/>
+          </a:p>
+          <a:p>
+            <a:endParaRPr lang="en-US" sz="1800" dirty="0"/>
+          </a:p>
+          <a:p>
+            <a:endParaRPr lang="en-US" sz="1800" dirty="0"/>
           </a:p>
         </p:txBody>
       </p:sp>
@@ -9190,12 +9954,66 @@
             <p:ph type="title"/>
           </p:nvPr>
         </p:nvSpPr>
-        <p:spPr/>
-        <p:txBody>
-          <a:bodyPr/>
+        <p:spPr>
+          <a:xfrm>
+            <a:off x="1014153" y="953746"/>
+            <a:ext cx="7063047" cy="3729090"/>
+          </a:xfrm>
+        </p:spPr>
+        <p:txBody>
+          <a:bodyPr>
+            <a:normAutofit fontScale="90000"/>
+          </a:bodyPr>
           <a:lstStyle/>
           <a:p>
-            <a:endParaRPr lang="en-US"/>
+            <a:r>
+              <a:rPr lang="en-US" dirty="0"/>
+              <a:t>What is Benchmarking?</a:t>
+            </a:r>
+            <a:br>
+              <a:rPr lang="en-US" dirty="0"/>
+            </a:br>
+            <a:br>
+              <a:rPr lang="en-US" dirty="0"/>
+            </a:br>
+            <a:br>
+              <a:rPr lang="en-US" dirty="0"/>
+            </a:br>
+            <a:br>
+              <a:rPr lang="en-US" dirty="0"/>
+            </a:br>
+            <a:br>
+              <a:rPr lang="en-US" dirty="0"/>
+            </a:br>
+            <a:br>
+              <a:rPr lang="en-US" dirty="0"/>
+            </a:br>
+            <a:br>
+              <a:rPr lang="en-US" dirty="0"/>
+            </a:br>
+            <a:br>
+              <a:rPr lang="en-US" dirty="0"/>
+            </a:br>
+            <a:r>
+              <a:rPr lang="en-US" dirty="0"/>
+              <a:t>Energy Star Score</a:t>
+            </a:r>
+            <a:br>
+              <a:rPr lang="en-US" dirty="0"/>
+            </a:br>
+            <a:br>
+              <a:rPr lang="en-US" dirty="0"/>
+            </a:br>
+            <a:br>
+              <a:rPr lang="en-US" dirty="0"/>
+            </a:br>
+            <a:br>
+              <a:rPr lang="en-US" dirty="0"/>
+            </a:br>
+            <a:br>
+              <a:rPr lang="en-US" dirty="0"/>
+            </a:br>
+            <a:endParaRPr lang="en-US" b="1" dirty="0"/>
           </a:p>
         </p:txBody>
       </p:sp>
@@ -9203,6 +10021,214 @@
     <p:extLst>
       <p:ext uri="{BB962C8B-B14F-4D97-AF65-F5344CB8AC3E}">
         <p14:creationId xmlns:p14="http://schemas.microsoft.com/office/powerpoint/2010/main" val="1086737087"/>
+      </p:ext>
+    </p:extLst>
+  </p:cSld>
+  <p:clrMapOvr>
+    <a:masterClrMapping/>
+  </p:clrMapOvr>
+</p:sld>
+</file>
+
+<file path=ppt/slides/slide4.xml><?xml version="1.0" encoding="utf-8"?>
+<p:sld xmlns:a="http://schemas.openxmlformats.org/drawingml/2006/main" xmlns:r="http://schemas.openxmlformats.org/officeDocument/2006/relationships" xmlns:p="http://schemas.openxmlformats.org/presentationml/2006/main">
+  <p:cSld>
+    <p:spTree>
+      <p:nvGrpSpPr>
+        <p:cNvPr id="1" name=""/>
+        <p:cNvGrpSpPr/>
+        <p:nvPr/>
+      </p:nvGrpSpPr>
+      <p:grpSpPr>
+        <a:xfrm>
+          <a:off x="0" y="0"/>
+          <a:ext cx="0" cy="0"/>
+          <a:chOff x="0" y="0"/>
+          <a:chExt cx="0" cy="0"/>
+        </a:xfrm>
+      </p:grpSpPr>
+      <p:sp>
+        <p:nvSpPr>
+          <p:cNvPr id="2" name="Title 1">
+            <a:extLst>
+              <a:ext uri="{FF2B5EF4-FFF2-40B4-BE49-F238E27FC236}">
+                <a16:creationId xmlns:a16="http://schemas.microsoft.com/office/drawing/2014/main" id="{E1E3B2DF-F9FD-24F2-0A9D-52887C066FE9}"/>
+              </a:ext>
+            </a:extLst>
+          </p:cNvPr>
+          <p:cNvSpPr>
+            <a:spLocks noGrp="1"/>
+          </p:cNvSpPr>
+          <p:nvPr>
+            <p:ph type="title"/>
+          </p:nvPr>
+        </p:nvSpPr>
+        <p:spPr/>
+        <p:txBody>
+          <a:bodyPr/>
+          <a:lstStyle/>
+          <a:p>
+            <a:r>
+              <a:rPr lang="en-US" dirty="0"/>
+              <a:t>Sources and Notes</a:t>
+            </a:r>
+          </a:p>
+        </p:txBody>
+      </p:sp>
+      <p:sp>
+        <p:nvSpPr>
+          <p:cNvPr id="4" name="TextBox 3">
+            <a:extLst>
+              <a:ext uri="{FF2B5EF4-FFF2-40B4-BE49-F238E27FC236}">
+                <a16:creationId xmlns:a16="http://schemas.microsoft.com/office/drawing/2014/main" id="{F2D671FF-C8EA-E68E-64CF-64D869BFE1A0}"/>
+              </a:ext>
+            </a:extLst>
+          </p:cNvPr>
+          <p:cNvSpPr txBox="1"/>
+          <p:nvPr/>
+        </p:nvSpPr>
+        <p:spPr>
+          <a:xfrm>
+            <a:off x="935914" y="1624405"/>
+            <a:ext cx="9854005" cy="6186309"/>
+          </a:xfrm>
+          <a:prstGeom prst="rect">
+            <a:avLst/>
+          </a:prstGeom>
+          <a:noFill/>
+        </p:spPr>
+        <p:txBody>
+          <a:bodyPr wrap="square">
+            <a:spAutoFit/>
+          </a:bodyPr>
+          <a:lstStyle/>
+          <a:p>
+            <a:r>
+              <a:rPr lang="en-US" dirty="0"/>
+              <a:t>2023 Energy Benchmarking All Sites</a:t>
+            </a:r>
+          </a:p>
+          <a:p>
+            <a:r>
+              <a:rPr lang="en-US" dirty="0"/>
+              <a:t>The Energy Benchmarking Law requires the County to make annually reported energy benchmarking information readily available to the public. This dataset reflects data received by the publish date and does not include individually attributable benchmarking data for buildings in Group 5, as CY 2023 was the first year that these buildings were required to report to DEP.</a:t>
+            </a:r>
+          </a:p>
+          <a:p>
+            <a:r>
+              <a:rPr lang="en-US" dirty="0"/>
+              <a:t>September 23, 2025</a:t>
+            </a:r>
+          </a:p>
+          <a:p>
+            <a:r>
+              <a:rPr lang="en-US" dirty="0"/>
+              <a:t>Dataset Owner: Kathy Luh</a:t>
+            </a:r>
+          </a:p>
+          <a:p>
+            <a:r>
+              <a:rPr lang="en-US" dirty="0"/>
+              <a:t>27 columns 1846 rows</a:t>
+            </a:r>
+          </a:p>
+          <a:p>
+            <a:endParaRPr lang="en-US" sz="1800" b="0" i="0" dirty="0">
+              <a:solidFill>
+                <a:srgbClr val="9454C3"/>
+              </a:solidFill>
+              <a:effectLst/>
+              <a:latin typeface="+mn-lt"/>
+              <a:hlinkClick r:id="rId3">
+                <a:extLst>
+                  <a:ext uri="{A12FA001-AC4F-418D-AE19-62706E023703}">
+                    <ahyp:hlinkClr xmlns:ahyp="http://schemas.microsoft.com/office/drawing/2018/hyperlinkcolor" val="tx"/>
+                  </a:ext>
+                </a:extLst>
+              </a:hlinkClick>
+            </a:endParaRPr>
+          </a:p>
+          <a:p>
+            <a:endParaRPr lang="en-US" dirty="0">
+              <a:hlinkClick r:id="rId3">
+                <a:extLst>
+                  <a:ext uri="{A12FA001-AC4F-418D-AE19-62706E023703}">
+                    <ahyp:hlinkClr xmlns:ahyp="http://schemas.microsoft.com/office/drawing/2018/hyperlinkcolor" val="tx"/>
+                  </a:ext>
+                </a:extLst>
+              </a:hlinkClick>
+            </a:endParaRPr>
+          </a:p>
+          <a:p>
+            <a:r>
+              <a:rPr lang="en-US" dirty="0">
+                <a:hlinkClick r:id="rId3">
+                  <a:extLst>
+                    <a:ext uri="{A12FA001-AC4F-418D-AE19-62706E023703}">
+                      <ahyp:hlinkClr xmlns:ahyp="http://schemas.microsoft.com/office/drawing/2018/hyperlinkcolor" val="tx"/>
+                    </a:ext>
+                  </a:extLst>
+                </a:hlinkClick>
+              </a:rPr>
+              <a:t>https://data.montgomerycountymd.gov/Environment/2023-Energy-Benchmarking-All-Sites/ensr-8pr2/about_data</a:t>
+            </a:r>
+            <a:endParaRPr lang="en-US" dirty="0"/>
+          </a:p>
+          <a:p>
+            <a:endParaRPr lang="en-US" dirty="0"/>
+          </a:p>
+          <a:p>
+            <a:r>
+              <a:rPr lang="en-US" dirty="0">
+                <a:hlinkClick r:id="rId4">
+                  <a:extLst>
+                    <a:ext uri="{A12FA001-AC4F-418D-AE19-62706E023703}">
+                      <ahyp:hlinkClr xmlns:ahyp="http://schemas.microsoft.com/office/drawing/2018/hyperlinkcolor" val="tx"/>
+                    </a:ext>
+                  </a:extLst>
+                </a:hlinkClick>
+              </a:rPr>
+              <a:t>https://www.energystar.gov/buildings/benchmark</a:t>
+            </a:r>
+            <a:endParaRPr lang="en-US" dirty="0"/>
+          </a:p>
+          <a:p>
+            <a:endParaRPr lang="en-US" sz="1800" b="0" i="0" dirty="0">
+              <a:effectLst/>
+              <a:latin typeface="+mn-lt"/>
+            </a:endParaRPr>
+          </a:p>
+          <a:p>
+            <a:r>
+              <a:rPr lang="en-US" u="sng" dirty="0"/>
+              <a:t>https://www.energystar.gov/buildings/about-us</a:t>
+            </a:r>
+            <a:endParaRPr lang="en-US" sz="1800" b="0" i="0" u="sng" dirty="0">
+              <a:effectLst/>
+              <a:latin typeface="+mn-lt"/>
+            </a:endParaRPr>
+          </a:p>
+          <a:p>
+            <a:endParaRPr lang="en-US" dirty="0"/>
+          </a:p>
+          <a:p>
+            <a:endParaRPr lang="en-US" dirty="0"/>
+          </a:p>
+          <a:p>
+            <a:endParaRPr lang="en-US" dirty="0"/>
+          </a:p>
+          <a:p>
+            <a:endParaRPr lang="en-US" dirty="0"/>
+          </a:p>
+          <a:p>
+            <a:endParaRPr lang="en-US" dirty="0"/>
+          </a:p>
+        </p:txBody>
+      </p:sp>
+    </p:spTree>
+    <p:extLst>
+      <p:ext uri="{BB962C8B-B14F-4D97-AF65-F5344CB8AC3E}">
+        <p14:creationId xmlns:p14="http://schemas.microsoft.com/office/powerpoint/2010/main" val="708741681"/>
       </p:ext>
     </p:extLst>
   </p:cSld>
@@ -9411,4 +10437,319 @@
     </a:ext>
   </a:extLst>
 </a:theme>
+</file>
+
+<file path=ppt/theme/theme2.xml><?xml version="1.0" encoding="utf-8"?>
+<a:theme xmlns:a="http://schemas.openxmlformats.org/drawingml/2006/main" name="Office Theme">
+  <a:themeElements>
+    <a:clrScheme name="Office">
+      <a:dk1>
+        <a:sysClr val="windowText" lastClr="000000"/>
+      </a:dk1>
+      <a:lt1>
+        <a:sysClr val="window" lastClr="FFFFFF"/>
+      </a:lt1>
+      <a:dk2>
+        <a:srgbClr val="0E2841"/>
+      </a:dk2>
+      <a:lt2>
+        <a:srgbClr val="E8E8E8"/>
+      </a:lt2>
+      <a:accent1>
+        <a:srgbClr val="156082"/>
+      </a:accent1>
+      <a:accent2>
+        <a:srgbClr val="E97132"/>
+      </a:accent2>
+      <a:accent3>
+        <a:srgbClr val="196B24"/>
+      </a:accent3>
+      <a:accent4>
+        <a:srgbClr val="0F9ED5"/>
+      </a:accent4>
+      <a:accent5>
+        <a:srgbClr val="A02B93"/>
+      </a:accent5>
+      <a:accent6>
+        <a:srgbClr val="4EA72E"/>
+      </a:accent6>
+      <a:hlink>
+        <a:srgbClr val="467886"/>
+      </a:hlink>
+      <a:folHlink>
+        <a:srgbClr val="96607D"/>
+      </a:folHlink>
+    </a:clrScheme>
+    <a:fontScheme name="Office">
+      <a:majorFont>
+        <a:latin typeface="Aptos Display" panose="02110004020202020204"/>
+        <a:ea typeface=""/>
+        <a:cs typeface=""/>
+        <a:font script="Jpan" typeface="游ゴシック Light"/>
+        <a:font script="Hang" typeface="맑은 고딕"/>
+        <a:font script="Hans" typeface="等线 Light"/>
+        <a:font script="Hant" typeface="新細明體"/>
+        <a:font script="Arab" typeface="Times New Roman"/>
+        <a:font script="Hebr" typeface="Times New Roman"/>
+        <a:font script="Thai" typeface="Angsana New"/>
+        <a:font script="Ethi" typeface="Nyala"/>
+        <a:font script="Beng" typeface="Vrinda"/>
+        <a:font script="Gujr" typeface="Shruti"/>
+        <a:font script="Khmr" typeface="MoolBoran"/>
+        <a:font script="Knda" typeface="Tunga"/>
+        <a:font script="Guru" typeface="Raavi"/>
+        <a:font script="Cans" typeface="Euphemia"/>
+        <a:font script="Cher" typeface="Plantagenet Cherokee"/>
+        <a:font script="Yiii" typeface="Microsoft Yi Baiti"/>
+        <a:font script="Tibt" typeface="Microsoft Himalaya"/>
+        <a:font script="Thaa" typeface="MV Boli"/>
+        <a:font script="Deva" typeface="Mangal"/>
+        <a:font script="Telu" typeface="Gautami"/>
+        <a:font script="Taml" typeface="Latha"/>
+        <a:font script="Syrc" typeface="Estrangelo Edessa"/>
+        <a:font script="Orya" typeface="Kalinga"/>
+        <a:font script="Mlym" typeface="Kartika"/>
+        <a:font script="Laoo" typeface="DokChampa"/>
+        <a:font script="Sinh" typeface="Iskoola Pota"/>
+        <a:font script="Mong" typeface="Mongolian Baiti"/>
+        <a:font script="Viet" typeface="Times New Roman"/>
+        <a:font script="Uigh" typeface="Microsoft Uighur"/>
+        <a:font script="Geor" typeface="Sylfaen"/>
+        <a:font script="Armn" typeface="Arial"/>
+        <a:font script="Bugi" typeface="Leelawadee UI"/>
+        <a:font script="Bopo" typeface="Microsoft JhengHei"/>
+        <a:font script="Java" typeface="Javanese Text"/>
+        <a:font script="Lisu" typeface="Segoe UI"/>
+        <a:font script="Mymr" typeface="Myanmar Text"/>
+        <a:font script="Nkoo" typeface="Ebrima"/>
+        <a:font script="Olck" typeface="Nirmala UI"/>
+        <a:font script="Osma" typeface="Ebrima"/>
+        <a:font script="Phag" typeface="Phagspa"/>
+        <a:font script="Syrn" typeface="Estrangelo Edessa"/>
+        <a:font script="Syrj" typeface="Estrangelo Edessa"/>
+        <a:font script="Syre" typeface="Estrangelo Edessa"/>
+        <a:font script="Sora" typeface="Nirmala UI"/>
+        <a:font script="Tale" typeface="Microsoft Tai Le"/>
+        <a:font script="Talu" typeface="Microsoft New Tai Lue"/>
+        <a:font script="Tfng" typeface="Ebrima"/>
+      </a:majorFont>
+      <a:minorFont>
+        <a:latin typeface="Aptos" panose="02110004020202020204"/>
+        <a:ea typeface=""/>
+        <a:cs typeface=""/>
+        <a:font script="Jpan" typeface="游ゴシック"/>
+        <a:font script="Hang" typeface="맑은 고딕"/>
+        <a:font script="Hans" typeface="等线"/>
+        <a:font script="Hant" typeface="新細明體"/>
+        <a:font script="Arab" typeface="Arial"/>
+        <a:font script="Hebr" typeface="Arial"/>
+        <a:font script="Thai" typeface="Cordia New"/>
+        <a:font script="Ethi" typeface="Nyala"/>
+        <a:font script="Beng" typeface="Vrinda"/>
+        <a:font script="Gujr" typeface="Shruti"/>
+        <a:font script="Khmr" typeface="DaunPenh"/>
+        <a:font script="Knda" typeface="Tunga"/>
+        <a:font script="Guru" typeface="Raavi"/>
+        <a:font script="Cans" typeface="Euphemia"/>
+        <a:font script="Cher" typeface="Plantagenet Cherokee"/>
+        <a:font script="Yiii" typeface="Microsoft Yi Baiti"/>
+        <a:font script="Tibt" typeface="Microsoft Himalaya"/>
+        <a:font script="Thaa" typeface="MV Boli"/>
+        <a:font script="Deva" typeface="Mangal"/>
+        <a:font script="Telu" typeface="Gautami"/>
+        <a:font script="Taml" typeface="Latha"/>
+        <a:font script="Syrc" typeface="Estrangelo Edessa"/>
+        <a:font script="Orya" typeface="Kalinga"/>
+        <a:font script="Mlym" typeface="Kartika"/>
+        <a:font script="Laoo" typeface="DokChampa"/>
+        <a:font script="Sinh" typeface="Iskoola Pota"/>
+        <a:font script="Mong" typeface="Mongolian Baiti"/>
+        <a:font script="Viet" typeface="Arial"/>
+        <a:font script="Uigh" typeface="Microsoft Uighur"/>
+        <a:font script="Geor" typeface="Sylfaen"/>
+        <a:font script="Armn" typeface="Arial"/>
+        <a:font script="Bugi" typeface="Leelawadee UI"/>
+        <a:font script="Bopo" typeface="Microsoft JhengHei"/>
+        <a:font script="Java" typeface="Javanese Text"/>
+        <a:font script="Lisu" typeface="Segoe UI"/>
+        <a:font script="Mymr" typeface="Myanmar Text"/>
+        <a:font script="Nkoo" typeface="Ebrima"/>
+        <a:font script="Olck" typeface="Nirmala UI"/>
+        <a:font script="Osma" typeface="Ebrima"/>
+        <a:font script="Phag" typeface="Phagspa"/>
+        <a:font script="Syrn" typeface="Estrangelo Edessa"/>
+        <a:font script="Syrj" typeface="Estrangelo Edessa"/>
+        <a:font script="Syre" typeface="Estrangelo Edessa"/>
+        <a:font script="Sora" typeface="Nirmala UI"/>
+        <a:font script="Tale" typeface="Microsoft Tai Le"/>
+        <a:font script="Talu" typeface="Microsoft New Tai Lue"/>
+        <a:font script="Tfng" typeface="Ebrima"/>
+      </a:minorFont>
+    </a:fontScheme>
+    <a:fmtScheme name="Office">
+      <a:fillStyleLst>
+        <a:solidFill>
+          <a:schemeClr val="phClr"/>
+        </a:solidFill>
+        <a:gradFill rotWithShape="1">
+          <a:gsLst>
+            <a:gs pos="0">
+              <a:schemeClr val="phClr">
+                <a:lumMod val="110000"/>
+                <a:satMod val="105000"/>
+                <a:tint val="67000"/>
+              </a:schemeClr>
+            </a:gs>
+            <a:gs pos="50000">
+              <a:schemeClr val="phClr">
+                <a:lumMod val="105000"/>
+                <a:satMod val="103000"/>
+                <a:tint val="73000"/>
+              </a:schemeClr>
+            </a:gs>
+            <a:gs pos="100000">
+              <a:schemeClr val="phClr">
+                <a:lumMod val="105000"/>
+                <a:satMod val="109000"/>
+                <a:tint val="81000"/>
+              </a:schemeClr>
+            </a:gs>
+          </a:gsLst>
+          <a:lin ang="5400000" scaled="0"/>
+        </a:gradFill>
+        <a:gradFill rotWithShape="1">
+          <a:gsLst>
+            <a:gs pos="0">
+              <a:schemeClr val="phClr">
+                <a:satMod val="103000"/>
+                <a:lumMod val="102000"/>
+                <a:tint val="94000"/>
+              </a:schemeClr>
+            </a:gs>
+            <a:gs pos="50000">
+              <a:schemeClr val="phClr">
+                <a:satMod val="110000"/>
+                <a:lumMod val="100000"/>
+                <a:shade val="100000"/>
+              </a:schemeClr>
+            </a:gs>
+            <a:gs pos="100000">
+              <a:schemeClr val="phClr">
+                <a:lumMod val="99000"/>
+                <a:satMod val="120000"/>
+                <a:shade val="78000"/>
+              </a:schemeClr>
+            </a:gs>
+          </a:gsLst>
+          <a:lin ang="5400000" scaled="0"/>
+        </a:gradFill>
+      </a:fillStyleLst>
+      <a:lnStyleLst>
+        <a:ln w="12700" cap="flat" cmpd="sng" algn="ctr">
+          <a:solidFill>
+            <a:schemeClr val="phClr"/>
+          </a:solidFill>
+          <a:prstDash val="solid"/>
+          <a:miter lim="800000"/>
+        </a:ln>
+        <a:ln w="19050" cap="flat" cmpd="sng" algn="ctr">
+          <a:solidFill>
+            <a:schemeClr val="phClr"/>
+          </a:solidFill>
+          <a:prstDash val="solid"/>
+          <a:miter lim="800000"/>
+        </a:ln>
+        <a:ln w="25400" cap="flat" cmpd="sng" algn="ctr">
+          <a:solidFill>
+            <a:schemeClr val="phClr"/>
+          </a:solidFill>
+          <a:prstDash val="solid"/>
+          <a:miter lim="800000"/>
+        </a:ln>
+      </a:lnStyleLst>
+      <a:effectStyleLst>
+        <a:effectStyle>
+          <a:effectLst/>
+        </a:effectStyle>
+        <a:effectStyle>
+          <a:effectLst/>
+        </a:effectStyle>
+        <a:effectStyle>
+          <a:effectLst>
+            <a:outerShdw blurRad="57150" dist="19050" dir="5400000" algn="ctr" rotWithShape="0">
+              <a:srgbClr val="000000">
+                <a:alpha val="63000"/>
+              </a:srgbClr>
+            </a:outerShdw>
+          </a:effectLst>
+        </a:effectStyle>
+      </a:effectStyleLst>
+      <a:bgFillStyleLst>
+        <a:solidFill>
+          <a:schemeClr val="phClr"/>
+        </a:solidFill>
+        <a:solidFill>
+          <a:schemeClr val="phClr">
+            <a:tint val="95000"/>
+            <a:satMod val="170000"/>
+          </a:schemeClr>
+        </a:solidFill>
+        <a:gradFill rotWithShape="1">
+          <a:gsLst>
+            <a:gs pos="0">
+              <a:schemeClr val="phClr">
+                <a:tint val="93000"/>
+                <a:satMod val="150000"/>
+                <a:shade val="98000"/>
+                <a:lumMod val="102000"/>
+              </a:schemeClr>
+            </a:gs>
+            <a:gs pos="50000">
+              <a:schemeClr val="phClr">
+                <a:tint val="98000"/>
+                <a:satMod val="130000"/>
+                <a:shade val="90000"/>
+                <a:lumMod val="103000"/>
+              </a:schemeClr>
+            </a:gs>
+            <a:gs pos="100000">
+              <a:schemeClr val="phClr">
+                <a:shade val="63000"/>
+                <a:satMod val="120000"/>
+              </a:schemeClr>
+            </a:gs>
+          </a:gsLst>
+          <a:lin ang="5400000" scaled="0"/>
+        </a:gradFill>
+      </a:bgFillStyleLst>
+    </a:fmtScheme>
+  </a:themeElements>
+  <a:objectDefaults>
+    <a:lnDef>
+      <a:spPr/>
+      <a:bodyPr/>
+      <a:lstStyle/>
+      <a:style>
+        <a:lnRef idx="2">
+          <a:schemeClr val="accent1"/>
+        </a:lnRef>
+        <a:fillRef idx="0">
+          <a:schemeClr val="accent1"/>
+        </a:fillRef>
+        <a:effectRef idx="1">
+          <a:schemeClr val="accent1"/>
+        </a:effectRef>
+        <a:fontRef idx="minor">
+          <a:schemeClr val="tx1"/>
+        </a:fontRef>
+      </a:style>
+    </a:lnDef>
+  </a:objectDefaults>
+  <a:extraClrSchemeLst/>
+  <a:extLst>
+    <a:ext uri="{05A4C25C-085E-4340-85A3-A5531E510DB2}">
+      <thm15:themeFamily xmlns:thm15="http://schemas.microsoft.com/office/thememl/2012/main" name="Office Theme" id="{2E142A2C-CD16-42D6-873A-C26D2A0506FA}" vid="{1BDDFF52-6CD6-40A5-AB3C-68EB2F1E4D0A}"/>
+    </a:ext>
+  </a:extLst>
+</a:theme>
 </file>
--- a/project1/Proj1_Present_Energy_Ouspenskaia.pptx
+++ b/project1/Proj1_Present_Energy_Ouspenskaia.pptx
@@ -5,13 +5,22 @@
     <p:sldMasterId id="2147483762" r:id="rId1"/>
   </p:sldMasterIdLst>
   <p:notesMasterIdLst>
-    <p:notesMasterId r:id="rId6"/>
+    <p:notesMasterId r:id="rId15"/>
   </p:notesMasterIdLst>
   <p:sldIdLst>
     <p:sldId id="256" r:id="rId2"/>
     <p:sldId id="258" r:id="rId3"/>
     <p:sldId id="259" r:id="rId4"/>
-    <p:sldId id="260" r:id="rId5"/>
+    <p:sldId id="261" r:id="rId5"/>
+    <p:sldId id="264" r:id="rId6"/>
+    <p:sldId id="270" r:id="rId7"/>
+    <p:sldId id="265" r:id="rId8"/>
+    <p:sldId id="269" r:id="rId9"/>
+    <p:sldId id="266" r:id="rId10"/>
+    <p:sldId id="267" r:id="rId11"/>
+    <p:sldId id="262" r:id="rId12"/>
+    <p:sldId id="260" r:id="rId13"/>
+    <p:sldId id="263" r:id="rId14"/>
   </p:sldIdLst>
   <p:sldSz cx="12192000" cy="6858000"/>
   <p:notesSz cx="6858000" cy="9144000"/>
@@ -518,63 +527,114 @@
           <a:bodyPr/>
           <a:lstStyle/>
           <a:p>
-            <a:pPr marL="0" marR="0" indent="0" algn="l" defTabSz="914400" rtl="0" eaLnBrk="1" fontAlgn="auto" latinLnBrk="0" hangingPunct="1">
-              <a:lnSpc>
-                <a:spcPct val="100000"/>
-              </a:lnSpc>
-              <a:spcBef>
-                <a:spcPts val="0"/>
-              </a:spcBef>
-              <a:spcAft>
-                <a:spcPts val="0"/>
-              </a:spcAft>
-              <a:buClrTx/>
-              <a:buSzTx/>
-              <a:buFontTx/>
-              <a:buNone/>
-              <a:tabLst/>
-              <a:defRPr/>
-            </a:pPr>
-            <a:r>
-              <a:rPr lang="en-US" sz="2800" b="0" i="0" u="none" strike="noStrike" baseline="0" dirty="0">
-                <a:solidFill>
-                  <a:srgbClr val="E3E3E3"/>
-                </a:solidFill>
-                <a:effectLst/>
-                <a:latin typeface="Google Sans Text"/>
-              </a:rPr>
-              <a:t>Measuring and comparing a building’s energy use to similar buildings, past consumption, </a:t>
-            </a:r>
-          </a:p>
-          <a:p>
-            <a:pPr marL="0" marR="0" indent="0" algn="l" defTabSz="914400" rtl="0" eaLnBrk="1" fontAlgn="auto" latinLnBrk="0" hangingPunct="1">
-              <a:lnSpc>
-                <a:spcPct val="100000"/>
-              </a:lnSpc>
-              <a:spcBef>
-                <a:spcPts val="0"/>
-              </a:spcBef>
-              <a:spcAft>
-                <a:spcPts val="0"/>
-              </a:spcAft>
-              <a:buClrTx/>
-              <a:buSzTx/>
-              <a:buFontTx/>
-              <a:buNone/>
-              <a:tabLst/>
-              <a:defRPr/>
-            </a:pPr>
-            <a:r>
-              <a:rPr lang="en-US" sz="2800" b="0" i="0" u="none" strike="noStrike" baseline="0" dirty="0">
-                <a:solidFill>
-                  <a:srgbClr val="E3E3E3"/>
-                </a:solidFill>
-                <a:effectLst/>
-                <a:latin typeface="Google Sans Text"/>
-              </a:rPr>
-              <a:t>or a reference performance level.</a:t>
-            </a:r>
-          </a:p>
+            <a:endParaRPr lang="en-US"/>
+          </a:p>
+        </p:txBody>
+      </p:sp>
+      <p:sp>
+        <p:nvSpPr>
+          <p:cNvPr id="4" name="Slide Number Placeholder 3"/>
+          <p:cNvSpPr>
+            <a:spLocks noGrp="1"/>
+          </p:cNvSpPr>
+          <p:nvPr>
+            <p:ph type="sldNum" sz="quarter" idx="5"/>
+          </p:nvPr>
+        </p:nvSpPr>
+        <p:spPr/>
+        <p:txBody>
+          <a:bodyPr/>
+          <a:lstStyle/>
+          <a:p>
+            <a:fld id="{433F17CF-9CB7-1F41-9F3B-9D2A483692EC}" type="slidenum">
+              <a:rPr lang="en-US" smtClean="0"/>
+              <a:t>1</a:t>
+            </a:fld>
+            <a:endParaRPr lang="en-US"/>
+          </a:p>
+        </p:txBody>
+      </p:sp>
+    </p:spTree>
+    <p:extLst>
+      <p:ext uri="{BB962C8B-B14F-4D97-AF65-F5344CB8AC3E}">
+        <p14:creationId xmlns:p14="http://schemas.microsoft.com/office/powerpoint/2010/main" val="1613639659"/>
+      </p:ext>
+    </p:extLst>
+  </p:cSld>
+  <p:clrMapOvr>
+    <a:masterClrMapping/>
+  </p:clrMapOvr>
+</p:notes>
+</file>
+
+<file path=ppt/notesSlides/notesSlide10.xml><?xml version="1.0" encoding="utf-8"?>
+<p:notes xmlns:a="http://schemas.openxmlformats.org/drawingml/2006/main" xmlns:r="http://schemas.openxmlformats.org/officeDocument/2006/relationships" xmlns:p="http://schemas.openxmlformats.org/presentationml/2006/main">
+  <p:cSld>
+    <p:spTree>
+      <p:nvGrpSpPr>
+        <p:cNvPr id="1" name="">
+          <a:extLst>
+            <a:ext uri="{FF2B5EF4-FFF2-40B4-BE49-F238E27FC236}">
+              <a16:creationId xmlns:a16="http://schemas.microsoft.com/office/drawing/2014/main" id="{A01E1214-5F3E-9995-79BE-E6910CE01AB0}"/>
+            </a:ext>
+          </a:extLst>
+        </p:cNvPr>
+        <p:cNvGrpSpPr/>
+        <p:nvPr/>
+      </p:nvGrpSpPr>
+      <p:grpSpPr>
+        <a:xfrm>
+          <a:off x="0" y="0"/>
+          <a:ext cx="0" cy="0"/>
+          <a:chOff x="0" y="0"/>
+          <a:chExt cx="0" cy="0"/>
+        </a:xfrm>
+      </p:grpSpPr>
+      <p:sp>
+        <p:nvSpPr>
+          <p:cNvPr id="2" name="Slide Image Placeholder 1">
+            <a:extLst>
+              <a:ext uri="{FF2B5EF4-FFF2-40B4-BE49-F238E27FC236}">
+                <a16:creationId xmlns:a16="http://schemas.microsoft.com/office/drawing/2014/main" id="{48748E3D-8485-A512-4944-E95C45EA1852}"/>
+              </a:ext>
+            </a:extLst>
+          </p:cNvPr>
+          <p:cNvSpPr>
+            <a:spLocks noGrp="1" noRot="1" noChangeAspect="1"/>
+          </p:cNvSpPr>
+          <p:nvPr>
+            <p:ph type="sldImg"/>
+          </p:nvPr>
+        </p:nvSpPr>
+        <p:spPr/>
+        <p:txBody>
+          <a:bodyPr/>
+          <a:lstStyle/>
+          <a:p>
+            <a:endParaRPr lang="en-US"/>
+          </a:p>
+        </p:txBody>
+      </p:sp>
+      <p:sp>
+        <p:nvSpPr>
+          <p:cNvPr id="3" name="Notes Placeholder 2">
+            <a:extLst>
+              <a:ext uri="{FF2B5EF4-FFF2-40B4-BE49-F238E27FC236}">
+                <a16:creationId xmlns:a16="http://schemas.microsoft.com/office/drawing/2014/main" id="{32EAF338-312B-2C77-D02A-B086C3AEBDD7}"/>
+              </a:ext>
+            </a:extLst>
+          </p:cNvPr>
+          <p:cNvSpPr>
+            <a:spLocks noGrp="1"/>
+          </p:cNvSpPr>
+          <p:nvPr>
+            <p:ph type="body" idx="1"/>
+          </p:nvPr>
+        </p:nvSpPr>
+        <p:spPr/>
+        <p:txBody>
+          <a:bodyPr/>
+          <a:lstStyle/>
           <a:p>
             <a:pPr marL="0" marR="0" lvl="0" indent="0" algn="l" defTabSz="914400" rtl="0" eaLnBrk="1" fontAlgn="auto" latinLnBrk="0" hangingPunct="1">
               <a:lnSpc>
@@ -594,58 +654,24 @@
               <a:defRPr/>
             </a:pPr>
             <a:r>
-              <a:rPr lang="en-US" sz="2800" dirty="0"/>
-              <a:t>Energy Star: 1–100 score, which rates energy performance in comparison to </a:t>
-            </a:r>
-          </a:p>
-          <a:p>
-            <a:pPr marL="0" marR="0" lvl="0" indent="0" algn="l" defTabSz="914400" rtl="0" eaLnBrk="1" fontAlgn="auto" latinLnBrk="0" hangingPunct="1">
-              <a:lnSpc>
-                <a:spcPct val="100000"/>
-              </a:lnSpc>
-              <a:spcBef>
-                <a:spcPts val="0"/>
-              </a:spcBef>
-              <a:spcAft>
-                <a:spcPts val="0"/>
-              </a:spcAft>
-              <a:buClrTx/>
-              <a:buSzTx/>
-              <a:buFontTx/>
-              <a:buNone/>
-              <a:tabLst/>
-              <a:defRPr/>
-            </a:pPr>
-            <a:r>
-              <a:rPr lang="en-US" sz="2800" dirty="0"/>
-              <a:t>similar buildings across the country</a:t>
-            </a:r>
-          </a:p>
-          <a:p>
-            <a:pPr marL="0" marR="0" indent="0" algn="l" defTabSz="914400" rtl="0" eaLnBrk="1" fontAlgn="auto" latinLnBrk="0" hangingPunct="1">
-              <a:lnSpc>
-                <a:spcPct val="100000"/>
-              </a:lnSpc>
-              <a:spcBef>
-                <a:spcPts val="0"/>
-              </a:spcBef>
-              <a:spcAft>
-                <a:spcPts val="0"/>
-              </a:spcAft>
-              <a:buClrTx/>
-              <a:buSzTx/>
-              <a:buFontTx/>
-              <a:buNone/>
-              <a:tabLst/>
-              <a:defRPr/>
-            </a:pPr>
-            <a:endParaRPr lang="en-US" sz="2800" baseline="0" dirty="0"/>
-          </a:p>
-        </p:txBody>
-      </p:sp>
-      <p:sp>
-        <p:nvSpPr>
-          <p:cNvPr id="4" name="Slide Number Placeholder 3"/>
+              <a:rPr lang="en-US" sz="1200" dirty="0"/>
+              <a:t>Entries had missing ID numbers and addresses, but some had electricity use and Total GHG Emissions</a:t>
+            </a:r>
+          </a:p>
+          <a:p>
+            <a:endParaRPr lang="en-US" dirty="0"/>
+          </a:p>
+        </p:txBody>
+      </p:sp>
+      <p:sp>
+        <p:nvSpPr>
+          <p:cNvPr id="4" name="Slide Number Placeholder 3">
+            <a:extLst>
+              <a:ext uri="{FF2B5EF4-FFF2-40B4-BE49-F238E27FC236}">
+                <a16:creationId xmlns:a16="http://schemas.microsoft.com/office/drawing/2014/main" id="{C69737AA-B41B-5DCC-44C0-A16D648C25FF}"/>
+              </a:ext>
+            </a:extLst>
+          </p:cNvPr>
           <p:cNvSpPr>
             <a:spLocks noGrp="1"/>
           </p:cNvSpPr>
@@ -660,7 +686,7 @@
           <a:p>
             <a:fld id="{433F17CF-9CB7-1F41-9F3B-9D2A483692EC}" type="slidenum">
               <a:rPr lang="en-US" smtClean="0"/>
-              <a:t>3</a:t>
+              <a:t>11</a:t>
             </a:fld>
             <a:endParaRPr lang="en-US"/>
           </a:p>
@@ -669,7 +695,213 @@
     </p:spTree>
     <p:extLst>
       <p:ext uri="{BB962C8B-B14F-4D97-AF65-F5344CB8AC3E}">
-        <p14:creationId xmlns:p14="http://schemas.microsoft.com/office/powerpoint/2010/main" val="2176010800"/>
+        <p14:creationId xmlns:p14="http://schemas.microsoft.com/office/powerpoint/2010/main" val="110592694"/>
+      </p:ext>
+    </p:extLst>
+  </p:cSld>
+  <p:clrMapOvr>
+    <a:masterClrMapping/>
+  </p:clrMapOvr>
+</p:notes>
+</file>
+
+<file path=ppt/notesSlides/notesSlide11.xml><?xml version="1.0" encoding="utf-8"?>
+<p:notes xmlns:a="http://schemas.openxmlformats.org/drawingml/2006/main" xmlns:r="http://schemas.openxmlformats.org/officeDocument/2006/relationships" xmlns:p="http://schemas.openxmlformats.org/presentationml/2006/main">
+  <p:cSld>
+    <p:spTree>
+      <p:nvGrpSpPr>
+        <p:cNvPr id="1" name=""/>
+        <p:cNvGrpSpPr/>
+        <p:nvPr/>
+      </p:nvGrpSpPr>
+      <p:grpSpPr>
+        <a:xfrm>
+          <a:off x="0" y="0"/>
+          <a:ext cx="0" cy="0"/>
+          <a:chOff x="0" y="0"/>
+          <a:chExt cx="0" cy="0"/>
+        </a:xfrm>
+      </p:grpSpPr>
+      <p:sp>
+        <p:nvSpPr>
+          <p:cNvPr id="2" name="Slide Image Placeholder 1"/>
+          <p:cNvSpPr>
+            <a:spLocks noGrp="1" noRot="1" noChangeAspect="1"/>
+          </p:cNvSpPr>
+          <p:nvPr>
+            <p:ph type="sldImg"/>
+          </p:nvPr>
+        </p:nvSpPr>
+        <p:spPr/>
+        <p:txBody>
+          <a:bodyPr/>
+          <a:lstStyle/>
+          <a:p>
+            <a:endParaRPr lang="en-US"/>
+          </a:p>
+        </p:txBody>
+      </p:sp>
+      <p:sp>
+        <p:nvSpPr>
+          <p:cNvPr id="3" name="Notes Placeholder 2"/>
+          <p:cNvSpPr>
+            <a:spLocks noGrp="1"/>
+          </p:cNvSpPr>
+          <p:nvPr>
+            <p:ph type="body" idx="1"/>
+          </p:nvPr>
+        </p:nvSpPr>
+        <p:spPr/>
+        <p:txBody>
+          <a:bodyPr/>
+          <a:lstStyle/>
+          <a:p>
+            <a:endParaRPr lang="en-US" dirty="0"/>
+          </a:p>
+        </p:txBody>
+      </p:sp>
+      <p:sp>
+        <p:nvSpPr>
+          <p:cNvPr id="4" name="Slide Number Placeholder 3"/>
+          <p:cNvSpPr>
+            <a:spLocks noGrp="1"/>
+          </p:cNvSpPr>
+          <p:nvPr>
+            <p:ph type="sldNum" sz="quarter" idx="5"/>
+          </p:nvPr>
+        </p:nvSpPr>
+        <p:spPr/>
+        <p:txBody>
+          <a:bodyPr/>
+          <a:lstStyle/>
+          <a:p>
+            <a:fld id="{433F17CF-9CB7-1F41-9F3B-9D2A483692EC}" type="slidenum">
+              <a:rPr lang="en-US" smtClean="0"/>
+              <a:t>12</a:t>
+            </a:fld>
+            <a:endParaRPr lang="en-US"/>
+          </a:p>
+        </p:txBody>
+      </p:sp>
+    </p:spTree>
+    <p:extLst>
+      <p:ext uri="{BB962C8B-B14F-4D97-AF65-F5344CB8AC3E}">
+        <p14:creationId xmlns:p14="http://schemas.microsoft.com/office/powerpoint/2010/main" val="3353820539"/>
+      </p:ext>
+    </p:extLst>
+  </p:cSld>
+  <p:clrMapOvr>
+    <a:masterClrMapping/>
+  </p:clrMapOvr>
+</p:notes>
+</file>
+
+<file path=ppt/notesSlides/notesSlide12.xml><?xml version="1.0" encoding="utf-8"?>
+<p:notes xmlns:a="http://schemas.openxmlformats.org/drawingml/2006/main" xmlns:r="http://schemas.openxmlformats.org/officeDocument/2006/relationships" xmlns:p="http://schemas.openxmlformats.org/presentationml/2006/main">
+  <p:cSld>
+    <p:spTree>
+      <p:nvGrpSpPr>
+        <p:cNvPr id="1" name="">
+          <a:extLst>
+            <a:ext uri="{FF2B5EF4-FFF2-40B4-BE49-F238E27FC236}">
+              <a16:creationId xmlns:a16="http://schemas.microsoft.com/office/drawing/2014/main" id="{C54E6ABC-25EA-83F5-C2E5-D51BD39A9972}"/>
+            </a:ext>
+          </a:extLst>
+        </p:cNvPr>
+        <p:cNvGrpSpPr/>
+        <p:nvPr/>
+      </p:nvGrpSpPr>
+      <p:grpSpPr>
+        <a:xfrm>
+          <a:off x="0" y="0"/>
+          <a:ext cx="0" cy="0"/>
+          <a:chOff x="0" y="0"/>
+          <a:chExt cx="0" cy="0"/>
+        </a:xfrm>
+      </p:grpSpPr>
+      <p:sp>
+        <p:nvSpPr>
+          <p:cNvPr id="2" name="Slide Image Placeholder 1">
+            <a:extLst>
+              <a:ext uri="{FF2B5EF4-FFF2-40B4-BE49-F238E27FC236}">
+                <a16:creationId xmlns:a16="http://schemas.microsoft.com/office/drawing/2014/main" id="{12D8DD14-301C-7BC0-08A5-D3346DC24E59}"/>
+              </a:ext>
+            </a:extLst>
+          </p:cNvPr>
+          <p:cNvSpPr>
+            <a:spLocks noGrp="1" noRot="1" noChangeAspect="1"/>
+          </p:cNvSpPr>
+          <p:nvPr>
+            <p:ph type="sldImg"/>
+          </p:nvPr>
+        </p:nvSpPr>
+        <p:spPr/>
+        <p:txBody>
+          <a:bodyPr/>
+          <a:lstStyle/>
+          <a:p>
+            <a:endParaRPr lang="en-US"/>
+          </a:p>
+        </p:txBody>
+      </p:sp>
+      <p:sp>
+        <p:nvSpPr>
+          <p:cNvPr id="3" name="Notes Placeholder 2">
+            <a:extLst>
+              <a:ext uri="{FF2B5EF4-FFF2-40B4-BE49-F238E27FC236}">
+                <a16:creationId xmlns:a16="http://schemas.microsoft.com/office/drawing/2014/main" id="{3BBE2E3C-2D4D-F044-A5C4-C00E6858E4E3}"/>
+              </a:ext>
+            </a:extLst>
+          </p:cNvPr>
+          <p:cNvSpPr>
+            <a:spLocks noGrp="1"/>
+          </p:cNvSpPr>
+          <p:nvPr>
+            <p:ph type="body" idx="1"/>
+          </p:nvPr>
+        </p:nvSpPr>
+        <p:spPr/>
+        <p:txBody>
+          <a:bodyPr/>
+          <a:lstStyle/>
+          <a:p>
+            <a:endParaRPr lang="en-US" dirty="0"/>
+          </a:p>
+        </p:txBody>
+      </p:sp>
+      <p:sp>
+        <p:nvSpPr>
+          <p:cNvPr id="4" name="Slide Number Placeholder 3">
+            <a:extLst>
+              <a:ext uri="{FF2B5EF4-FFF2-40B4-BE49-F238E27FC236}">
+                <a16:creationId xmlns:a16="http://schemas.microsoft.com/office/drawing/2014/main" id="{7882A0D8-AB80-56E6-1EA0-8F97654EFEA7}"/>
+              </a:ext>
+            </a:extLst>
+          </p:cNvPr>
+          <p:cNvSpPr>
+            <a:spLocks noGrp="1"/>
+          </p:cNvSpPr>
+          <p:nvPr>
+            <p:ph type="sldNum" sz="quarter" idx="5"/>
+          </p:nvPr>
+        </p:nvSpPr>
+        <p:spPr/>
+        <p:txBody>
+          <a:bodyPr/>
+          <a:lstStyle/>
+          <a:p>
+            <a:fld id="{433F17CF-9CB7-1F41-9F3B-9D2A483692EC}" type="slidenum">
+              <a:rPr lang="en-US" smtClean="0"/>
+              <a:t>13</a:t>
+            </a:fld>
+            <a:endParaRPr lang="en-US"/>
+          </a:p>
+        </p:txBody>
+      </p:sp>
+    </p:spTree>
+    <p:extLst>
+      <p:ext uri="{BB962C8B-B14F-4D97-AF65-F5344CB8AC3E}">
+        <p14:creationId xmlns:p14="http://schemas.microsoft.com/office/powerpoint/2010/main" val="467693578"/>
       </p:ext>
     </p:extLst>
   </p:cSld>
@@ -730,7 +962,219 @@
           <a:bodyPr/>
           <a:lstStyle/>
           <a:p>
+            <a:pPr marL="0" marR="0" indent="0" algn="l" defTabSz="914400" rtl="0" eaLnBrk="1" fontAlgn="auto" latinLnBrk="0" hangingPunct="1">
+              <a:lnSpc>
+                <a:spcPct val="100000"/>
+              </a:lnSpc>
+              <a:spcBef>
+                <a:spcPts val="0"/>
+              </a:spcBef>
+              <a:spcAft>
+                <a:spcPts val="0"/>
+              </a:spcAft>
+              <a:buClrTx/>
+              <a:buSzTx/>
+              <a:buFontTx/>
+              <a:buNone/>
+              <a:tabLst/>
+              <a:defRPr/>
+            </a:pPr>
+            <a:r>
+              <a:rPr lang="en-US" sz="2800" b="0" i="0" u="none" strike="noStrike" baseline="0" dirty="0">
+                <a:solidFill>
+                  <a:srgbClr val="E3E3E3"/>
+                </a:solidFill>
+                <a:effectLst/>
+                <a:latin typeface="Google Sans Text"/>
+              </a:rPr>
+              <a:t>Measuring and comparing a building’s energy use to similar buildings, past consumption, </a:t>
+            </a:r>
+          </a:p>
+          <a:p>
+            <a:pPr marL="0" marR="0" indent="0" algn="l" defTabSz="914400" rtl="0" eaLnBrk="1" fontAlgn="auto" latinLnBrk="0" hangingPunct="1">
+              <a:lnSpc>
+                <a:spcPct val="100000"/>
+              </a:lnSpc>
+              <a:spcBef>
+                <a:spcPts val="0"/>
+              </a:spcBef>
+              <a:spcAft>
+                <a:spcPts val="0"/>
+              </a:spcAft>
+              <a:buClrTx/>
+              <a:buSzTx/>
+              <a:buFontTx/>
+              <a:buNone/>
+              <a:tabLst/>
+              <a:defRPr/>
+            </a:pPr>
+            <a:r>
+              <a:rPr lang="en-US" sz="2800" b="0" i="0" u="none" strike="noStrike" baseline="0" dirty="0">
+                <a:solidFill>
+                  <a:srgbClr val="E3E3E3"/>
+                </a:solidFill>
+                <a:effectLst/>
+                <a:latin typeface="Google Sans Text"/>
+              </a:rPr>
+              <a:t>or a reference performance level.</a:t>
+            </a:r>
+          </a:p>
+          <a:p>
+            <a:pPr marL="0" marR="0" indent="0" algn="l" defTabSz="914400" rtl="0" eaLnBrk="1" fontAlgn="auto" latinLnBrk="0" hangingPunct="1">
+              <a:lnSpc>
+                <a:spcPct val="100000"/>
+              </a:lnSpc>
+              <a:spcBef>
+                <a:spcPts val="0"/>
+              </a:spcBef>
+              <a:spcAft>
+                <a:spcPts val="0"/>
+              </a:spcAft>
+              <a:buClrTx/>
+              <a:buSzTx/>
+              <a:buFontTx/>
+              <a:buNone/>
+              <a:tabLst/>
+              <a:defRPr/>
+            </a:pPr>
+            <a:endParaRPr lang="en-US" sz="2800" baseline="0" dirty="0"/>
+          </a:p>
+        </p:txBody>
+      </p:sp>
+      <p:sp>
+        <p:nvSpPr>
+          <p:cNvPr id="4" name="Slide Number Placeholder 3"/>
+          <p:cNvSpPr>
+            <a:spLocks noGrp="1"/>
+          </p:cNvSpPr>
+          <p:nvPr>
+            <p:ph type="sldNum" sz="quarter" idx="5"/>
+          </p:nvPr>
+        </p:nvSpPr>
+        <p:spPr/>
+        <p:txBody>
+          <a:bodyPr/>
+          <a:lstStyle/>
+          <a:p>
+            <a:fld id="{433F17CF-9CB7-1F41-9F3B-9D2A483692EC}" type="slidenum">
+              <a:rPr lang="en-US" smtClean="0"/>
+              <a:t>3</a:t>
+            </a:fld>
             <a:endParaRPr lang="en-US"/>
+          </a:p>
+        </p:txBody>
+      </p:sp>
+    </p:spTree>
+    <p:extLst>
+      <p:ext uri="{BB962C8B-B14F-4D97-AF65-F5344CB8AC3E}">
+        <p14:creationId xmlns:p14="http://schemas.microsoft.com/office/powerpoint/2010/main" val="2176010800"/>
+      </p:ext>
+    </p:extLst>
+  </p:cSld>
+  <p:clrMapOvr>
+    <a:masterClrMapping/>
+  </p:clrMapOvr>
+</p:notes>
+</file>
+
+<file path=ppt/notesSlides/notesSlide3.xml><?xml version="1.0" encoding="utf-8"?>
+<p:notes xmlns:a="http://schemas.openxmlformats.org/drawingml/2006/main" xmlns:r="http://schemas.openxmlformats.org/officeDocument/2006/relationships" xmlns:p="http://schemas.openxmlformats.org/presentationml/2006/main">
+  <p:cSld>
+    <p:spTree>
+      <p:nvGrpSpPr>
+        <p:cNvPr id="1" name=""/>
+        <p:cNvGrpSpPr/>
+        <p:nvPr/>
+      </p:nvGrpSpPr>
+      <p:grpSpPr>
+        <a:xfrm>
+          <a:off x="0" y="0"/>
+          <a:ext cx="0" cy="0"/>
+          <a:chOff x="0" y="0"/>
+          <a:chExt cx="0" cy="0"/>
+        </a:xfrm>
+      </p:grpSpPr>
+      <p:sp>
+        <p:nvSpPr>
+          <p:cNvPr id="2" name="Slide Image Placeholder 1"/>
+          <p:cNvSpPr>
+            <a:spLocks noGrp="1" noRot="1" noChangeAspect="1"/>
+          </p:cNvSpPr>
+          <p:nvPr>
+            <p:ph type="sldImg"/>
+          </p:nvPr>
+        </p:nvSpPr>
+        <p:spPr/>
+        <p:txBody>
+          <a:bodyPr/>
+          <a:lstStyle/>
+          <a:p>
+            <a:endParaRPr lang="en-US"/>
+          </a:p>
+        </p:txBody>
+      </p:sp>
+      <p:sp>
+        <p:nvSpPr>
+          <p:cNvPr id="3" name="Notes Placeholder 2"/>
+          <p:cNvSpPr>
+            <a:spLocks noGrp="1"/>
+          </p:cNvSpPr>
+          <p:nvPr>
+            <p:ph type="body" idx="1"/>
+          </p:nvPr>
+        </p:nvSpPr>
+        <p:spPr/>
+        <p:txBody>
+          <a:bodyPr/>
+          <a:lstStyle/>
+          <a:p>
+            <a:pPr marL="0" marR="0" lvl="0" indent="0" algn="l" defTabSz="914400" rtl="0" eaLnBrk="1" fontAlgn="auto" latinLnBrk="0" hangingPunct="1">
+              <a:lnSpc>
+                <a:spcPct val="100000"/>
+              </a:lnSpc>
+              <a:spcBef>
+                <a:spcPts val="0"/>
+              </a:spcBef>
+              <a:spcAft>
+                <a:spcPts val="0"/>
+              </a:spcAft>
+              <a:buClrTx/>
+              <a:buSzTx/>
+              <a:buFontTx/>
+              <a:buNone/>
+              <a:tabLst/>
+              <a:defRPr/>
+            </a:pPr>
+            <a:r>
+              <a:rPr lang="en-US" sz="2800" dirty="0"/>
+              <a:t>Entries had missing ID numbers and addresses, but most had electricity use, </a:t>
+            </a:r>
+          </a:p>
+          <a:p>
+            <a:pPr marL="0" marR="0" lvl="0" indent="0" algn="l" defTabSz="914400" rtl="0" eaLnBrk="1" fontAlgn="auto" latinLnBrk="0" hangingPunct="1">
+              <a:lnSpc>
+                <a:spcPct val="100000"/>
+              </a:lnSpc>
+              <a:spcBef>
+                <a:spcPts val="0"/>
+              </a:spcBef>
+              <a:spcAft>
+                <a:spcPts val="0"/>
+              </a:spcAft>
+              <a:buClrTx/>
+              <a:buSzTx/>
+              <a:buFontTx/>
+              <a:buNone/>
+              <a:tabLst/>
+              <a:defRPr/>
+            </a:pPr>
+            <a:r>
+              <a:rPr lang="en-US" sz="2800" dirty="0"/>
+              <a:t>floor area, and Total GHG Emissions</a:t>
+            </a:r>
+          </a:p>
+          <a:p>
+            <a:endParaRPr lang="en-US" dirty="0"/>
           </a:p>
         </p:txBody>
       </p:sp>
@@ -760,7 +1204,914 @@
     </p:spTree>
     <p:extLst>
       <p:ext uri="{BB962C8B-B14F-4D97-AF65-F5344CB8AC3E}">
-        <p14:creationId xmlns:p14="http://schemas.microsoft.com/office/powerpoint/2010/main" val="3353820539"/>
+        <p14:creationId xmlns:p14="http://schemas.microsoft.com/office/powerpoint/2010/main" val="1047691007"/>
+      </p:ext>
+    </p:extLst>
+  </p:cSld>
+  <p:clrMapOvr>
+    <a:masterClrMapping/>
+  </p:clrMapOvr>
+</p:notes>
+</file>
+
+<file path=ppt/notesSlides/notesSlide4.xml><?xml version="1.0" encoding="utf-8"?>
+<p:notes xmlns:a="http://schemas.openxmlformats.org/drawingml/2006/main" xmlns:r="http://schemas.openxmlformats.org/officeDocument/2006/relationships" xmlns:p="http://schemas.openxmlformats.org/presentationml/2006/main">
+  <p:cSld>
+    <p:spTree>
+      <p:nvGrpSpPr>
+        <p:cNvPr id="1" name="">
+          <a:extLst>
+            <a:ext uri="{FF2B5EF4-FFF2-40B4-BE49-F238E27FC236}">
+              <a16:creationId xmlns:a16="http://schemas.microsoft.com/office/drawing/2014/main" id="{80C81B58-F2C0-5F64-297C-0DE2E14A16BA}"/>
+            </a:ext>
+          </a:extLst>
+        </p:cNvPr>
+        <p:cNvGrpSpPr/>
+        <p:nvPr/>
+      </p:nvGrpSpPr>
+      <p:grpSpPr>
+        <a:xfrm>
+          <a:off x="0" y="0"/>
+          <a:ext cx="0" cy="0"/>
+          <a:chOff x="0" y="0"/>
+          <a:chExt cx="0" cy="0"/>
+        </a:xfrm>
+      </p:grpSpPr>
+      <p:sp>
+        <p:nvSpPr>
+          <p:cNvPr id="2" name="Slide Image Placeholder 1">
+            <a:extLst>
+              <a:ext uri="{FF2B5EF4-FFF2-40B4-BE49-F238E27FC236}">
+                <a16:creationId xmlns:a16="http://schemas.microsoft.com/office/drawing/2014/main" id="{7636CA9B-9882-EAEC-F1BB-F0611BDC2B22}"/>
+              </a:ext>
+            </a:extLst>
+          </p:cNvPr>
+          <p:cNvSpPr>
+            <a:spLocks noGrp="1" noRot="1" noChangeAspect="1"/>
+          </p:cNvSpPr>
+          <p:nvPr>
+            <p:ph type="sldImg"/>
+          </p:nvPr>
+        </p:nvSpPr>
+        <p:spPr/>
+        <p:txBody>
+          <a:bodyPr/>
+          <a:lstStyle/>
+          <a:p>
+            <a:endParaRPr lang="en-US"/>
+          </a:p>
+        </p:txBody>
+      </p:sp>
+      <p:sp>
+        <p:nvSpPr>
+          <p:cNvPr id="3" name="Notes Placeholder 2">
+            <a:extLst>
+              <a:ext uri="{FF2B5EF4-FFF2-40B4-BE49-F238E27FC236}">
+                <a16:creationId xmlns:a16="http://schemas.microsoft.com/office/drawing/2014/main" id="{B7DABCC8-A7D4-0158-1A3F-146D53CBF8B4}"/>
+              </a:ext>
+            </a:extLst>
+          </p:cNvPr>
+          <p:cNvSpPr>
+            <a:spLocks noGrp="1"/>
+          </p:cNvSpPr>
+          <p:nvPr>
+            <p:ph type="body" idx="1"/>
+          </p:nvPr>
+        </p:nvSpPr>
+        <p:spPr/>
+        <p:txBody>
+          <a:bodyPr/>
+          <a:lstStyle/>
+          <a:p>
+            <a:pPr marL="0" marR="0" lvl="0" indent="0" algn="l" defTabSz="914400" rtl="0" eaLnBrk="1" fontAlgn="auto" latinLnBrk="0" hangingPunct="1">
+              <a:lnSpc>
+                <a:spcPct val="100000"/>
+              </a:lnSpc>
+              <a:spcBef>
+                <a:spcPts val="0"/>
+              </a:spcBef>
+              <a:spcAft>
+                <a:spcPts val="0"/>
+              </a:spcAft>
+              <a:buClrTx/>
+              <a:buSzTx/>
+              <a:buFontTx/>
+              <a:buNone/>
+              <a:tabLst/>
+              <a:defRPr/>
+            </a:pPr>
+            <a:r>
+              <a:rPr lang="en-US" sz="2400" b="0" kern="1200" dirty="0">
+                <a:solidFill>
+                  <a:schemeClr val="tx1"/>
+                </a:solidFill>
+                <a:effectLst/>
+                <a:latin typeface="+mn-lt"/>
+                <a:ea typeface="+mn-ea"/>
+                <a:cs typeface="+mn-cs"/>
+              </a:rPr>
+              <a:t>Note NaN</a:t>
+            </a:r>
+          </a:p>
+          <a:p>
+            <a:pPr marL="0" marR="0" lvl="0" indent="0" algn="l" defTabSz="914400" rtl="0" eaLnBrk="1" fontAlgn="auto" latinLnBrk="0" hangingPunct="1">
+              <a:lnSpc>
+                <a:spcPct val="100000"/>
+              </a:lnSpc>
+              <a:spcBef>
+                <a:spcPts val="0"/>
+              </a:spcBef>
+              <a:spcAft>
+                <a:spcPts val="0"/>
+              </a:spcAft>
+              <a:buClrTx/>
+              <a:buSzTx/>
+              <a:buFontTx/>
+              <a:buNone/>
+              <a:tabLst/>
+              <a:defRPr/>
+            </a:pPr>
+            <a:r>
+              <a:rPr lang="en-US" sz="2400" b="0" kern="1200" dirty="0">
+                <a:solidFill>
+                  <a:schemeClr val="tx1"/>
+                </a:solidFill>
+                <a:effectLst/>
+                <a:latin typeface="+mn-lt"/>
+                <a:ea typeface="+mn-ea"/>
+                <a:cs typeface="+mn-cs"/>
+              </a:rPr>
+              <a:t>Other: supermarket or grocery store, retail store, senior living community, </a:t>
+            </a:r>
+          </a:p>
+          <a:p>
+            <a:pPr marL="0" marR="0" lvl="0" indent="0" algn="l" defTabSz="914400" rtl="0" eaLnBrk="1" fontAlgn="auto" latinLnBrk="0" hangingPunct="1">
+              <a:lnSpc>
+                <a:spcPct val="100000"/>
+              </a:lnSpc>
+              <a:spcBef>
+                <a:spcPts val="0"/>
+              </a:spcBef>
+              <a:spcAft>
+                <a:spcPts val="0"/>
+              </a:spcAft>
+              <a:buClrTx/>
+              <a:buSzTx/>
+              <a:buFontTx/>
+              <a:buNone/>
+              <a:tabLst/>
+              <a:defRPr/>
+            </a:pPr>
+            <a:r>
+              <a:rPr lang="en-US" sz="2400" b="0" kern="1200" dirty="0">
+                <a:solidFill>
+                  <a:schemeClr val="tx1"/>
+                </a:solidFill>
+                <a:effectLst/>
+                <a:latin typeface="+mn-lt"/>
+                <a:ea typeface="+mn-ea"/>
+                <a:cs typeface="+mn-cs"/>
+              </a:rPr>
+              <a:t>car dealership, mixed use property, laboratory, strip mall</a:t>
+            </a:r>
+          </a:p>
+          <a:p>
+            <a:endParaRPr lang="en-US" dirty="0"/>
+          </a:p>
+        </p:txBody>
+      </p:sp>
+      <p:sp>
+        <p:nvSpPr>
+          <p:cNvPr id="4" name="Slide Number Placeholder 3">
+            <a:extLst>
+              <a:ext uri="{FF2B5EF4-FFF2-40B4-BE49-F238E27FC236}">
+                <a16:creationId xmlns:a16="http://schemas.microsoft.com/office/drawing/2014/main" id="{D9789977-CF80-83E4-5426-4E6624C14130}"/>
+              </a:ext>
+            </a:extLst>
+          </p:cNvPr>
+          <p:cNvSpPr>
+            <a:spLocks noGrp="1"/>
+          </p:cNvSpPr>
+          <p:nvPr>
+            <p:ph type="sldNum" sz="quarter" idx="5"/>
+          </p:nvPr>
+        </p:nvSpPr>
+        <p:spPr/>
+        <p:txBody>
+          <a:bodyPr/>
+          <a:lstStyle/>
+          <a:p>
+            <a:fld id="{433F17CF-9CB7-1F41-9F3B-9D2A483692EC}" type="slidenum">
+              <a:rPr lang="en-US" smtClean="0"/>
+              <a:t>5</a:t>
+            </a:fld>
+            <a:endParaRPr lang="en-US"/>
+          </a:p>
+        </p:txBody>
+      </p:sp>
+    </p:spTree>
+    <p:extLst>
+      <p:ext uri="{BB962C8B-B14F-4D97-AF65-F5344CB8AC3E}">
+        <p14:creationId xmlns:p14="http://schemas.microsoft.com/office/powerpoint/2010/main" val="1199720402"/>
+      </p:ext>
+    </p:extLst>
+  </p:cSld>
+  <p:clrMapOvr>
+    <a:masterClrMapping/>
+  </p:clrMapOvr>
+</p:notes>
+</file>
+
+<file path=ppt/notesSlides/notesSlide5.xml><?xml version="1.0" encoding="utf-8"?>
+<p:notes xmlns:a="http://schemas.openxmlformats.org/drawingml/2006/main" xmlns:r="http://schemas.openxmlformats.org/officeDocument/2006/relationships" xmlns:p="http://schemas.openxmlformats.org/presentationml/2006/main">
+  <p:cSld>
+    <p:spTree>
+      <p:nvGrpSpPr>
+        <p:cNvPr id="1" name="">
+          <a:extLst>
+            <a:ext uri="{FF2B5EF4-FFF2-40B4-BE49-F238E27FC236}">
+              <a16:creationId xmlns:a16="http://schemas.microsoft.com/office/drawing/2014/main" id="{94AB6714-2614-03CA-F8EA-8D68C004F5F4}"/>
+            </a:ext>
+          </a:extLst>
+        </p:cNvPr>
+        <p:cNvGrpSpPr/>
+        <p:nvPr/>
+      </p:nvGrpSpPr>
+      <p:grpSpPr>
+        <a:xfrm>
+          <a:off x="0" y="0"/>
+          <a:ext cx="0" cy="0"/>
+          <a:chOff x="0" y="0"/>
+          <a:chExt cx="0" cy="0"/>
+        </a:xfrm>
+      </p:grpSpPr>
+      <p:sp>
+        <p:nvSpPr>
+          <p:cNvPr id="2" name="Slide Image Placeholder 1">
+            <a:extLst>
+              <a:ext uri="{FF2B5EF4-FFF2-40B4-BE49-F238E27FC236}">
+                <a16:creationId xmlns:a16="http://schemas.microsoft.com/office/drawing/2014/main" id="{1A4C2F13-0E02-E455-7D7D-4B078092AD81}"/>
+              </a:ext>
+            </a:extLst>
+          </p:cNvPr>
+          <p:cNvSpPr>
+            <a:spLocks noGrp="1" noRot="1" noChangeAspect="1"/>
+          </p:cNvSpPr>
+          <p:nvPr>
+            <p:ph type="sldImg"/>
+          </p:nvPr>
+        </p:nvSpPr>
+        <p:spPr/>
+        <p:txBody>
+          <a:bodyPr/>
+          <a:lstStyle/>
+          <a:p>
+            <a:endParaRPr lang="en-US"/>
+          </a:p>
+        </p:txBody>
+      </p:sp>
+      <p:sp>
+        <p:nvSpPr>
+          <p:cNvPr id="3" name="Notes Placeholder 2">
+            <a:extLst>
+              <a:ext uri="{FF2B5EF4-FFF2-40B4-BE49-F238E27FC236}">
+                <a16:creationId xmlns:a16="http://schemas.microsoft.com/office/drawing/2014/main" id="{8AA9533F-8C91-DD49-0CED-086AE0451D1D}"/>
+              </a:ext>
+            </a:extLst>
+          </p:cNvPr>
+          <p:cNvSpPr>
+            <a:spLocks noGrp="1"/>
+          </p:cNvSpPr>
+          <p:nvPr>
+            <p:ph type="body" idx="1"/>
+          </p:nvPr>
+        </p:nvSpPr>
+        <p:spPr/>
+        <p:txBody>
+          <a:bodyPr/>
+          <a:lstStyle/>
+          <a:p>
+            <a:pPr marL="0" marR="0" lvl="0" indent="0" algn="l" defTabSz="914400" rtl="0" eaLnBrk="1" fontAlgn="auto" latinLnBrk="0" hangingPunct="1">
+              <a:lnSpc>
+                <a:spcPct val="100000"/>
+              </a:lnSpc>
+              <a:spcBef>
+                <a:spcPts val="0"/>
+              </a:spcBef>
+              <a:spcAft>
+                <a:spcPts val="0"/>
+              </a:spcAft>
+              <a:buClrTx/>
+              <a:buSzTx/>
+              <a:buFontTx/>
+              <a:buNone/>
+              <a:tabLst/>
+              <a:defRPr/>
+            </a:pPr>
+            <a:r>
+              <a:rPr lang="en-US" sz="2400" dirty="0"/>
+              <a:t>Energy Star: 1–100 score, which rates energy performance in comparison to </a:t>
+            </a:r>
+          </a:p>
+          <a:p>
+            <a:pPr marL="0" marR="0" lvl="0" indent="0" algn="l" defTabSz="914400" rtl="0" eaLnBrk="1" fontAlgn="auto" latinLnBrk="0" hangingPunct="1">
+              <a:lnSpc>
+                <a:spcPct val="100000"/>
+              </a:lnSpc>
+              <a:spcBef>
+                <a:spcPts val="0"/>
+              </a:spcBef>
+              <a:spcAft>
+                <a:spcPts val="0"/>
+              </a:spcAft>
+              <a:buClrTx/>
+              <a:buSzTx/>
+              <a:buFontTx/>
+              <a:buNone/>
+              <a:tabLst/>
+              <a:defRPr/>
+            </a:pPr>
+            <a:r>
+              <a:rPr lang="en-US" sz="2400" dirty="0"/>
+              <a:t>similar buildings across the country</a:t>
+            </a:r>
+          </a:p>
+          <a:p>
+            <a:endParaRPr lang="en-US" dirty="0"/>
+          </a:p>
+        </p:txBody>
+      </p:sp>
+      <p:sp>
+        <p:nvSpPr>
+          <p:cNvPr id="4" name="Slide Number Placeholder 3">
+            <a:extLst>
+              <a:ext uri="{FF2B5EF4-FFF2-40B4-BE49-F238E27FC236}">
+                <a16:creationId xmlns:a16="http://schemas.microsoft.com/office/drawing/2014/main" id="{5089EDCE-B8FA-0803-53D8-4482E6A54600}"/>
+              </a:ext>
+            </a:extLst>
+          </p:cNvPr>
+          <p:cNvSpPr>
+            <a:spLocks noGrp="1"/>
+          </p:cNvSpPr>
+          <p:nvPr>
+            <p:ph type="sldNum" sz="quarter" idx="5"/>
+          </p:nvPr>
+        </p:nvSpPr>
+        <p:spPr/>
+        <p:txBody>
+          <a:bodyPr/>
+          <a:lstStyle/>
+          <a:p>
+            <a:fld id="{433F17CF-9CB7-1F41-9F3B-9D2A483692EC}" type="slidenum">
+              <a:rPr lang="en-US" smtClean="0"/>
+              <a:t>6</a:t>
+            </a:fld>
+            <a:endParaRPr lang="en-US"/>
+          </a:p>
+        </p:txBody>
+      </p:sp>
+    </p:spTree>
+    <p:extLst>
+      <p:ext uri="{BB962C8B-B14F-4D97-AF65-F5344CB8AC3E}">
+        <p14:creationId xmlns:p14="http://schemas.microsoft.com/office/powerpoint/2010/main" val="1915196544"/>
+      </p:ext>
+    </p:extLst>
+  </p:cSld>
+  <p:clrMapOvr>
+    <a:masterClrMapping/>
+  </p:clrMapOvr>
+</p:notes>
+</file>
+
+<file path=ppt/notesSlides/notesSlide6.xml><?xml version="1.0" encoding="utf-8"?>
+<p:notes xmlns:a="http://schemas.openxmlformats.org/drawingml/2006/main" xmlns:r="http://schemas.openxmlformats.org/officeDocument/2006/relationships" xmlns:p="http://schemas.openxmlformats.org/presentationml/2006/main">
+  <p:cSld>
+    <p:spTree>
+      <p:nvGrpSpPr>
+        <p:cNvPr id="1" name="">
+          <a:extLst>
+            <a:ext uri="{FF2B5EF4-FFF2-40B4-BE49-F238E27FC236}">
+              <a16:creationId xmlns:a16="http://schemas.microsoft.com/office/drawing/2014/main" id="{E6E3076F-B399-E750-32E6-26FDD43E8A4B}"/>
+            </a:ext>
+          </a:extLst>
+        </p:cNvPr>
+        <p:cNvGrpSpPr/>
+        <p:nvPr/>
+      </p:nvGrpSpPr>
+      <p:grpSpPr>
+        <a:xfrm>
+          <a:off x="0" y="0"/>
+          <a:ext cx="0" cy="0"/>
+          <a:chOff x="0" y="0"/>
+          <a:chExt cx="0" cy="0"/>
+        </a:xfrm>
+      </p:grpSpPr>
+      <p:sp>
+        <p:nvSpPr>
+          <p:cNvPr id="2" name="Slide Image Placeholder 1">
+            <a:extLst>
+              <a:ext uri="{FF2B5EF4-FFF2-40B4-BE49-F238E27FC236}">
+                <a16:creationId xmlns:a16="http://schemas.microsoft.com/office/drawing/2014/main" id="{39341C61-190B-EA02-16CB-27F99A7BBA2C}"/>
+              </a:ext>
+            </a:extLst>
+          </p:cNvPr>
+          <p:cNvSpPr>
+            <a:spLocks noGrp="1" noRot="1" noChangeAspect="1"/>
+          </p:cNvSpPr>
+          <p:nvPr>
+            <p:ph type="sldImg"/>
+          </p:nvPr>
+        </p:nvSpPr>
+        <p:spPr/>
+        <p:txBody>
+          <a:bodyPr/>
+          <a:lstStyle/>
+          <a:p>
+            <a:endParaRPr lang="en-US"/>
+          </a:p>
+        </p:txBody>
+      </p:sp>
+      <p:sp>
+        <p:nvSpPr>
+          <p:cNvPr id="3" name="Notes Placeholder 2">
+            <a:extLst>
+              <a:ext uri="{FF2B5EF4-FFF2-40B4-BE49-F238E27FC236}">
+                <a16:creationId xmlns:a16="http://schemas.microsoft.com/office/drawing/2014/main" id="{7B8EC9B8-D46C-45A6-EA38-630A298479B1}"/>
+              </a:ext>
+            </a:extLst>
+          </p:cNvPr>
+          <p:cNvSpPr>
+            <a:spLocks noGrp="1"/>
+          </p:cNvSpPr>
+          <p:nvPr>
+            <p:ph type="body" idx="1"/>
+          </p:nvPr>
+        </p:nvSpPr>
+        <p:spPr/>
+        <p:txBody>
+          <a:bodyPr/>
+          <a:lstStyle/>
+          <a:p>
+            <a:pPr marL="0" marR="0" lvl="0" indent="0" algn="l" defTabSz="914400" rtl="0" eaLnBrk="1" fontAlgn="auto" latinLnBrk="0" hangingPunct="1">
+              <a:lnSpc>
+                <a:spcPct val="100000"/>
+              </a:lnSpc>
+              <a:spcBef>
+                <a:spcPts val="0"/>
+              </a:spcBef>
+              <a:spcAft>
+                <a:spcPts val="0"/>
+              </a:spcAft>
+              <a:buClrTx/>
+              <a:buSzTx/>
+              <a:buFontTx/>
+              <a:buNone/>
+              <a:tabLst/>
+              <a:defRPr/>
+            </a:pPr>
+            <a:r>
+              <a:rPr lang="en-US" sz="2400" dirty="0"/>
+              <a:t>Top 4 not counting “other” and NaN</a:t>
+            </a:r>
+          </a:p>
+          <a:p>
+            <a:endParaRPr lang="en-US" dirty="0"/>
+          </a:p>
+        </p:txBody>
+      </p:sp>
+      <p:sp>
+        <p:nvSpPr>
+          <p:cNvPr id="4" name="Slide Number Placeholder 3">
+            <a:extLst>
+              <a:ext uri="{FF2B5EF4-FFF2-40B4-BE49-F238E27FC236}">
+                <a16:creationId xmlns:a16="http://schemas.microsoft.com/office/drawing/2014/main" id="{CC06AF48-692B-7D9D-854D-997E0371576B}"/>
+              </a:ext>
+            </a:extLst>
+          </p:cNvPr>
+          <p:cNvSpPr>
+            <a:spLocks noGrp="1"/>
+          </p:cNvSpPr>
+          <p:nvPr>
+            <p:ph type="sldNum" sz="quarter" idx="5"/>
+          </p:nvPr>
+        </p:nvSpPr>
+        <p:spPr/>
+        <p:txBody>
+          <a:bodyPr/>
+          <a:lstStyle/>
+          <a:p>
+            <a:fld id="{433F17CF-9CB7-1F41-9F3B-9D2A483692EC}" type="slidenum">
+              <a:rPr lang="en-US" smtClean="0"/>
+              <a:t>7</a:t>
+            </a:fld>
+            <a:endParaRPr lang="en-US"/>
+          </a:p>
+        </p:txBody>
+      </p:sp>
+    </p:spTree>
+    <p:extLst>
+      <p:ext uri="{BB962C8B-B14F-4D97-AF65-F5344CB8AC3E}">
+        <p14:creationId xmlns:p14="http://schemas.microsoft.com/office/powerpoint/2010/main" val="4108911654"/>
+      </p:ext>
+    </p:extLst>
+  </p:cSld>
+  <p:clrMapOvr>
+    <a:masterClrMapping/>
+  </p:clrMapOvr>
+</p:notes>
+</file>
+
+<file path=ppt/notesSlides/notesSlide7.xml><?xml version="1.0" encoding="utf-8"?>
+<p:notes xmlns:a="http://schemas.openxmlformats.org/drawingml/2006/main" xmlns:r="http://schemas.openxmlformats.org/officeDocument/2006/relationships" xmlns:p="http://schemas.openxmlformats.org/presentationml/2006/main">
+  <p:cSld>
+    <p:spTree>
+      <p:nvGrpSpPr>
+        <p:cNvPr id="1" name="">
+          <a:extLst>
+            <a:ext uri="{FF2B5EF4-FFF2-40B4-BE49-F238E27FC236}">
+              <a16:creationId xmlns:a16="http://schemas.microsoft.com/office/drawing/2014/main" id="{2F841419-057A-315C-BAA0-7AD719E057F9}"/>
+            </a:ext>
+          </a:extLst>
+        </p:cNvPr>
+        <p:cNvGrpSpPr/>
+        <p:nvPr/>
+      </p:nvGrpSpPr>
+      <p:grpSpPr>
+        <a:xfrm>
+          <a:off x="0" y="0"/>
+          <a:ext cx="0" cy="0"/>
+          <a:chOff x="0" y="0"/>
+          <a:chExt cx="0" cy="0"/>
+        </a:xfrm>
+      </p:grpSpPr>
+      <p:sp>
+        <p:nvSpPr>
+          <p:cNvPr id="2" name="Slide Image Placeholder 1">
+            <a:extLst>
+              <a:ext uri="{FF2B5EF4-FFF2-40B4-BE49-F238E27FC236}">
+                <a16:creationId xmlns:a16="http://schemas.microsoft.com/office/drawing/2014/main" id="{F07AB532-9254-A724-5F7A-FACE3476344F}"/>
+              </a:ext>
+            </a:extLst>
+          </p:cNvPr>
+          <p:cNvSpPr>
+            <a:spLocks noGrp="1" noRot="1" noChangeAspect="1"/>
+          </p:cNvSpPr>
+          <p:nvPr>
+            <p:ph type="sldImg"/>
+          </p:nvPr>
+        </p:nvSpPr>
+        <p:spPr/>
+        <p:txBody>
+          <a:bodyPr/>
+          <a:lstStyle/>
+          <a:p>
+            <a:endParaRPr lang="en-US"/>
+          </a:p>
+        </p:txBody>
+      </p:sp>
+      <p:sp>
+        <p:nvSpPr>
+          <p:cNvPr id="3" name="Notes Placeholder 2">
+            <a:extLst>
+              <a:ext uri="{FF2B5EF4-FFF2-40B4-BE49-F238E27FC236}">
+                <a16:creationId xmlns:a16="http://schemas.microsoft.com/office/drawing/2014/main" id="{F48727C8-CCC9-7DE9-EED4-6B7DAFA6306B}"/>
+              </a:ext>
+            </a:extLst>
+          </p:cNvPr>
+          <p:cNvSpPr>
+            <a:spLocks noGrp="1"/>
+          </p:cNvSpPr>
+          <p:nvPr>
+            <p:ph type="body" idx="1"/>
+          </p:nvPr>
+        </p:nvSpPr>
+        <p:spPr/>
+        <p:txBody>
+          <a:bodyPr/>
+          <a:lstStyle/>
+          <a:p>
+            <a:pPr marL="0" marR="0" lvl="0" indent="0" algn="l" defTabSz="914400" rtl="0" eaLnBrk="1" fontAlgn="auto" latinLnBrk="0" hangingPunct="1">
+              <a:lnSpc>
+                <a:spcPct val="100000"/>
+              </a:lnSpc>
+              <a:spcBef>
+                <a:spcPts val="0"/>
+              </a:spcBef>
+              <a:spcAft>
+                <a:spcPts val="0"/>
+              </a:spcAft>
+              <a:buClrTx/>
+              <a:buSzTx/>
+              <a:buFontTx/>
+              <a:buNone/>
+              <a:tabLst/>
+              <a:defRPr/>
+            </a:pPr>
+            <a:r>
+              <a:rPr lang="en-US" sz="2400" dirty="0"/>
+              <a:t>Note that we need to add 6 or 7 zeros to the numbers.</a:t>
+            </a:r>
+          </a:p>
+          <a:p>
+            <a:pPr marL="0" marR="0" lvl="0" indent="0" algn="l" defTabSz="914400" rtl="0" eaLnBrk="1" fontAlgn="auto" latinLnBrk="0" hangingPunct="1">
+              <a:lnSpc>
+                <a:spcPct val="100000"/>
+              </a:lnSpc>
+              <a:spcBef>
+                <a:spcPts val="0"/>
+              </a:spcBef>
+              <a:spcAft>
+                <a:spcPts val="0"/>
+              </a:spcAft>
+              <a:buClrTx/>
+              <a:buSzTx/>
+              <a:buFontTx/>
+              <a:buNone/>
+              <a:tabLst/>
+              <a:defRPr/>
+            </a:pPr>
+            <a:r>
+              <a:rPr lang="en-US" sz="2400" dirty="0"/>
+              <a:t>Now will zoom in on the bottom– left corner for a better look.</a:t>
+            </a:r>
+          </a:p>
+          <a:p>
+            <a:endParaRPr lang="en-US" dirty="0"/>
+          </a:p>
+        </p:txBody>
+      </p:sp>
+      <p:sp>
+        <p:nvSpPr>
+          <p:cNvPr id="4" name="Slide Number Placeholder 3">
+            <a:extLst>
+              <a:ext uri="{FF2B5EF4-FFF2-40B4-BE49-F238E27FC236}">
+                <a16:creationId xmlns:a16="http://schemas.microsoft.com/office/drawing/2014/main" id="{DC433C83-9FCB-FFF0-DB0E-BF8783D611AF}"/>
+              </a:ext>
+            </a:extLst>
+          </p:cNvPr>
+          <p:cNvSpPr>
+            <a:spLocks noGrp="1"/>
+          </p:cNvSpPr>
+          <p:nvPr>
+            <p:ph type="sldNum" sz="quarter" idx="5"/>
+          </p:nvPr>
+        </p:nvSpPr>
+        <p:spPr/>
+        <p:txBody>
+          <a:bodyPr/>
+          <a:lstStyle/>
+          <a:p>
+            <a:fld id="{433F17CF-9CB7-1F41-9F3B-9D2A483692EC}" type="slidenum">
+              <a:rPr lang="en-US" smtClean="0"/>
+              <a:t>8</a:t>
+            </a:fld>
+            <a:endParaRPr lang="en-US"/>
+          </a:p>
+        </p:txBody>
+      </p:sp>
+    </p:spTree>
+    <p:extLst>
+      <p:ext uri="{BB962C8B-B14F-4D97-AF65-F5344CB8AC3E}">
+        <p14:creationId xmlns:p14="http://schemas.microsoft.com/office/powerpoint/2010/main" val="3219852751"/>
+      </p:ext>
+    </p:extLst>
+  </p:cSld>
+  <p:clrMapOvr>
+    <a:masterClrMapping/>
+  </p:clrMapOvr>
+</p:notes>
+</file>
+
+<file path=ppt/notesSlides/notesSlide8.xml><?xml version="1.0" encoding="utf-8"?>
+<p:notes xmlns:a="http://schemas.openxmlformats.org/drawingml/2006/main" xmlns:r="http://schemas.openxmlformats.org/officeDocument/2006/relationships" xmlns:p="http://schemas.openxmlformats.org/presentationml/2006/main">
+  <p:cSld>
+    <p:spTree>
+      <p:nvGrpSpPr>
+        <p:cNvPr id="1" name="">
+          <a:extLst>
+            <a:ext uri="{FF2B5EF4-FFF2-40B4-BE49-F238E27FC236}">
+              <a16:creationId xmlns:a16="http://schemas.microsoft.com/office/drawing/2014/main" id="{7C8455B3-56E9-30A6-8B3E-7527E27BF12F}"/>
+            </a:ext>
+          </a:extLst>
+        </p:cNvPr>
+        <p:cNvGrpSpPr/>
+        <p:nvPr/>
+      </p:nvGrpSpPr>
+      <p:grpSpPr>
+        <a:xfrm>
+          <a:off x="0" y="0"/>
+          <a:ext cx="0" cy="0"/>
+          <a:chOff x="0" y="0"/>
+          <a:chExt cx="0" cy="0"/>
+        </a:xfrm>
+      </p:grpSpPr>
+      <p:sp>
+        <p:nvSpPr>
+          <p:cNvPr id="2" name="Slide Image Placeholder 1">
+            <a:extLst>
+              <a:ext uri="{FF2B5EF4-FFF2-40B4-BE49-F238E27FC236}">
+                <a16:creationId xmlns:a16="http://schemas.microsoft.com/office/drawing/2014/main" id="{B7A62415-9642-A50F-4A7A-69FCA3A3FAAF}"/>
+              </a:ext>
+            </a:extLst>
+          </p:cNvPr>
+          <p:cNvSpPr>
+            <a:spLocks noGrp="1" noRot="1" noChangeAspect="1"/>
+          </p:cNvSpPr>
+          <p:nvPr>
+            <p:ph type="sldImg"/>
+          </p:nvPr>
+        </p:nvSpPr>
+        <p:spPr/>
+        <p:txBody>
+          <a:bodyPr/>
+          <a:lstStyle/>
+          <a:p>
+            <a:endParaRPr lang="en-US"/>
+          </a:p>
+        </p:txBody>
+      </p:sp>
+      <p:sp>
+        <p:nvSpPr>
+          <p:cNvPr id="3" name="Notes Placeholder 2">
+            <a:extLst>
+              <a:ext uri="{FF2B5EF4-FFF2-40B4-BE49-F238E27FC236}">
+                <a16:creationId xmlns:a16="http://schemas.microsoft.com/office/drawing/2014/main" id="{9764C5C8-6EA7-039A-6306-072AABF89EF4}"/>
+              </a:ext>
+            </a:extLst>
+          </p:cNvPr>
+          <p:cNvSpPr>
+            <a:spLocks noGrp="1"/>
+          </p:cNvSpPr>
+          <p:nvPr>
+            <p:ph type="body" idx="1"/>
+          </p:nvPr>
+        </p:nvSpPr>
+        <p:spPr/>
+        <p:txBody>
+          <a:bodyPr/>
+          <a:lstStyle/>
+          <a:p>
+            <a:r>
+              <a:rPr lang="en-US" sz="2400" dirty="0"/>
+              <a:t>Electricity use by floor area, zoomed – in bottom left corner</a:t>
+            </a:r>
+          </a:p>
+        </p:txBody>
+      </p:sp>
+      <p:sp>
+        <p:nvSpPr>
+          <p:cNvPr id="4" name="Slide Number Placeholder 3">
+            <a:extLst>
+              <a:ext uri="{FF2B5EF4-FFF2-40B4-BE49-F238E27FC236}">
+                <a16:creationId xmlns:a16="http://schemas.microsoft.com/office/drawing/2014/main" id="{F3A75914-7C41-9522-01EE-911D2D39F112}"/>
+              </a:ext>
+            </a:extLst>
+          </p:cNvPr>
+          <p:cNvSpPr>
+            <a:spLocks noGrp="1"/>
+          </p:cNvSpPr>
+          <p:nvPr>
+            <p:ph type="sldNum" sz="quarter" idx="5"/>
+          </p:nvPr>
+        </p:nvSpPr>
+        <p:spPr/>
+        <p:txBody>
+          <a:bodyPr/>
+          <a:lstStyle/>
+          <a:p>
+            <a:fld id="{433F17CF-9CB7-1F41-9F3B-9D2A483692EC}" type="slidenum">
+              <a:rPr lang="en-US" smtClean="0"/>
+              <a:t>9</a:t>
+            </a:fld>
+            <a:endParaRPr lang="en-US"/>
+          </a:p>
+        </p:txBody>
+      </p:sp>
+    </p:spTree>
+    <p:extLst>
+      <p:ext uri="{BB962C8B-B14F-4D97-AF65-F5344CB8AC3E}">
+        <p14:creationId xmlns:p14="http://schemas.microsoft.com/office/powerpoint/2010/main" val="1165965023"/>
+      </p:ext>
+    </p:extLst>
+  </p:cSld>
+  <p:clrMapOvr>
+    <a:masterClrMapping/>
+  </p:clrMapOvr>
+</p:notes>
+</file>
+
+<file path=ppt/notesSlides/notesSlide9.xml><?xml version="1.0" encoding="utf-8"?>
+<p:notes xmlns:a="http://schemas.openxmlformats.org/drawingml/2006/main" xmlns:r="http://schemas.openxmlformats.org/officeDocument/2006/relationships" xmlns:p="http://schemas.openxmlformats.org/presentationml/2006/main">
+  <p:cSld>
+    <p:spTree>
+      <p:nvGrpSpPr>
+        <p:cNvPr id="1" name="">
+          <a:extLst>
+            <a:ext uri="{FF2B5EF4-FFF2-40B4-BE49-F238E27FC236}">
+              <a16:creationId xmlns:a16="http://schemas.microsoft.com/office/drawing/2014/main" id="{41F4D68D-1DA8-5F41-6745-89703CD34B21}"/>
+            </a:ext>
+          </a:extLst>
+        </p:cNvPr>
+        <p:cNvGrpSpPr/>
+        <p:nvPr/>
+      </p:nvGrpSpPr>
+      <p:grpSpPr>
+        <a:xfrm>
+          <a:off x="0" y="0"/>
+          <a:ext cx="0" cy="0"/>
+          <a:chOff x="0" y="0"/>
+          <a:chExt cx="0" cy="0"/>
+        </a:xfrm>
+      </p:grpSpPr>
+      <p:sp>
+        <p:nvSpPr>
+          <p:cNvPr id="2" name="Slide Image Placeholder 1">
+            <a:extLst>
+              <a:ext uri="{FF2B5EF4-FFF2-40B4-BE49-F238E27FC236}">
+                <a16:creationId xmlns:a16="http://schemas.microsoft.com/office/drawing/2014/main" id="{70E4F896-C6B8-F4B8-C975-289106CD7F65}"/>
+              </a:ext>
+            </a:extLst>
+          </p:cNvPr>
+          <p:cNvSpPr>
+            <a:spLocks noGrp="1" noRot="1" noChangeAspect="1"/>
+          </p:cNvSpPr>
+          <p:nvPr>
+            <p:ph type="sldImg"/>
+          </p:nvPr>
+        </p:nvSpPr>
+        <p:spPr/>
+        <p:txBody>
+          <a:bodyPr/>
+          <a:lstStyle/>
+          <a:p>
+            <a:endParaRPr lang="en-US"/>
+          </a:p>
+        </p:txBody>
+      </p:sp>
+      <p:sp>
+        <p:nvSpPr>
+          <p:cNvPr id="3" name="Notes Placeholder 2">
+            <a:extLst>
+              <a:ext uri="{FF2B5EF4-FFF2-40B4-BE49-F238E27FC236}">
+                <a16:creationId xmlns:a16="http://schemas.microsoft.com/office/drawing/2014/main" id="{3368D968-2D3B-644E-2E8C-AB0A673A97D6}"/>
+              </a:ext>
+            </a:extLst>
+          </p:cNvPr>
+          <p:cNvSpPr>
+            <a:spLocks noGrp="1"/>
+          </p:cNvSpPr>
+          <p:nvPr>
+            <p:ph type="body" idx="1"/>
+          </p:nvPr>
+        </p:nvSpPr>
+        <p:spPr/>
+        <p:txBody>
+          <a:bodyPr/>
+          <a:lstStyle/>
+          <a:p>
+            <a:r>
+              <a:rPr lang="en-US" sz="2400" dirty="0"/>
+              <a:t>The British thermal unit (Btu) is a unit of measure of heat.  </a:t>
+            </a:r>
+          </a:p>
+          <a:p>
+            <a:endParaRPr lang="en-US" dirty="0"/>
+          </a:p>
+        </p:txBody>
+      </p:sp>
+      <p:sp>
+        <p:nvSpPr>
+          <p:cNvPr id="4" name="Slide Number Placeholder 3">
+            <a:extLst>
+              <a:ext uri="{FF2B5EF4-FFF2-40B4-BE49-F238E27FC236}">
+                <a16:creationId xmlns:a16="http://schemas.microsoft.com/office/drawing/2014/main" id="{AF7131A2-9F55-3AE3-D0C0-E5B29A651238}"/>
+              </a:ext>
+            </a:extLst>
+          </p:cNvPr>
+          <p:cNvSpPr>
+            <a:spLocks noGrp="1"/>
+          </p:cNvSpPr>
+          <p:nvPr>
+            <p:ph type="sldNum" sz="quarter" idx="5"/>
+          </p:nvPr>
+        </p:nvSpPr>
+        <p:spPr/>
+        <p:txBody>
+          <a:bodyPr/>
+          <a:lstStyle/>
+          <a:p>
+            <a:fld id="{433F17CF-9CB7-1F41-9F3B-9D2A483692EC}" type="slidenum">
+              <a:rPr lang="en-US" smtClean="0"/>
+              <a:t>10</a:t>
+            </a:fld>
+            <a:endParaRPr lang="en-US"/>
+          </a:p>
+        </p:txBody>
+      </p:sp>
+    </p:spTree>
+    <p:extLst>
+      <p:ext uri="{BB962C8B-B14F-4D97-AF65-F5344CB8AC3E}">
+        <p14:creationId xmlns:p14="http://schemas.microsoft.com/office/powerpoint/2010/main" val="4241986356"/>
       </p:ext>
     </p:extLst>
   </p:cSld>
@@ -9807,6 +11158,599 @@
 </p:sld>
 </file>
 
+<file path=ppt/slides/slide10.xml><?xml version="1.0" encoding="utf-8"?>
+<p:sld xmlns:a="http://schemas.openxmlformats.org/drawingml/2006/main" xmlns:r="http://schemas.openxmlformats.org/officeDocument/2006/relationships" xmlns:p="http://schemas.openxmlformats.org/presentationml/2006/main">
+  <p:cSld>
+    <p:spTree>
+      <p:nvGrpSpPr>
+        <p:cNvPr id="1" name="">
+          <a:extLst>
+            <a:ext uri="{FF2B5EF4-FFF2-40B4-BE49-F238E27FC236}">
+              <a16:creationId xmlns:a16="http://schemas.microsoft.com/office/drawing/2014/main" id="{2E5ADF0F-2884-46DE-263D-B4343800DDB0}"/>
+            </a:ext>
+          </a:extLst>
+        </p:cNvPr>
+        <p:cNvGrpSpPr/>
+        <p:nvPr/>
+      </p:nvGrpSpPr>
+      <p:grpSpPr>
+        <a:xfrm>
+          <a:off x="0" y="0"/>
+          <a:ext cx="0" cy="0"/>
+          <a:chOff x="0" y="0"/>
+          <a:chExt cx="0" cy="0"/>
+        </a:xfrm>
+      </p:grpSpPr>
+      <p:sp>
+        <p:nvSpPr>
+          <p:cNvPr id="2" name="Title 1">
+            <a:extLst>
+              <a:ext uri="{FF2B5EF4-FFF2-40B4-BE49-F238E27FC236}">
+                <a16:creationId xmlns:a16="http://schemas.microsoft.com/office/drawing/2014/main" id="{9BB81868-E30C-3692-AE22-8766AE82B42F}"/>
+              </a:ext>
+            </a:extLst>
+          </p:cNvPr>
+          <p:cNvSpPr>
+            <a:spLocks noGrp="1"/>
+          </p:cNvSpPr>
+          <p:nvPr>
+            <p:ph type="title"/>
+          </p:nvPr>
+        </p:nvSpPr>
+        <p:spPr>
+          <a:xfrm>
+            <a:off x="971550" y="562356"/>
+            <a:ext cx="10835640" cy="791926"/>
+          </a:xfrm>
+        </p:spPr>
+        <p:txBody>
+          <a:bodyPr>
+            <a:normAutofit/>
+          </a:bodyPr>
+          <a:lstStyle/>
+          <a:p>
+            <a:r>
+              <a:rPr lang="en-US" sz="3200" dirty="0"/>
+              <a:t>Distribution of Energy Use Intensity</a:t>
+            </a:r>
+          </a:p>
+        </p:txBody>
+      </p:sp>
+      <p:pic>
+        <p:nvPicPr>
+          <p:cNvPr id="5" name="Picture 4">
+            <a:extLst>
+              <a:ext uri="{FF2B5EF4-FFF2-40B4-BE49-F238E27FC236}">
+                <a16:creationId xmlns:a16="http://schemas.microsoft.com/office/drawing/2014/main" id="{A39FCA01-6789-F936-6137-03AB4814D13E}"/>
+              </a:ext>
+            </a:extLst>
+          </p:cNvPr>
+          <p:cNvPicPr>
+            <a:picLocks noChangeAspect="1"/>
+          </p:cNvPicPr>
+          <p:nvPr/>
+        </p:nvPicPr>
+        <p:blipFill>
+          <a:blip r:embed="rId3"/>
+          <a:stretch>
+            <a:fillRect/>
+          </a:stretch>
+        </p:blipFill>
+        <p:spPr>
+          <a:xfrm>
+            <a:off x="648970" y="31797"/>
+            <a:ext cx="10678160" cy="6755570"/>
+          </a:xfrm>
+          <a:prstGeom prst="rect">
+            <a:avLst/>
+          </a:prstGeom>
+        </p:spPr>
+      </p:pic>
+    </p:spTree>
+    <p:extLst>
+      <p:ext uri="{BB962C8B-B14F-4D97-AF65-F5344CB8AC3E}">
+        <p14:creationId xmlns:p14="http://schemas.microsoft.com/office/powerpoint/2010/main" val="1413457445"/>
+      </p:ext>
+    </p:extLst>
+  </p:cSld>
+  <p:clrMapOvr>
+    <a:masterClrMapping/>
+  </p:clrMapOvr>
+</p:sld>
+</file>
+
+<file path=ppt/slides/slide11.xml><?xml version="1.0" encoding="utf-8"?>
+<p:sld xmlns:a="http://schemas.openxmlformats.org/drawingml/2006/main" xmlns:r="http://schemas.openxmlformats.org/officeDocument/2006/relationships" xmlns:p="http://schemas.openxmlformats.org/presentationml/2006/main">
+  <p:cSld>
+    <p:spTree>
+      <p:nvGrpSpPr>
+        <p:cNvPr id="1" name="">
+          <a:extLst>
+            <a:ext uri="{FF2B5EF4-FFF2-40B4-BE49-F238E27FC236}">
+              <a16:creationId xmlns:a16="http://schemas.microsoft.com/office/drawing/2014/main" id="{39BF443E-3501-EA02-B424-7E256FB721AD}"/>
+            </a:ext>
+          </a:extLst>
+        </p:cNvPr>
+        <p:cNvGrpSpPr/>
+        <p:nvPr/>
+      </p:nvGrpSpPr>
+      <p:grpSpPr>
+        <a:xfrm>
+          <a:off x="0" y="0"/>
+          <a:ext cx="0" cy="0"/>
+          <a:chOff x="0" y="0"/>
+          <a:chExt cx="0" cy="0"/>
+        </a:xfrm>
+      </p:grpSpPr>
+      <p:sp>
+        <p:nvSpPr>
+          <p:cNvPr id="2" name="Title 1">
+            <a:extLst>
+              <a:ext uri="{FF2B5EF4-FFF2-40B4-BE49-F238E27FC236}">
+                <a16:creationId xmlns:a16="http://schemas.microsoft.com/office/drawing/2014/main" id="{764B128B-B738-BF3E-1EF8-0C88B7F66462}"/>
+              </a:ext>
+            </a:extLst>
+          </p:cNvPr>
+          <p:cNvSpPr>
+            <a:spLocks noGrp="1"/>
+          </p:cNvSpPr>
+          <p:nvPr>
+            <p:ph type="title"/>
+          </p:nvPr>
+        </p:nvSpPr>
+        <p:spPr>
+          <a:xfrm>
+            <a:off x="182880" y="219456"/>
+            <a:ext cx="10835640" cy="791926"/>
+          </a:xfrm>
+        </p:spPr>
+        <p:txBody>
+          <a:bodyPr>
+            <a:normAutofit/>
+          </a:bodyPr>
+          <a:lstStyle/>
+          <a:p>
+            <a:r>
+              <a:rPr lang="en-US" sz="3200" dirty="0"/>
+              <a:t>Scatter Plot</a:t>
+            </a:r>
+          </a:p>
+        </p:txBody>
+      </p:sp>
+      <p:sp>
+        <p:nvSpPr>
+          <p:cNvPr id="4" name="TextBox 3">
+            <a:extLst>
+              <a:ext uri="{FF2B5EF4-FFF2-40B4-BE49-F238E27FC236}">
+                <a16:creationId xmlns:a16="http://schemas.microsoft.com/office/drawing/2014/main" id="{7EEC0D65-DF7D-A195-1D30-46F0BAA8876A}"/>
+              </a:ext>
+            </a:extLst>
+          </p:cNvPr>
+          <p:cNvSpPr txBox="1"/>
+          <p:nvPr/>
+        </p:nvSpPr>
+        <p:spPr>
+          <a:xfrm>
+            <a:off x="1159626" y="1198072"/>
+            <a:ext cx="10295313" cy="2585323"/>
+          </a:xfrm>
+          <a:prstGeom prst="rect">
+            <a:avLst/>
+          </a:prstGeom>
+          <a:noFill/>
+        </p:spPr>
+        <p:txBody>
+          <a:bodyPr wrap="square" rtlCol="0">
+            <a:spAutoFit/>
+          </a:bodyPr>
+          <a:lstStyle/>
+          <a:p>
+            <a:r>
+              <a:rPr lang="en-US" dirty="0"/>
+              <a:t>Building age vs ENERGY STAR score</a:t>
+            </a:r>
+          </a:p>
+          <a:p>
+            <a:endParaRPr lang="en-US" dirty="0"/>
+          </a:p>
+          <a:p>
+            <a:r>
+              <a:rPr lang="en-US" dirty="0"/>
+              <a:t>Year built vs ENERGY STAR score</a:t>
+            </a:r>
+          </a:p>
+          <a:p>
+            <a:endParaRPr lang="en-US" dirty="0"/>
+          </a:p>
+          <a:p>
+            <a:r>
+              <a:rPr lang="en-US" dirty="0"/>
+              <a:t>Electricity (kWh) vs floor area</a:t>
+            </a:r>
+          </a:p>
+          <a:p>
+            <a:endParaRPr lang="en-US" dirty="0"/>
+          </a:p>
+          <a:p>
+            <a:r>
+              <a:rPr lang="en-US" dirty="0"/>
+              <a:t>Total GHG Emissions (Metric Tons CO2e) vs Reported Property Gross Floor Area area</a:t>
+            </a:r>
+          </a:p>
+          <a:p>
+            <a:endParaRPr lang="en-US" dirty="0"/>
+          </a:p>
+          <a:p>
+            <a:endParaRPr lang="en-US" dirty="0"/>
+          </a:p>
+        </p:txBody>
+      </p:sp>
+    </p:spTree>
+    <p:extLst>
+      <p:ext uri="{BB962C8B-B14F-4D97-AF65-F5344CB8AC3E}">
+        <p14:creationId xmlns:p14="http://schemas.microsoft.com/office/powerpoint/2010/main" val="1826593962"/>
+      </p:ext>
+    </p:extLst>
+  </p:cSld>
+  <p:clrMapOvr>
+    <a:masterClrMapping/>
+  </p:clrMapOvr>
+</p:sld>
+</file>
+
+<file path=ppt/slides/slide12.xml><?xml version="1.0" encoding="utf-8"?>
+<p:sld xmlns:a="http://schemas.openxmlformats.org/drawingml/2006/main" xmlns:r="http://schemas.openxmlformats.org/officeDocument/2006/relationships" xmlns:p="http://schemas.openxmlformats.org/presentationml/2006/main">
+  <p:cSld>
+    <p:spTree>
+      <p:nvGrpSpPr>
+        <p:cNvPr id="1" name=""/>
+        <p:cNvGrpSpPr/>
+        <p:nvPr/>
+      </p:nvGrpSpPr>
+      <p:grpSpPr>
+        <a:xfrm>
+          <a:off x="0" y="0"/>
+          <a:ext cx="0" cy="0"/>
+          <a:chOff x="0" y="0"/>
+          <a:chExt cx="0" cy="0"/>
+        </a:xfrm>
+      </p:grpSpPr>
+      <p:sp>
+        <p:nvSpPr>
+          <p:cNvPr id="2" name="Title 1">
+            <a:extLst>
+              <a:ext uri="{FF2B5EF4-FFF2-40B4-BE49-F238E27FC236}">
+                <a16:creationId xmlns:a16="http://schemas.microsoft.com/office/drawing/2014/main" id="{E1E3B2DF-F9FD-24F2-0A9D-52887C066FE9}"/>
+              </a:ext>
+            </a:extLst>
+          </p:cNvPr>
+          <p:cNvSpPr>
+            <a:spLocks noGrp="1"/>
+          </p:cNvSpPr>
+          <p:nvPr>
+            <p:ph type="title"/>
+          </p:nvPr>
+        </p:nvSpPr>
+        <p:spPr/>
+        <p:txBody>
+          <a:bodyPr/>
+          <a:lstStyle/>
+          <a:p>
+            <a:r>
+              <a:rPr lang="en-US" dirty="0"/>
+              <a:t>Sources and Notes</a:t>
+            </a:r>
+          </a:p>
+        </p:txBody>
+      </p:sp>
+      <p:sp>
+        <p:nvSpPr>
+          <p:cNvPr id="4" name="TextBox 3">
+            <a:extLst>
+              <a:ext uri="{FF2B5EF4-FFF2-40B4-BE49-F238E27FC236}">
+                <a16:creationId xmlns:a16="http://schemas.microsoft.com/office/drawing/2014/main" id="{F2D671FF-C8EA-E68E-64CF-64D869BFE1A0}"/>
+              </a:ext>
+            </a:extLst>
+          </p:cNvPr>
+          <p:cNvSpPr txBox="1"/>
+          <p:nvPr/>
+        </p:nvSpPr>
+        <p:spPr>
+          <a:xfrm>
+            <a:off x="935914" y="1624405"/>
+            <a:ext cx="9854005" cy="6186309"/>
+          </a:xfrm>
+          <a:prstGeom prst="rect">
+            <a:avLst/>
+          </a:prstGeom>
+          <a:noFill/>
+        </p:spPr>
+        <p:txBody>
+          <a:bodyPr wrap="square">
+            <a:spAutoFit/>
+          </a:bodyPr>
+          <a:lstStyle/>
+          <a:p>
+            <a:r>
+              <a:rPr lang="en-US" dirty="0"/>
+              <a:t>2023 Energy Benchmarking All Sites</a:t>
+            </a:r>
+          </a:p>
+          <a:p>
+            <a:r>
+              <a:rPr lang="en-US" dirty="0"/>
+              <a:t>The Energy Benchmarking Law requires the County to make annually reported energy benchmarking information readily available to the public. This dataset reflects data received by the publish date and does not include individually attributable benchmarking data for buildings in Group 5, as CY 2023 was the first year that these buildings were required to report to DEP.</a:t>
+            </a:r>
+          </a:p>
+          <a:p>
+            <a:r>
+              <a:rPr lang="en-US" dirty="0"/>
+              <a:t>September 23, 2025</a:t>
+            </a:r>
+          </a:p>
+          <a:p>
+            <a:r>
+              <a:rPr lang="en-US" dirty="0"/>
+              <a:t>Dataset Owner: Kathy Luh</a:t>
+            </a:r>
+          </a:p>
+          <a:p>
+            <a:r>
+              <a:rPr lang="en-US" dirty="0"/>
+              <a:t>27 columns 1846 rows</a:t>
+            </a:r>
+          </a:p>
+          <a:p>
+            <a:endParaRPr lang="en-US" sz="1800" b="0" i="0" dirty="0">
+              <a:solidFill>
+                <a:srgbClr val="9454C3"/>
+              </a:solidFill>
+              <a:effectLst/>
+              <a:latin typeface="+mn-lt"/>
+              <a:hlinkClick r:id="rId3">
+                <a:extLst>
+                  <a:ext uri="{A12FA001-AC4F-418D-AE19-62706E023703}">
+                    <ahyp:hlinkClr xmlns:ahyp="http://schemas.microsoft.com/office/drawing/2018/hyperlinkcolor" val="tx"/>
+                  </a:ext>
+                </a:extLst>
+              </a:hlinkClick>
+            </a:endParaRPr>
+          </a:p>
+          <a:p>
+            <a:endParaRPr lang="en-US" dirty="0">
+              <a:hlinkClick r:id="rId3">
+                <a:extLst>
+                  <a:ext uri="{A12FA001-AC4F-418D-AE19-62706E023703}">
+                    <ahyp:hlinkClr xmlns:ahyp="http://schemas.microsoft.com/office/drawing/2018/hyperlinkcolor" val="tx"/>
+                  </a:ext>
+                </a:extLst>
+              </a:hlinkClick>
+            </a:endParaRPr>
+          </a:p>
+          <a:p>
+            <a:r>
+              <a:rPr lang="en-US" dirty="0">
+                <a:hlinkClick r:id="rId3">
+                  <a:extLst>
+                    <a:ext uri="{A12FA001-AC4F-418D-AE19-62706E023703}">
+                      <ahyp:hlinkClr xmlns:ahyp="http://schemas.microsoft.com/office/drawing/2018/hyperlinkcolor" val="tx"/>
+                    </a:ext>
+                  </a:extLst>
+                </a:hlinkClick>
+              </a:rPr>
+              <a:t>https://data.montgomerycountymd.gov/Environment/2023-Energy-Benchmarking-All-Sites/ensr-8pr2/about_data</a:t>
+            </a:r>
+            <a:endParaRPr lang="en-US" dirty="0"/>
+          </a:p>
+          <a:p>
+            <a:endParaRPr lang="en-US" dirty="0"/>
+          </a:p>
+          <a:p>
+            <a:r>
+              <a:rPr lang="en-US" dirty="0">
+                <a:hlinkClick r:id="rId4">
+                  <a:extLst>
+                    <a:ext uri="{A12FA001-AC4F-418D-AE19-62706E023703}">
+                      <ahyp:hlinkClr xmlns:ahyp="http://schemas.microsoft.com/office/drawing/2018/hyperlinkcolor" val="tx"/>
+                    </a:ext>
+                  </a:extLst>
+                </a:hlinkClick>
+              </a:rPr>
+              <a:t>https://www.energystar.gov/buildings/benchmark</a:t>
+            </a:r>
+            <a:endParaRPr lang="en-US" dirty="0"/>
+          </a:p>
+          <a:p>
+            <a:endParaRPr lang="en-US" sz="1800" b="0" i="0" dirty="0">
+              <a:effectLst/>
+              <a:latin typeface="+mn-lt"/>
+            </a:endParaRPr>
+          </a:p>
+          <a:p>
+            <a:r>
+              <a:rPr lang="en-US" u="sng" dirty="0"/>
+              <a:t>https://www.energystar.gov/buildings/about-us</a:t>
+            </a:r>
+            <a:endParaRPr lang="en-US" sz="1800" b="0" i="0" u="sng" dirty="0">
+              <a:effectLst/>
+              <a:latin typeface="+mn-lt"/>
+            </a:endParaRPr>
+          </a:p>
+          <a:p>
+            <a:endParaRPr lang="en-US" dirty="0"/>
+          </a:p>
+          <a:p>
+            <a:endParaRPr lang="en-US" dirty="0"/>
+          </a:p>
+          <a:p>
+            <a:endParaRPr lang="en-US" dirty="0"/>
+          </a:p>
+          <a:p>
+            <a:endParaRPr lang="en-US" dirty="0"/>
+          </a:p>
+          <a:p>
+            <a:endParaRPr lang="en-US" dirty="0"/>
+          </a:p>
+        </p:txBody>
+      </p:sp>
+    </p:spTree>
+    <p:extLst>
+      <p:ext uri="{BB962C8B-B14F-4D97-AF65-F5344CB8AC3E}">
+        <p14:creationId xmlns:p14="http://schemas.microsoft.com/office/powerpoint/2010/main" val="708741681"/>
+      </p:ext>
+    </p:extLst>
+  </p:cSld>
+  <p:clrMapOvr>
+    <a:masterClrMapping/>
+  </p:clrMapOvr>
+</p:sld>
+</file>
+
+<file path=ppt/slides/slide13.xml><?xml version="1.0" encoding="utf-8"?>
+<p:sld xmlns:a="http://schemas.openxmlformats.org/drawingml/2006/main" xmlns:r="http://schemas.openxmlformats.org/officeDocument/2006/relationships" xmlns:p="http://schemas.openxmlformats.org/presentationml/2006/main">
+  <p:cSld>
+    <p:spTree>
+      <p:nvGrpSpPr>
+        <p:cNvPr id="1" name="">
+          <a:extLst>
+            <a:ext uri="{FF2B5EF4-FFF2-40B4-BE49-F238E27FC236}">
+              <a16:creationId xmlns:a16="http://schemas.microsoft.com/office/drawing/2014/main" id="{C8909556-D094-88ED-99BD-A18828B5FF94}"/>
+            </a:ext>
+          </a:extLst>
+        </p:cNvPr>
+        <p:cNvGrpSpPr/>
+        <p:nvPr/>
+      </p:nvGrpSpPr>
+      <p:grpSpPr>
+        <a:xfrm>
+          <a:off x="0" y="0"/>
+          <a:ext cx="0" cy="0"/>
+          <a:chOff x="0" y="0"/>
+          <a:chExt cx="0" cy="0"/>
+        </a:xfrm>
+      </p:grpSpPr>
+      <p:sp>
+        <p:nvSpPr>
+          <p:cNvPr id="2" name="Title 1">
+            <a:extLst>
+              <a:ext uri="{FF2B5EF4-FFF2-40B4-BE49-F238E27FC236}">
+                <a16:creationId xmlns:a16="http://schemas.microsoft.com/office/drawing/2014/main" id="{3E25A48D-0768-A3B8-D12B-682FA04112C5}"/>
+              </a:ext>
+            </a:extLst>
+          </p:cNvPr>
+          <p:cNvSpPr>
+            <a:spLocks noGrp="1"/>
+          </p:cNvSpPr>
+          <p:nvPr>
+            <p:ph type="title"/>
+          </p:nvPr>
+        </p:nvSpPr>
+        <p:spPr>
+          <a:xfrm>
+            <a:off x="182880" y="219456"/>
+            <a:ext cx="10835640" cy="791926"/>
+          </a:xfrm>
+        </p:spPr>
+        <p:txBody>
+          <a:bodyPr>
+            <a:normAutofit/>
+          </a:bodyPr>
+          <a:lstStyle/>
+          <a:p>
+            <a:r>
+              <a:rPr lang="en-US" sz="3200" dirty="0"/>
+              <a:t>Notes</a:t>
+            </a:r>
+          </a:p>
+        </p:txBody>
+      </p:sp>
+      <p:sp>
+        <p:nvSpPr>
+          <p:cNvPr id="4" name="TextBox 3">
+            <a:extLst>
+              <a:ext uri="{FF2B5EF4-FFF2-40B4-BE49-F238E27FC236}">
+                <a16:creationId xmlns:a16="http://schemas.microsoft.com/office/drawing/2014/main" id="{4C5F2846-C481-8E79-2AE9-AAD75326287D}"/>
+              </a:ext>
+            </a:extLst>
+          </p:cNvPr>
+          <p:cNvSpPr txBox="1"/>
+          <p:nvPr/>
+        </p:nvSpPr>
+        <p:spPr>
+          <a:xfrm>
+            <a:off x="1159626" y="1198072"/>
+            <a:ext cx="10295313" cy="3693319"/>
+          </a:xfrm>
+          <a:prstGeom prst="rect">
+            <a:avLst/>
+          </a:prstGeom>
+          <a:noFill/>
+        </p:spPr>
+        <p:txBody>
+          <a:bodyPr wrap="square" rtlCol="0">
+            <a:spAutoFit/>
+          </a:bodyPr>
+          <a:lstStyle/>
+          <a:p>
+            <a:r>
+              <a:rPr lang="en-US" sz="2400" dirty="0"/>
+              <a:t>Btu:  the British thermal unit (Btu) is a unit of measure of heat.  </a:t>
+            </a:r>
+          </a:p>
+          <a:p>
+            <a:r>
+              <a:rPr lang="en-US" sz="2400" dirty="0"/>
+              <a:t>It’s the amount of heat required to raise the temperature of one </a:t>
+            </a:r>
+          </a:p>
+          <a:p>
+            <a:r>
+              <a:rPr lang="en-US" sz="2400" dirty="0"/>
+              <a:t>pound of water by one degree Fahrenheit.</a:t>
+            </a:r>
+          </a:p>
+          <a:p>
+            <a:r>
+              <a:rPr lang="en-US" sz="2400" dirty="0"/>
+              <a:t>One Btu equals about 1,055 joules. </a:t>
+            </a:r>
+          </a:p>
+          <a:p>
+            <a:endParaRPr lang="en-US" sz="2400" dirty="0"/>
+          </a:p>
+          <a:p>
+            <a:endParaRPr lang="en-US" sz="2400" dirty="0"/>
+          </a:p>
+          <a:p>
+            <a:pPr lvl="0">
+              <a:defRPr/>
+            </a:pPr>
+            <a:r>
+              <a:rPr lang="en-US" sz="2400" dirty="0"/>
+              <a:t>Energy Star: 1–100 score, which rates energy performance in comparison to similar buildings across the country</a:t>
+            </a:r>
+          </a:p>
+          <a:p>
+            <a:endParaRPr lang="en-US" sz="2400" dirty="0"/>
+          </a:p>
+          <a:p>
+            <a:endParaRPr lang="en-US" dirty="0"/>
+          </a:p>
+        </p:txBody>
+      </p:sp>
+    </p:spTree>
+    <p:extLst>
+      <p:ext uri="{BB962C8B-B14F-4D97-AF65-F5344CB8AC3E}">
+        <p14:creationId xmlns:p14="http://schemas.microsoft.com/office/powerpoint/2010/main" val="3112365671"/>
+      </p:ext>
+    </p:extLst>
+  </p:cSld>
+  <p:clrMapOvr>
+    <a:masterClrMapping/>
+  </p:clrMapOvr>
+</p:sld>
+</file>
+
 <file path=ppt/slides/slide2.xml><?xml version="1.0" encoding="utf-8"?>
 <p:sld xmlns:a="http://schemas.openxmlformats.org/drawingml/2006/main" xmlns:r="http://schemas.openxmlformats.org/officeDocument/2006/relationships" xmlns:p="http://schemas.openxmlformats.org/presentationml/2006/main">
   <p:cSld>
@@ -9842,11 +11786,13 @@
         </p:nvSpPr>
         <p:spPr/>
         <p:txBody>
-          <a:bodyPr/>
-          <a:lstStyle/>
-          <a:p>
-            <a:r>
-              <a:rPr lang="en-US" dirty="0"/>
+          <a:bodyPr>
+            <a:normAutofit/>
+          </a:bodyPr>
+          <a:lstStyle/>
+          <a:p>
+            <a:r>
+              <a:rPr lang="en-US" sz="3200" dirty="0"/>
               <a:t>Source Dataset</a:t>
             </a:r>
           </a:p>
@@ -9866,8 +11812,8 @@
         </p:nvSpPr>
         <p:spPr>
           <a:xfrm>
-            <a:off x="1021976" y="1188720"/>
-            <a:ext cx="8127403" cy="1754326"/>
+            <a:off x="1285212" y="2283229"/>
+            <a:ext cx="8127403" cy="2646878"/>
           </a:xfrm>
           <a:prstGeom prst="rect">
             <a:avLst/>
@@ -9881,23 +11827,32 @@
           <a:lstStyle/>
           <a:p>
             <a:r>
-              <a:rPr lang="en-US" sz="1800" dirty="0"/>
+              <a:rPr lang="en-US" sz="2800" dirty="0"/>
               <a:t>2023 Energy Benchmarking All Sites</a:t>
             </a:r>
           </a:p>
           <a:p>
-            <a:endParaRPr lang="en-US" dirty="0"/>
-          </a:p>
-          <a:p>
-            <a:endParaRPr lang="en-US" sz="1800" dirty="0"/>
-          </a:p>
-          <a:p>
-            <a:r>
-              <a:rPr lang="en-US" dirty="0">
-                <a:hlinkClick r:id="rId2"/>
+            <a:endParaRPr lang="en-US" sz="2800" dirty="0"/>
+          </a:p>
+          <a:p>
+            <a:endParaRPr lang="en-US" sz="2800" dirty="0"/>
+          </a:p>
+          <a:p>
+            <a:r>
+              <a:rPr lang="en-US" sz="2800" u="sng" dirty="0">
+                <a:hlinkClick r:id="rId2">
+                  <a:extLst>
+                    <a:ext uri="{A12FA001-AC4F-418D-AE19-62706E023703}">
+                      <ahyp:hlinkClr xmlns:ahyp="http://schemas.microsoft.com/office/drawing/2018/hyperlinkcolor" val="tx"/>
+                    </a:ext>
+                  </a:extLst>
+                </a:hlinkClick>
               </a:rPr>
               <a:t>https://data.montgomerycountymd.gov</a:t>
             </a:r>
+            <a:endParaRPr lang="en-US" sz="2800" u="sng" dirty="0"/>
+          </a:p>
+          <a:p>
             <a:endParaRPr lang="en-US" dirty="0"/>
           </a:p>
           <a:p>
@@ -9956,8 +11911,8 @@
         </p:nvSpPr>
         <p:spPr>
           <a:xfrm>
-            <a:off x="1014153" y="953746"/>
-            <a:ext cx="7063047" cy="3729090"/>
+            <a:off x="3140481" y="2337815"/>
+            <a:ext cx="6415000" cy="1091185"/>
           </a:xfrm>
         </p:spPr>
         <p:txBody>
@@ -9967,37 +11922,21 @@
           <a:lstStyle/>
           <a:p>
             <a:r>
-              <a:rPr lang="en-US" dirty="0"/>
+              <a:rPr lang="en-US" sz="4000" dirty="0"/>
               <a:t>What is Benchmarking?</a:t>
             </a:r>
             <a:br>
-              <a:rPr lang="en-US" dirty="0"/>
+              <a:rPr lang="en-US" sz="3600" dirty="0"/>
             </a:br>
             <a:br>
-              <a:rPr lang="en-US" dirty="0"/>
+              <a:rPr lang="en-US" sz="3600" dirty="0"/>
             </a:br>
             <a:br>
-              <a:rPr lang="en-US" dirty="0"/>
+              <a:rPr lang="en-US" sz="3600" dirty="0"/>
             </a:br>
             <a:br>
-              <a:rPr lang="en-US" dirty="0"/>
+              <a:rPr lang="en-US" sz="3600" dirty="0"/>
             </a:br>
-            <a:br>
-              <a:rPr lang="en-US" dirty="0"/>
-            </a:br>
-            <a:br>
-              <a:rPr lang="en-US" dirty="0"/>
-            </a:br>
-            <a:br>
-              <a:rPr lang="en-US" dirty="0"/>
-            </a:br>
-            <a:br>
-              <a:rPr lang="en-US" dirty="0"/>
-            </a:br>
-            <a:r>
-              <a:rPr lang="en-US" dirty="0"/>
-              <a:t>Energy Star Score</a:t>
-            </a:r>
             <a:br>
               <a:rPr lang="en-US" dirty="0"/>
             </a:br>
@@ -10052,7 +11991,7 @@
           <p:cNvPr id="2" name="Title 1">
             <a:extLst>
               <a:ext uri="{FF2B5EF4-FFF2-40B4-BE49-F238E27FC236}">
-                <a16:creationId xmlns:a16="http://schemas.microsoft.com/office/drawing/2014/main" id="{E1E3B2DF-F9FD-24F2-0A9D-52887C066FE9}"/>
+                <a16:creationId xmlns:a16="http://schemas.microsoft.com/office/drawing/2014/main" id="{4FCB3986-78F3-ABAC-7921-CFEC2952661B}"/>
               </a:ext>
             </a:extLst>
           </p:cNvPr>
@@ -10063,14 +12002,21 @@
             <p:ph type="title"/>
           </p:nvPr>
         </p:nvSpPr>
-        <p:spPr/>
-        <p:txBody>
-          <a:bodyPr/>
-          <a:lstStyle/>
-          <a:p>
-            <a:r>
-              <a:rPr lang="en-US" dirty="0"/>
-              <a:t>Sources and Notes</a:t>
+        <p:spPr>
+          <a:xfrm>
+            <a:off x="182880" y="219456"/>
+            <a:ext cx="10835640" cy="791926"/>
+          </a:xfrm>
+        </p:spPr>
+        <p:txBody>
+          <a:bodyPr>
+            <a:normAutofit/>
+          </a:bodyPr>
+          <a:lstStyle/>
+          <a:p>
+            <a:r>
+              <a:rPr lang="en-US" sz="3200" dirty="0"/>
+              <a:t>Exploratory Analysis </a:t>
             </a:r>
           </a:p>
         </p:txBody>
@@ -10080,7 +12026,7 @@
           <p:cNvPr id="4" name="TextBox 3">
             <a:extLst>
               <a:ext uri="{FF2B5EF4-FFF2-40B4-BE49-F238E27FC236}">
-                <a16:creationId xmlns:a16="http://schemas.microsoft.com/office/drawing/2014/main" id="{F2D671FF-C8EA-E68E-64CF-64D869BFE1A0}"/>
+                <a16:creationId xmlns:a16="http://schemas.microsoft.com/office/drawing/2014/main" id="{9F5E170C-F976-2954-22A2-6DD6024FD83B}"/>
               </a:ext>
             </a:extLst>
           </p:cNvPr>
@@ -10089,8 +12035,8 @@
         </p:nvSpPr>
         <p:spPr>
           <a:xfrm>
-            <a:off x="935914" y="1624405"/>
-            <a:ext cx="9854005" cy="6186309"/>
+            <a:off x="1512101" y="1011382"/>
+            <a:ext cx="10295313" cy="5152308"/>
           </a:xfrm>
           <a:prstGeom prst="rect">
             <a:avLst/>
@@ -10098,137 +12044,604 @@
           <a:noFill/>
         </p:spPr>
         <p:txBody>
-          <a:bodyPr wrap="square">
+          <a:bodyPr wrap="square" rtlCol="0">
             <a:spAutoFit/>
           </a:bodyPr>
           <a:lstStyle/>
           <a:p>
-            <a:r>
-              <a:rPr lang="en-US" dirty="0"/>
-              <a:t>2023 Energy Benchmarking All Sites</a:t>
-            </a:r>
-          </a:p>
-          <a:p>
-            <a:r>
-              <a:rPr lang="en-US" dirty="0"/>
-              <a:t>The Energy Benchmarking Law requires the County to make annually reported energy benchmarking information readily available to the public. This dataset reflects data received by the publish date and does not include individually attributable benchmarking data for buildings in Group 5, as CY 2023 was the first year that these buildings were required to report to DEP.</a:t>
-            </a:r>
-          </a:p>
-          <a:p>
-            <a:r>
-              <a:rPr lang="en-US" dirty="0"/>
-              <a:t>September 23, 2025</a:t>
-            </a:r>
-          </a:p>
-          <a:p>
-            <a:r>
-              <a:rPr lang="en-US" dirty="0"/>
-              <a:t>Dataset Owner: Kathy Luh</a:t>
-            </a:r>
-          </a:p>
-          <a:p>
-            <a:r>
-              <a:rPr lang="en-US" dirty="0"/>
-              <a:t>27 columns 1846 rows</a:t>
-            </a:r>
-          </a:p>
-          <a:p>
-            <a:endParaRPr lang="en-US" sz="1800" b="0" i="0" dirty="0">
-              <a:solidFill>
-                <a:srgbClr val="9454C3"/>
-              </a:solidFill>
-              <a:effectLst/>
-              <a:latin typeface="+mn-lt"/>
-              <a:hlinkClick r:id="rId3">
-                <a:extLst>
-                  <a:ext uri="{A12FA001-AC4F-418D-AE19-62706E023703}">
-                    <ahyp:hlinkClr xmlns:ahyp="http://schemas.microsoft.com/office/drawing/2018/hyperlinkcolor" val="tx"/>
-                  </a:ext>
-                </a:extLst>
-              </a:hlinkClick>
-            </a:endParaRPr>
-          </a:p>
-          <a:p>
-            <a:endParaRPr lang="en-US" dirty="0">
-              <a:hlinkClick r:id="rId3">
-                <a:extLst>
-                  <a:ext uri="{A12FA001-AC4F-418D-AE19-62706E023703}">
-                    <ahyp:hlinkClr xmlns:ahyp="http://schemas.microsoft.com/office/drawing/2018/hyperlinkcolor" val="tx"/>
-                  </a:ext>
-                </a:extLst>
-              </a:hlinkClick>
-            </a:endParaRPr>
-          </a:p>
-          <a:p>
-            <a:r>
-              <a:rPr lang="en-US" dirty="0">
-                <a:hlinkClick r:id="rId3">
-                  <a:extLst>
-                    <a:ext uri="{A12FA001-AC4F-418D-AE19-62706E023703}">
-                      <ahyp:hlinkClr xmlns:ahyp="http://schemas.microsoft.com/office/drawing/2018/hyperlinkcolor" val="tx"/>
-                    </a:ext>
-                  </a:extLst>
-                </a:hlinkClick>
-              </a:rPr>
-              <a:t>https://data.montgomerycountymd.gov/Environment/2023-Energy-Benchmarking-All-Sites/ensr-8pr2/about_data</a:t>
-            </a:r>
-            <a:endParaRPr lang="en-US" dirty="0"/>
-          </a:p>
-          <a:p>
-            <a:endParaRPr lang="en-US" dirty="0"/>
-          </a:p>
-          <a:p>
-            <a:r>
-              <a:rPr lang="en-US" dirty="0">
-                <a:hlinkClick r:id="rId4">
-                  <a:extLst>
-                    <a:ext uri="{A12FA001-AC4F-418D-AE19-62706E023703}">
-                      <ahyp:hlinkClr xmlns:ahyp="http://schemas.microsoft.com/office/drawing/2018/hyperlinkcolor" val="tx"/>
-                    </a:ext>
-                  </a:extLst>
-                </a:hlinkClick>
-              </a:rPr>
-              <a:t>https://www.energystar.gov/buildings/benchmark</a:t>
-            </a:r>
-            <a:endParaRPr lang="en-US" dirty="0"/>
-          </a:p>
-          <a:p>
-            <a:endParaRPr lang="en-US" sz="1800" b="0" i="0" dirty="0">
-              <a:effectLst/>
-              <a:latin typeface="+mn-lt"/>
-            </a:endParaRPr>
-          </a:p>
-          <a:p>
-            <a:r>
-              <a:rPr lang="en-US" u="sng" dirty="0"/>
-              <a:t>https://www.energystar.gov/buildings/about-us</a:t>
-            </a:r>
-            <a:endParaRPr lang="en-US" sz="1800" b="0" i="0" u="sng" dirty="0">
-              <a:effectLst/>
-              <a:latin typeface="+mn-lt"/>
-            </a:endParaRPr>
-          </a:p>
-          <a:p>
-            <a:endParaRPr lang="en-US" dirty="0"/>
-          </a:p>
-          <a:p>
-            <a:endParaRPr lang="en-US" dirty="0"/>
-          </a:p>
-          <a:p>
-            <a:endParaRPr lang="en-US" dirty="0"/>
-          </a:p>
-          <a:p>
-            <a:endParaRPr lang="en-US" dirty="0"/>
-          </a:p>
-          <a:p>
-            <a:endParaRPr lang="en-US" dirty="0"/>
+            <a:pPr>
+              <a:lnSpc>
+                <a:spcPct val="200000"/>
+              </a:lnSpc>
+            </a:pPr>
+            <a:r>
+              <a:rPr lang="en-US" sz="2400" dirty="0"/>
+              <a:t>1846 rows, 27 columns </a:t>
+            </a:r>
+          </a:p>
+          <a:p>
+            <a:pPr>
+              <a:lnSpc>
+                <a:spcPct val="200000"/>
+              </a:lnSpc>
+            </a:pPr>
+            <a:r>
+              <a:rPr lang="en-US" sz="2400" dirty="0"/>
+              <a:t>25 duplicate entries</a:t>
+            </a:r>
+          </a:p>
+          <a:p>
+            <a:pPr>
+              <a:lnSpc>
+                <a:spcPct val="200000"/>
+              </a:lnSpc>
+            </a:pPr>
+            <a:r>
+              <a:rPr lang="en-US" sz="2400" dirty="0"/>
+              <a:t>1821 remaining</a:t>
+            </a:r>
+          </a:p>
+          <a:p>
+            <a:pPr>
+              <a:lnSpc>
+                <a:spcPct val="200000"/>
+              </a:lnSpc>
+            </a:pPr>
+            <a:r>
+              <a:rPr lang="en-US" sz="2400" dirty="0"/>
+              <a:t>Missing ID numbers and addresses</a:t>
+            </a:r>
+          </a:p>
+          <a:p>
+            <a:pPr>
+              <a:lnSpc>
+                <a:spcPct val="200000"/>
+              </a:lnSpc>
+            </a:pPr>
+            <a:r>
+              <a:rPr lang="en-US" sz="2400" dirty="0"/>
+              <a:t>Electricity (kWh) had the most unique entries:  	1716</a:t>
+            </a:r>
+          </a:p>
+          <a:p>
+            <a:pPr>
+              <a:lnSpc>
+                <a:spcPct val="200000"/>
+              </a:lnSpc>
+            </a:pPr>
+            <a:r>
+              <a:rPr lang="en-US" sz="2400" dirty="0"/>
+              <a:t>Reported Property Gross Floor Area unique: 		1672</a:t>
+            </a:r>
+          </a:p>
+          <a:p>
+            <a:pPr>
+              <a:lnSpc>
+                <a:spcPct val="200000"/>
+              </a:lnSpc>
+            </a:pPr>
+            <a:r>
+              <a:rPr lang="en-US" sz="2400" dirty="0"/>
+              <a:t>Total GHG Emissions (Metric Tons CO2e) unique:  	1619</a:t>
+            </a:r>
           </a:p>
         </p:txBody>
       </p:sp>
     </p:spTree>
     <p:extLst>
       <p:ext uri="{BB962C8B-B14F-4D97-AF65-F5344CB8AC3E}">
-        <p14:creationId xmlns:p14="http://schemas.microsoft.com/office/powerpoint/2010/main" val="708741681"/>
+        <p14:creationId xmlns:p14="http://schemas.microsoft.com/office/powerpoint/2010/main" val="2843265121"/>
+      </p:ext>
+    </p:extLst>
+  </p:cSld>
+  <p:clrMapOvr>
+    <a:masterClrMapping/>
+  </p:clrMapOvr>
+</p:sld>
+</file>
+
+<file path=ppt/slides/slide5.xml><?xml version="1.0" encoding="utf-8"?>
+<p:sld xmlns:a="http://schemas.openxmlformats.org/drawingml/2006/main" xmlns:r="http://schemas.openxmlformats.org/officeDocument/2006/relationships" xmlns:p="http://schemas.openxmlformats.org/presentationml/2006/main">
+  <p:cSld>
+    <p:spTree>
+      <p:nvGrpSpPr>
+        <p:cNvPr id="1" name="">
+          <a:extLst>
+            <a:ext uri="{FF2B5EF4-FFF2-40B4-BE49-F238E27FC236}">
+              <a16:creationId xmlns:a16="http://schemas.microsoft.com/office/drawing/2014/main" id="{E8ACE1E1-1798-58AE-70B0-42B792392228}"/>
+            </a:ext>
+          </a:extLst>
+        </p:cNvPr>
+        <p:cNvGrpSpPr/>
+        <p:nvPr/>
+      </p:nvGrpSpPr>
+      <p:grpSpPr>
+        <a:xfrm>
+          <a:off x="0" y="0"/>
+          <a:ext cx="0" cy="0"/>
+          <a:chOff x="0" y="0"/>
+          <a:chExt cx="0" cy="0"/>
+        </a:xfrm>
+      </p:grpSpPr>
+      <p:sp>
+        <p:nvSpPr>
+          <p:cNvPr id="8" name="Title 7">
+            <a:extLst>
+              <a:ext uri="{FF2B5EF4-FFF2-40B4-BE49-F238E27FC236}">
+                <a16:creationId xmlns:a16="http://schemas.microsoft.com/office/drawing/2014/main" id="{04FA671C-49F3-7EDE-329D-407806844210}"/>
+              </a:ext>
+            </a:extLst>
+          </p:cNvPr>
+          <p:cNvSpPr>
+            <a:spLocks noGrp="1"/>
+          </p:cNvSpPr>
+          <p:nvPr>
+            <p:ph type="title"/>
+          </p:nvPr>
+        </p:nvSpPr>
+        <p:spPr/>
+        <p:txBody>
+          <a:bodyPr/>
+          <a:lstStyle/>
+          <a:p>
+            <a:r>
+              <a:rPr lang="en-US" dirty="0"/>
+              <a:t>					</a:t>
+            </a:r>
+            <a:br>
+              <a:rPr lang="en-US" dirty="0"/>
+            </a:br>
+            <a:r>
+              <a:rPr lang="en-US" dirty="0"/>
+              <a:t>							Histogram</a:t>
+            </a:r>
+          </a:p>
+        </p:txBody>
+      </p:sp>
+      <p:pic>
+        <p:nvPicPr>
+          <p:cNvPr id="3" name="Picture 2">
+            <a:extLst>
+              <a:ext uri="{FF2B5EF4-FFF2-40B4-BE49-F238E27FC236}">
+                <a16:creationId xmlns:a16="http://schemas.microsoft.com/office/drawing/2014/main" id="{960698C5-8852-78C1-170F-56B08C45B10A}"/>
+              </a:ext>
+            </a:extLst>
+          </p:cNvPr>
+          <p:cNvPicPr>
+            <a:picLocks noChangeAspect="1"/>
+          </p:cNvPicPr>
+          <p:nvPr/>
+        </p:nvPicPr>
+        <p:blipFill>
+          <a:blip r:embed="rId3"/>
+          <a:stretch>
+            <a:fillRect/>
+          </a:stretch>
+        </p:blipFill>
+        <p:spPr>
+          <a:xfrm>
+            <a:off x="568346" y="137252"/>
+            <a:ext cx="11055308" cy="6583496"/>
+          </a:xfrm>
+          <a:prstGeom prst="rect">
+            <a:avLst/>
+          </a:prstGeom>
+        </p:spPr>
+      </p:pic>
+    </p:spTree>
+    <p:extLst>
+      <p:ext uri="{BB962C8B-B14F-4D97-AF65-F5344CB8AC3E}">
+        <p14:creationId xmlns:p14="http://schemas.microsoft.com/office/powerpoint/2010/main" val="1604359559"/>
+      </p:ext>
+    </p:extLst>
+  </p:cSld>
+  <p:clrMapOvr>
+    <a:masterClrMapping/>
+  </p:clrMapOvr>
+</p:sld>
+</file>
+
+<file path=ppt/slides/slide6.xml><?xml version="1.0" encoding="utf-8"?>
+<p:sld xmlns:a="http://schemas.openxmlformats.org/drawingml/2006/main" xmlns:r="http://schemas.openxmlformats.org/officeDocument/2006/relationships" xmlns:p="http://schemas.openxmlformats.org/presentationml/2006/main">
+  <p:cSld>
+    <p:spTree>
+      <p:nvGrpSpPr>
+        <p:cNvPr id="1" name="">
+          <a:extLst>
+            <a:ext uri="{FF2B5EF4-FFF2-40B4-BE49-F238E27FC236}">
+              <a16:creationId xmlns:a16="http://schemas.microsoft.com/office/drawing/2014/main" id="{5CE45521-1203-AF03-096A-156FCB2952DC}"/>
+            </a:ext>
+          </a:extLst>
+        </p:cNvPr>
+        <p:cNvGrpSpPr/>
+        <p:nvPr/>
+      </p:nvGrpSpPr>
+      <p:grpSpPr>
+        <a:xfrm>
+          <a:off x="0" y="0"/>
+          <a:ext cx="0" cy="0"/>
+          <a:chOff x="0" y="0"/>
+          <a:chExt cx="0" cy="0"/>
+        </a:xfrm>
+      </p:grpSpPr>
+      <p:sp>
+        <p:nvSpPr>
+          <p:cNvPr id="2" name="Title 1">
+            <a:extLst>
+              <a:ext uri="{FF2B5EF4-FFF2-40B4-BE49-F238E27FC236}">
+                <a16:creationId xmlns:a16="http://schemas.microsoft.com/office/drawing/2014/main" id="{ACD03AE2-C871-FE83-C7BD-96FE5463E081}"/>
+              </a:ext>
+            </a:extLst>
+          </p:cNvPr>
+          <p:cNvSpPr>
+            <a:spLocks noGrp="1"/>
+          </p:cNvSpPr>
+          <p:nvPr>
+            <p:ph type="title"/>
+          </p:nvPr>
+        </p:nvSpPr>
+        <p:spPr>
+          <a:xfrm>
+            <a:off x="971550" y="562356"/>
+            <a:ext cx="10835640" cy="791926"/>
+          </a:xfrm>
+        </p:spPr>
+        <p:txBody>
+          <a:bodyPr>
+            <a:normAutofit/>
+          </a:bodyPr>
+          <a:lstStyle/>
+          <a:p>
+            <a:r>
+              <a:rPr lang="en-US" sz="3200" dirty="0"/>
+              <a:t>Energy Star Scores</a:t>
+            </a:r>
+          </a:p>
+        </p:txBody>
+      </p:sp>
+      <p:pic>
+        <p:nvPicPr>
+          <p:cNvPr id="4" name="Picture 3">
+            <a:extLst>
+              <a:ext uri="{FF2B5EF4-FFF2-40B4-BE49-F238E27FC236}">
+                <a16:creationId xmlns:a16="http://schemas.microsoft.com/office/drawing/2014/main" id="{DE22ECB7-C120-0F9B-2934-4B425F713364}"/>
+              </a:ext>
+            </a:extLst>
+          </p:cNvPr>
+          <p:cNvPicPr>
+            <a:picLocks noChangeAspect="1"/>
+          </p:cNvPicPr>
+          <p:nvPr/>
+        </p:nvPicPr>
+        <p:blipFill>
+          <a:blip r:embed="rId3"/>
+          <a:stretch>
+            <a:fillRect/>
+          </a:stretch>
+        </p:blipFill>
+        <p:spPr>
+          <a:xfrm>
+            <a:off x="845820" y="55634"/>
+            <a:ext cx="10664190" cy="6746732"/>
+          </a:xfrm>
+          <a:prstGeom prst="rect">
+            <a:avLst/>
+          </a:prstGeom>
+        </p:spPr>
+      </p:pic>
+    </p:spTree>
+    <p:extLst>
+      <p:ext uri="{BB962C8B-B14F-4D97-AF65-F5344CB8AC3E}">
+        <p14:creationId xmlns:p14="http://schemas.microsoft.com/office/powerpoint/2010/main" val="2217054714"/>
+      </p:ext>
+    </p:extLst>
+  </p:cSld>
+  <p:clrMapOvr>
+    <a:masterClrMapping/>
+  </p:clrMapOvr>
+</p:sld>
+</file>
+
+<file path=ppt/slides/slide7.xml><?xml version="1.0" encoding="utf-8"?>
+<p:sld xmlns:a="http://schemas.openxmlformats.org/drawingml/2006/main" xmlns:r="http://schemas.openxmlformats.org/officeDocument/2006/relationships" xmlns:p="http://schemas.openxmlformats.org/presentationml/2006/main">
+  <p:cSld>
+    <p:spTree>
+      <p:nvGrpSpPr>
+        <p:cNvPr id="1" name="">
+          <a:extLst>
+            <a:ext uri="{FF2B5EF4-FFF2-40B4-BE49-F238E27FC236}">
+              <a16:creationId xmlns:a16="http://schemas.microsoft.com/office/drawing/2014/main" id="{FCBC8EC4-7D06-D0A8-F333-9D6AA72A8AAE}"/>
+            </a:ext>
+          </a:extLst>
+        </p:cNvPr>
+        <p:cNvGrpSpPr/>
+        <p:nvPr/>
+      </p:nvGrpSpPr>
+      <p:grpSpPr>
+        <a:xfrm>
+          <a:off x="0" y="0"/>
+          <a:ext cx="0" cy="0"/>
+          <a:chOff x="0" y="0"/>
+          <a:chExt cx="0" cy="0"/>
+        </a:xfrm>
+      </p:grpSpPr>
+      <p:sp>
+        <p:nvSpPr>
+          <p:cNvPr id="2" name="Title 1">
+            <a:extLst>
+              <a:ext uri="{FF2B5EF4-FFF2-40B4-BE49-F238E27FC236}">
+                <a16:creationId xmlns:a16="http://schemas.microsoft.com/office/drawing/2014/main" id="{7B4F989E-1742-9F9C-D708-B1D26D3B1C58}"/>
+              </a:ext>
+            </a:extLst>
+          </p:cNvPr>
+          <p:cNvSpPr>
+            <a:spLocks noGrp="1"/>
+          </p:cNvSpPr>
+          <p:nvPr>
+            <p:ph type="title"/>
+          </p:nvPr>
+        </p:nvSpPr>
+        <p:spPr>
+          <a:xfrm>
+            <a:off x="182880" y="219456"/>
+            <a:ext cx="10835640" cy="791926"/>
+          </a:xfrm>
+        </p:spPr>
+        <p:txBody>
+          <a:bodyPr>
+            <a:normAutofit fontScale="90000"/>
+          </a:bodyPr>
+          <a:lstStyle/>
+          <a:p>
+            <a:br>
+              <a:rPr lang="en-US" sz="3200" dirty="0"/>
+            </a:br>
+            <a:r>
+              <a:rPr lang="en-US" sz="3200" dirty="0"/>
+              <a:t>						Violin Electricity</a:t>
+            </a:r>
+          </a:p>
+        </p:txBody>
+      </p:sp>
+      <p:pic>
+        <p:nvPicPr>
+          <p:cNvPr id="5" name="Picture 4">
+            <a:extLst>
+              <a:ext uri="{FF2B5EF4-FFF2-40B4-BE49-F238E27FC236}">
+                <a16:creationId xmlns:a16="http://schemas.microsoft.com/office/drawing/2014/main" id="{7ABC784D-037D-1598-8764-EC54F0C9E1FE}"/>
+              </a:ext>
+            </a:extLst>
+          </p:cNvPr>
+          <p:cNvPicPr>
+            <a:picLocks noChangeAspect="1"/>
+          </p:cNvPicPr>
+          <p:nvPr/>
+        </p:nvPicPr>
+        <p:blipFill>
+          <a:blip r:embed="rId3"/>
+          <a:stretch>
+            <a:fillRect/>
+          </a:stretch>
+        </p:blipFill>
+        <p:spPr>
+          <a:xfrm>
+            <a:off x="833719" y="99801"/>
+            <a:ext cx="10555940" cy="6678247"/>
+          </a:xfrm>
+          <a:prstGeom prst="rect">
+            <a:avLst/>
+          </a:prstGeom>
+        </p:spPr>
+      </p:pic>
+    </p:spTree>
+    <p:extLst>
+      <p:ext uri="{BB962C8B-B14F-4D97-AF65-F5344CB8AC3E}">
+        <p14:creationId xmlns:p14="http://schemas.microsoft.com/office/powerpoint/2010/main" val="1425292552"/>
+      </p:ext>
+    </p:extLst>
+  </p:cSld>
+  <p:clrMapOvr>
+    <a:masterClrMapping/>
+  </p:clrMapOvr>
+</p:sld>
+</file>
+
+<file path=ppt/slides/slide8.xml><?xml version="1.0" encoding="utf-8"?>
+<p:sld xmlns:a="http://schemas.openxmlformats.org/drawingml/2006/main" xmlns:r="http://schemas.openxmlformats.org/officeDocument/2006/relationships" xmlns:p="http://schemas.openxmlformats.org/presentationml/2006/main">
+  <p:cSld>
+    <p:spTree>
+      <p:nvGrpSpPr>
+        <p:cNvPr id="1" name="">
+          <a:extLst>
+            <a:ext uri="{FF2B5EF4-FFF2-40B4-BE49-F238E27FC236}">
+              <a16:creationId xmlns:a16="http://schemas.microsoft.com/office/drawing/2014/main" id="{7909BF10-2F27-4FD8-C254-10DA5D925472}"/>
+            </a:ext>
+          </a:extLst>
+        </p:cNvPr>
+        <p:cNvGrpSpPr/>
+        <p:nvPr/>
+      </p:nvGrpSpPr>
+      <p:grpSpPr>
+        <a:xfrm>
+          <a:off x="0" y="0"/>
+          <a:ext cx="0" cy="0"/>
+          <a:chOff x="0" y="0"/>
+          <a:chExt cx="0" cy="0"/>
+        </a:xfrm>
+      </p:grpSpPr>
+      <p:sp>
+        <p:nvSpPr>
+          <p:cNvPr id="2" name="Title 1">
+            <a:extLst>
+              <a:ext uri="{FF2B5EF4-FFF2-40B4-BE49-F238E27FC236}">
+                <a16:creationId xmlns:a16="http://schemas.microsoft.com/office/drawing/2014/main" id="{37162085-1026-5984-442D-00085A0FE72D}"/>
+              </a:ext>
+            </a:extLst>
+          </p:cNvPr>
+          <p:cNvSpPr>
+            <a:spLocks noGrp="1"/>
+          </p:cNvSpPr>
+          <p:nvPr>
+            <p:ph type="title"/>
+          </p:nvPr>
+        </p:nvSpPr>
+        <p:spPr>
+          <a:xfrm>
+            <a:off x="182880" y="219456"/>
+            <a:ext cx="10835640" cy="791926"/>
+          </a:xfrm>
+        </p:spPr>
+        <p:txBody>
+          <a:bodyPr>
+            <a:normAutofit fontScale="90000"/>
+          </a:bodyPr>
+          <a:lstStyle/>
+          <a:p>
+            <a:br>
+              <a:rPr lang="en-US" sz="3200" dirty="0"/>
+            </a:br>
+            <a:r>
+              <a:rPr lang="en-US" sz="3200" dirty="0"/>
+              <a:t>	Scatter electricity full</a:t>
+            </a:r>
+          </a:p>
+        </p:txBody>
+      </p:sp>
+      <p:pic>
+        <p:nvPicPr>
+          <p:cNvPr id="7" name="Picture 6">
+            <a:extLst>
+              <a:ext uri="{FF2B5EF4-FFF2-40B4-BE49-F238E27FC236}">
+                <a16:creationId xmlns:a16="http://schemas.microsoft.com/office/drawing/2014/main" id="{C23258DC-18E1-D40E-BD45-F41FBD323AEE}"/>
+              </a:ext>
+            </a:extLst>
+          </p:cNvPr>
+          <p:cNvPicPr>
+            <a:picLocks noChangeAspect="1"/>
+          </p:cNvPicPr>
+          <p:nvPr/>
+        </p:nvPicPr>
+        <p:blipFill>
+          <a:blip r:embed="rId3"/>
+          <a:stretch>
+            <a:fillRect/>
+          </a:stretch>
+        </p:blipFill>
+        <p:spPr>
+          <a:xfrm>
+            <a:off x="887506" y="133830"/>
+            <a:ext cx="10421470" cy="6593174"/>
+          </a:xfrm>
+          <a:prstGeom prst="rect">
+            <a:avLst/>
+          </a:prstGeom>
+        </p:spPr>
+      </p:pic>
+    </p:spTree>
+    <p:extLst>
+      <p:ext uri="{BB962C8B-B14F-4D97-AF65-F5344CB8AC3E}">
+        <p14:creationId xmlns:p14="http://schemas.microsoft.com/office/powerpoint/2010/main" val="725740804"/>
+      </p:ext>
+    </p:extLst>
+  </p:cSld>
+  <p:clrMapOvr>
+    <a:masterClrMapping/>
+  </p:clrMapOvr>
+</p:sld>
+</file>
+
+<file path=ppt/slides/slide9.xml><?xml version="1.0" encoding="utf-8"?>
+<p:sld xmlns:a="http://schemas.openxmlformats.org/drawingml/2006/main" xmlns:r="http://schemas.openxmlformats.org/officeDocument/2006/relationships" xmlns:p="http://schemas.openxmlformats.org/presentationml/2006/main">
+  <p:cSld>
+    <p:spTree>
+      <p:nvGrpSpPr>
+        <p:cNvPr id="1" name="">
+          <a:extLst>
+            <a:ext uri="{FF2B5EF4-FFF2-40B4-BE49-F238E27FC236}">
+              <a16:creationId xmlns:a16="http://schemas.microsoft.com/office/drawing/2014/main" id="{A43E715E-BC29-C89C-C6DB-536868633012}"/>
+            </a:ext>
+          </a:extLst>
+        </p:cNvPr>
+        <p:cNvGrpSpPr/>
+        <p:nvPr/>
+      </p:nvGrpSpPr>
+      <p:grpSpPr>
+        <a:xfrm>
+          <a:off x="0" y="0"/>
+          <a:ext cx="0" cy="0"/>
+          <a:chOff x="0" y="0"/>
+          <a:chExt cx="0" cy="0"/>
+        </a:xfrm>
+      </p:grpSpPr>
+      <p:sp>
+        <p:nvSpPr>
+          <p:cNvPr id="2" name="Title 1">
+            <a:extLst>
+              <a:ext uri="{FF2B5EF4-FFF2-40B4-BE49-F238E27FC236}">
+                <a16:creationId xmlns:a16="http://schemas.microsoft.com/office/drawing/2014/main" id="{A242D50D-9C05-B945-E674-8E72A50FB96B}"/>
+              </a:ext>
+            </a:extLst>
+          </p:cNvPr>
+          <p:cNvSpPr>
+            <a:spLocks noGrp="1"/>
+          </p:cNvSpPr>
+          <p:nvPr>
+            <p:ph type="title"/>
+          </p:nvPr>
+        </p:nvSpPr>
+        <p:spPr>
+          <a:xfrm>
+            <a:off x="182880" y="219456"/>
+            <a:ext cx="10835640" cy="506685"/>
+          </a:xfrm>
+        </p:spPr>
+        <p:txBody>
+          <a:bodyPr>
+            <a:normAutofit/>
+          </a:bodyPr>
+          <a:lstStyle/>
+          <a:p>
+            <a:r>
+              <a:rPr lang="en-US" sz="2800" dirty="0"/>
+              <a:t>	Electricity use by floor area, zoomed</a:t>
+            </a:r>
+          </a:p>
+        </p:txBody>
+      </p:sp>
+      <p:pic>
+        <p:nvPicPr>
+          <p:cNvPr id="5" name="Picture 4">
+            <a:extLst>
+              <a:ext uri="{FF2B5EF4-FFF2-40B4-BE49-F238E27FC236}">
+                <a16:creationId xmlns:a16="http://schemas.microsoft.com/office/drawing/2014/main" id="{3FEC36D6-6A09-36DA-B6F9-005031681BD3}"/>
+              </a:ext>
+            </a:extLst>
+          </p:cNvPr>
+          <p:cNvPicPr>
+            <a:picLocks noChangeAspect="1"/>
+          </p:cNvPicPr>
+          <p:nvPr/>
+        </p:nvPicPr>
+        <p:blipFill>
+          <a:blip r:embed="rId3"/>
+          <a:stretch>
+            <a:fillRect/>
+          </a:stretch>
+        </p:blipFill>
+        <p:spPr>
+          <a:xfrm>
+            <a:off x="846417" y="116236"/>
+            <a:ext cx="10486298" cy="6634188"/>
+          </a:xfrm>
+          <a:prstGeom prst="rect">
+            <a:avLst/>
+          </a:prstGeom>
+        </p:spPr>
+      </p:pic>
+    </p:spTree>
+    <p:extLst>
+      <p:ext uri="{BB962C8B-B14F-4D97-AF65-F5344CB8AC3E}">
+        <p14:creationId xmlns:p14="http://schemas.microsoft.com/office/powerpoint/2010/main" val="2733923395"/>
       </p:ext>
     </p:extLst>
   </p:cSld>

--- a/project1/Proj1_Present_Energy_Ouspenskaia.pptx
+++ b/project1/Proj1_Present_Energy_Ouspenskaia.pptx
@@ -5,7 +5,7 @@
     <p:sldMasterId id="2147483762" r:id="rId1"/>
   </p:sldMasterIdLst>
   <p:notesMasterIdLst>
-    <p:notesMasterId r:id="rId15"/>
+    <p:notesMasterId r:id="rId17"/>
   </p:notesMasterIdLst>
   <p:sldIdLst>
     <p:sldId id="256" r:id="rId2"/>
@@ -19,8 +19,10 @@
     <p:sldId id="266" r:id="rId10"/>
     <p:sldId id="267" r:id="rId11"/>
     <p:sldId id="262" r:id="rId12"/>
-    <p:sldId id="260" r:id="rId13"/>
-    <p:sldId id="263" r:id="rId14"/>
+    <p:sldId id="271" r:id="rId13"/>
+    <p:sldId id="272" r:id="rId14"/>
+    <p:sldId id="260" r:id="rId15"/>
+    <p:sldId id="263" r:id="rId16"/>
   </p:sldIdLst>
   <p:sldSz cx="12192000" cy="6858000"/>
   <p:notesSz cx="6858000" cy="9144000"/>
@@ -654,12 +656,9 @@
               <a:defRPr/>
             </a:pPr>
             <a:r>
-              <a:rPr lang="en-US" sz="1200" dirty="0"/>
-              <a:t>Entries had missing ID numbers and addresses, but some had electricity use and Total GHG Emissions</a:t>
-            </a:r>
-          </a:p>
-          <a:p>
-            <a:endParaRPr lang="en-US" dirty="0"/>
+              <a:rPr lang="en-US" sz="2800" dirty="0"/>
+              <a:t>Surprising finding (or lack thereof):</a:t>
+            </a:r>
           </a:p>
         </p:txBody>
       </p:sp>
@@ -710,6 +709,271 @@
   <p:cSld>
     <p:spTree>
       <p:nvGrpSpPr>
+        <p:cNvPr id="1" name="">
+          <a:extLst>
+            <a:ext uri="{FF2B5EF4-FFF2-40B4-BE49-F238E27FC236}">
+              <a16:creationId xmlns:a16="http://schemas.microsoft.com/office/drawing/2014/main" id="{825C07FA-8AE5-E9F6-1069-145D0D9666AA}"/>
+            </a:ext>
+          </a:extLst>
+        </p:cNvPr>
+        <p:cNvGrpSpPr/>
+        <p:nvPr/>
+      </p:nvGrpSpPr>
+      <p:grpSpPr>
+        <a:xfrm>
+          <a:off x="0" y="0"/>
+          <a:ext cx="0" cy="0"/>
+          <a:chOff x="0" y="0"/>
+          <a:chExt cx="0" cy="0"/>
+        </a:xfrm>
+      </p:grpSpPr>
+      <p:sp>
+        <p:nvSpPr>
+          <p:cNvPr id="2" name="Slide Image Placeholder 1">
+            <a:extLst>
+              <a:ext uri="{FF2B5EF4-FFF2-40B4-BE49-F238E27FC236}">
+                <a16:creationId xmlns:a16="http://schemas.microsoft.com/office/drawing/2014/main" id="{BF8B54F5-C0AB-D143-AE1E-BF0C50E647F7}"/>
+              </a:ext>
+            </a:extLst>
+          </p:cNvPr>
+          <p:cNvSpPr>
+            <a:spLocks noGrp="1" noRot="1" noChangeAspect="1"/>
+          </p:cNvSpPr>
+          <p:nvPr>
+            <p:ph type="sldImg"/>
+          </p:nvPr>
+        </p:nvSpPr>
+        <p:spPr/>
+        <p:txBody>
+          <a:bodyPr/>
+          <a:lstStyle/>
+          <a:p>
+            <a:endParaRPr lang="en-US"/>
+          </a:p>
+        </p:txBody>
+      </p:sp>
+      <p:sp>
+        <p:nvSpPr>
+          <p:cNvPr id="3" name="Notes Placeholder 2">
+            <a:extLst>
+              <a:ext uri="{FF2B5EF4-FFF2-40B4-BE49-F238E27FC236}">
+                <a16:creationId xmlns:a16="http://schemas.microsoft.com/office/drawing/2014/main" id="{730A196C-2C81-A3A0-2EF7-1981F81B37F2}"/>
+              </a:ext>
+            </a:extLst>
+          </p:cNvPr>
+          <p:cNvSpPr>
+            <a:spLocks noGrp="1"/>
+          </p:cNvSpPr>
+          <p:nvPr>
+            <p:ph type="body" idx="1"/>
+          </p:nvPr>
+        </p:nvSpPr>
+        <p:spPr/>
+        <p:txBody>
+          <a:bodyPr/>
+          <a:lstStyle/>
+          <a:p>
+            <a:pPr marL="0" marR="0" lvl="0" indent="0" algn="l" defTabSz="914400" rtl="0" eaLnBrk="1" fontAlgn="auto" latinLnBrk="0" hangingPunct="1">
+              <a:lnSpc>
+                <a:spcPct val="100000"/>
+              </a:lnSpc>
+              <a:spcBef>
+                <a:spcPts val="0"/>
+              </a:spcBef>
+              <a:spcAft>
+                <a:spcPts val="0"/>
+              </a:spcAft>
+              <a:buClrTx/>
+              <a:buSzTx/>
+              <a:buFontTx/>
+              <a:buNone/>
+              <a:tabLst/>
+              <a:defRPr/>
+            </a:pPr>
+            <a:r>
+              <a:rPr lang="en-US" sz="2400" dirty="0"/>
+              <a:t>Building age vs. Total GHG emissions – a little correlation</a:t>
+            </a:r>
+          </a:p>
+          <a:p>
+            <a:r>
+              <a:rPr lang="en-US" sz="2400" dirty="0"/>
+              <a:t>Building age vs. ENERGY STAR score</a:t>
+            </a:r>
+          </a:p>
+          <a:p>
+            <a:r>
+              <a:rPr lang="en-US" sz="2400" dirty="0"/>
+              <a:t>ENERGY STAR score vs. Total GHG emissions</a:t>
+            </a:r>
+          </a:p>
+          <a:p>
+            <a:endParaRPr lang="en-US" dirty="0"/>
+          </a:p>
+        </p:txBody>
+      </p:sp>
+      <p:sp>
+        <p:nvSpPr>
+          <p:cNvPr id="4" name="Slide Number Placeholder 3">
+            <a:extLst>
+              <a:ext uri="{FF2B5EF4-FFF2-40B4-BE49-F238E27FC236}">
+                <a16:creationId xmlns:a16="http://schemas.microsoft.com/office/drawing/2014/main" id="{A8B4F0A0-381B-0EA6-C4C3-C0B8729E15CC}"/>
+              </a:ext>
+            </a:extLst>
+          </p:cNvPr>
+          <p:cNvSpPr>
+            <a:spLocks noGrp="1"/>
+          </p:cNvSpPr>
+          <p:nvPr>
+            <p:ph type="sldNum" sz="quarter" idx="5"/>
+          </p:nvPr>
+        </p:nvSpPr>
+        <p:spPr/>
+        <p:txBody>
+          <a:bodyPr/>
+          <a:lstStyle/>
+          <a:p>
+            <a:fld id="{433F17CF-9CB7-1F41-9F3B-9D2A483692EC}" type="slidenum">
+              <a:rPr lang="en-US" smtClean="0"/>
+              <a:t>12</a:t>
+            </a:fld>
+            <a:endParaRPr lang="en-US"/>
+          </a:p>
+        </p:txBody>
+      </p:sp>
+    </p:spTree>
+    <p:extLst>
+      <p:ext uri="{BB962C8B-B14F-4D97-AF65-F5344CB8AC3E}">
+        <p14:creationId xmlns:p14="http://schemas.microsoft.com/office/powerpoint/2010/main" val="3796668164"/>
+      </p:ext>
+    </p:extLst>
+  </p:cSld>
+  <p:clrMapOvr>
+    <a:masterClrMapping/>
+  </p:clrMapOvr>
+</p:notes>
+</file>
+
+<file path=ppt/notesSlides/notesSlide12.xml><?xml version="1.0" encoding="utf-8"?>
+<p:notes xmlns:a="http://schemas.openxmlformats.org/drawingml/2006/main" xmlns:r="http://schemas.openxmlformats.org/officeDocument/2006/relationships" xmlns:p="http://schemas.openxmlformats.org/presentationml/2006/main">
+  <p:cSld>
+    <p:spTree>
+      <p:nvGrpSpPr>
+        <p:cNvPr id="1" name="">
+          <a:extLst>
+            <a:ext uri="{FF2B5EF4-FFF2-40B4-BE49-F238E27FC236}">
+              <a16:creationId xmlns:a16="http://schemas.microsoft.com/office/drawing/2014/main" id="{C4676ABE-6ABC-DE4D-97F5-42A6D41FC80B}"/>
+            </a:ext>
+          </a:extLst>
+        </p:cNvPr>
+        <p:cNvGrpSpPr/>
+        <p:nvPr/>
+      </p:nvGrpSpPr>
+      <p:grpSpPr>
+        <a:xfrm>
+          <a:off x="0" y="0"/>
+          <a:ext cx="0" cy="0"/>
+          <a:chOff x="0" y="0"/>
+          <a:chExt cx="0" cy="0"/>
+        </a:xfrm>
+      </p:grpSpPr>
+      <p:sp>
+        <p:nvSpPr>
+          <p:cNvPr id="2" name="Slide Image Placeholder 1">
+            <a:extLst>
+              <a:ext uri="{FF2B5EF4-FFF2-40B4-BE49-F238E27FC236}">
+                <a16:creationId xmlns:a16="http://schemas.microsoft.com/office/drawing/2014/main" id="{0BE9C783-E0DE-C92E-BCCA-04BC44D77603}"/>
+              </a:ext>
+            </a:extLst>
+          </p:cNvPr>
+          <p:cNvSpPr>
+            <a:spLocks noGrp="1" noRot="1" noChangeAspect="1"/>
+          </p:cNvSpPr>
+          <p:nvPr>
+            <p:ph type="sldImg"/>
+          </p:nvPr>
+        </p:nvSpPr>
+        <p:spPr/>
+        <p:txBody>
+          <a:bodyPr/>
+          <a:lstStyle/>
+          <a:p>
+            <a:endParaRPr lang="en-US"/>
+          </a:p>
+        </p:txBody>
+      </p:sp>
+      <p:sp>
+        <p:nvSpPr>
+          <p:cNvPr id="3" name="Notes Placeholder 2">
+            <a:extLst>
+              <a:ext uri="{FF2B5EF4-FFF2-40B4-BE49-F238E27FC236}">
+                <a16:creationId xmlns:a16="http://schemas.microsoft.com/office/drawing/2014/main" id="{0012D916-E139-2405-F69B-1119D10CB276}"/>
+              </a:ext>
+            </a:extLst>
+          </p:cNvPr>
+          <p:cNvSpPr>
+            <a:spLocks noGrp="1"/>
+          </p:cNvSpPr>
+          <p:nvPr>
+            <p:ph type="body" idx="1"/>
+          </p:nvPr>
+        </p:nvSpPr>
+        <p:spPr/>
+        <p:txBody>
+          <a:bodyPr/>
+          <a:lstStyle/>
+          <a:p>
+            <a:endParaRPr lang="en-US" dirty="0"/>
+          </a:p>
+        </p:txBody>
+      </p:sp>
+      <p:sp>
+        <p:nvSpPr>
+          <p:cNvPr id="4" name="Slide Number Placeholder 3">
+            <a:extLst>
+              <a:ext uri="{FF2B5EF4-FFF2-40B4-BE49-F238E27FC236}">
+                <a16:creationId xmlns:a16="http://schemas.microsoft.com/office/drawing/2014/main" id="{DAEB131F-72CD-995C-8CEA-AC6F94DBD9A3}"/>
+              </a:ext>
+            </a:extLst>
+          </p:cNvPr>
+          <p:cNvSpPr>
+            <a:spLocks noGrp="1"/>
+          </p:cNvSpPr>
+          <p:nvPr>
+            <p:ph type="sldNum" sz="quarter" idx="5"/>
+          </p:nvPr>
+        </p:nvSpPr>
+        <p:spPr/>
+        <p:txBody>
+          <a:bodyPr/>
+          <a:lstStyle/>
+          <a:p>
+            <a:fld id="{433F17CF-9CB7-1F41-9F3B-9D2A483692EC}" type="slidenum">
+              <a:rPr lang="en-US" smtClean="0"/>
+              <a:t>13</a:t>
+            </a:fld>
+            <a:endParaRPr lang="en-US"/>
+          </a:p>
+        </p:txBody>
+      </p:sp>
+    </p:spTree>
+    <p:extLst>
+      <p:ext uri="{BB962C8B-B14F-4D97-AF65-F5344CB8AC3E}">
+        <p14:creationId xmlns:p14="http://schemas.microsoft.com/office/powerpoint/2010/main" val="2577332066"/>
+      </p:ext>
+    </p:extLst>
+  </p:cSld>
+  <p:clrMapOvr>
+    <a:masterClrMapping/>
+  </p:clrMapOvr>
+</p:notes>
+</file>
+
+<file path=ppt/notesSlides/notesSlide13.xml><?xml version="1.0" encoding="utf-8"?>
+<p:notes xmlns:a="http://schemas.openxmlformats.org/drawingml/2006/main" xmlns:r="http://schemas.openxmlformats.org/officeDocument/2006/relationships" xmlns:p="http://schemas.openxmlformats.org/presentationml/2006/main">
+  <p:cSld>
+    <p:spTree>
+      <p:nvGrpSpPr>
         <p:cNvPr id="1" name=""/>
         <p:cNvGrpSpPr/>
         <p:nvPr/>
@@ -777,7 +1041,7 @@
           <a:p>
             <a:fld id="{433F17CF-9CB7-1F41-9F3B-9D2A483692EC}" type="slidenum">
               <a:rPr lang="en-US" smtClean="0"/>
-              <a:t>12</a:t>
+              <a:t>14</a:t>
             </a:fld>
             <a:endParaRPr lang="en-US"/>
           </a:p>
@@ -796,7 +1060,7 @@
 </p:notes>
 </file>
 
-<file path=ppt/notesSlides/notesSlide12.xml><?xml version="1.0" encoding="utf-8"?>
+<file path=ppt/notesSlides/notesSlide14.xml><?xml version="1.0" encoding="utf-8"?>
 <p:notes xmlns:a="http://schemas.openxmlformats.org/drawingml/2006/main" xmlns:r="http://schemas.openxmlformats.org/officeDocument/2006/relationships" xmlns:p="http://schemas.openxmlformats.org/presentationml/2006/main">
   <p:cSld>
     <p:spTree>
@@ -892,7 +1156,7 @@
           <a:p>
             <a:fld id="{433F17CF-9CB7-1F41-9F3B-9D2A483692EC}" type="slidenum">
               <a:rPr lang="en-US" smtClean="0"/>
-              <a:t>13</a:t>
+              <a:t>15</a:t>
             </a:fld>
             <a:endParaRPr lang="en-US"/>
           </a:p>
@@ -11312,7 +11576,7 @@
           <a:p>
             <a:r>
               <a:rPr lang="en-US" sz="3200" dirty="0"/>
-              <a:t>Scatter Plot</a:t>
+              <a:t>Surprising findings: </a:t>
             </a:r>
           </a:p>
         </p:txBody>
@@ -11331,8 +11595,8 @@
         </p:nvSpPr>
         <p:spPr>
           <a:xfrm>
-            <a:off x="1159626" y="1198072"/>
-            <a:ext cx="10295313" cy="2585323"/>
+            <a:off x="1816677" y="1952452"/>
+            <a:ext cx="10295313" cy="2800767"/>
           </a:xfrm>
           <a:prstGeom prst="rect">
             <a:avLst/>
@@ -11346,35 +11610,26 @@
           <a:lstStyle/>
           <a:p>
             <a:r>
-              <a:rPr lang="en-US" dirty="0"/>
-              <a:t>Building age vs ENERGY STAR score</a:t>
-            </a:r>
-          </a:p>
-          <a:p>
-            <a:endParaRPr lang="en-US" dirty="0"/>
-          </a:p>
-          <a:p>
-            <a:r>
-              <a:rPr lang="en-US" dirty="0"/>
-              <a:t>Year built vs ENERGY STAR score</a:t>
-            </a:r>
-          </a:p>
-          <a:p>
-            <a:endParaRPr lang="en-US" dirty="0"/>
-          </a:p>
-          <a:p>
-            <a:r>
-              <a:rPr lang="en-US" dirty="0"/>
-              <a:t>Electricity (kWh) vs floor area</a:t>
-            </a:r>
-          </a:p>
-          <a:p>
-            <a:endParaRPr lang="en-US" dirty="0"/>
-          </a:p>
-          <a:p>
-            <a:r>
-              <a:rPr lang="en-US" dirty="0"/>
-              <a:t>Total GHG Emissions (Metric Tons CO2e) vs Reported Property Gross Floor Area area</a:t>
+              <a:rPr lang="en-US" sz="2800" dirty="0"/>
+              <a:t>Building age vs. Total GHG emissions</a:t>
+            </a:r>
+          </a:p>
+          <a:p>
+            <a:endParaRPr lang="en-US" sz="2800" dirty="0"/>
+          </a:p>
+          <a:p>
+            <a:r>
+              <a:rPr lang="en-US" sz="2800" dirty="0"/>
+              <a:t>Building age vs. ENERGY STAR score</a:t>
+            </a:r>
+          </a:p>
+          <a:p>
+            <a:endParaRPr lang="en-US" sz="2800" dirty="0"/>
+          </a:p>
+          <a:p>
+            <a:r>
+              <a:rPr lang="en-US" sz="2800" dirty="0"/>
+              <a:t>ENERGY STAR score vs. Total GHG emissions</a:t>
             </a:r>
           </a:p>
           <a:p>
@@ -11403,6 +11658,263 @@
   <p:cSld>
     <p:spTree>
       <p:nvGrpSpPr>
+        <p:cNvPr id="1" name="">
+          <a:extLst>
+            <a:ext uri="{FF2B5EF4-FFF2-40B4-BE49-F238E27FC236}">
+              <a16:creationId xmlns:a16="http://schemas.microsoft.com/office/drawing/2014/main" id="{A3D017AF-D86F-7D76-368B-360D023F9B50}"/>
+            </a:ext>
+          </a:extLst>
+        </p:cNvPr>
+        <p:cNvGrpSpPr/>
+        <p:nvPr/>
+      </p:nvGrpSpPr>
+      <p:grpSpPr>
+        <a:xfrm>
+          <a:off x="0" y="0"/>
+          <a:ext cx="0" cy="0"/>
+          <a:chOff x="0" y="0"/>
+          <a:chExt cx="0" cy="0"/>
+        </a:xfrm>
+      </p:grpSpPr>
+      <p:sp>
+        <p:nvSpPr>
+          <p:cNvPr id="2" name="Title 1">
+            <a:extLst>
+              <a:ext uri="{FF2B5EF4-FFF2-40B4-BE49-F238E27FC236}">
+                <a16:creationId xmlns:a16="http://schemas.microsoft.com/office/drawing/2014/main" id="{3A17DEB4-DC7E-F82A-EDB1-7C7C26D30B57}"/>
+              </a:ext>
+            </a:extLst>
+          </p:cNvPr>
+          <p:cNvSpPr>
+            <a:spLocks noGrp="1"/>
+          </p:cNvSpPr>
+          <p:nvPr>
+            <p:ph type="title"/>
+          </p:nvPr>
+        </p:nvSpPr>
+        <p:spPr>
+          <a:xfrm>
+            <a:off x="971550" y="562356"/>
+            <a:ext cx="10835640" cy="791926"/>
+          </a:xfrm>
+        </p:spPr>
+        <p:txBody>
+          <a:bodyPr>
+            <a:normAutofit/>
+          </a:bodyPr>
+          <a:lstStyle/>
+          <a:p>
+            <a:r>
+              <a:rPr lang="en-US" sz="3200" dirty="0"/>
+              <a:t>Building age vs. Total GHG emissions</a:t>
+            </a:r>
+          </a:p>
+        </p:txBody>
+      </p:sp>
+      <p:pic>
+        <p:nvPicPr>
+          <p:cNvPr id="4" name="Picture 3">
+            <a:extLst>
+              <a:ext uri="{FF2B5EF4-FFF2-40B4-BE49-F238E27FC236}">
+                <a16:creationId xmlns:a16="http://schemas.microsoft.com/office/drawing/2014/main" id="{36276936-897C-AF4E-EF27-9AE5850BFC81}"/>
+              </a:ext>
+            </a:extLst>
+          </p:cNvPr>
+          <p:cNvPicPr>
+            <a:picLocks noChangeAspect="1"/>
+          </p:cNvPicPr>
+          <p:nvPr/>
+        </p:nvPicPr>
+        <p:blipFill>
+          <a:blip r:embed="rId3"/>
+          <a:stretch>
+            <a:fillRect/>
+          </a:stretch>
+        </p:blipFill>
+        <p:spPr>
+          <a:xfrm>
+            <a:off x="971550" y="62865"/>
+            <a:ext cx="10641331" cy="6732270"/>
+          </a:xfrm>
+          <a:prstGeom prst="rect">
+            <a:avLst/>
+          </a:prstGeom>
+        </p:spPr>
+      </p:pic>
+      <p:sp>
+        <p:nvSpPr>
+          <p:cNvPr id="7" name="TextBox 6">
+            <a:extLst>
+              <a:ext uri="{FF2B5EF4-FFF2-40B4-BE49-F238E27FC236}">
+                <a16:creationId xmlns:a16="http://schemas.microsoft.com/office/drawing/2014/main" id="{3C1A1C7A-D8E8-E4EF-C605-5BD1F1BFB7A1}"/>
+              </a:ext>
+            </a:extLst>
+          </p:cNvPr>
+          <p:cNvSpPr txBox="1"/>
+          <p:nvPr/>
+        </p:nvSpPr>
+        <p:spPr>
+          <a:xfrm>
+            <a:off x="3048953" y="2967335"/>
+            <a:ext cx="6097904" cy="923330"/>
+          </a:xfrm>
+          <a:prstGeom prst="rect">
+            <a:avLst/>
+          </a:prstGeom>
+          <a:noFill/>
+        </p:spPr>
+        <p:txBody>
+          <a:bodyPr wrap="square">
+            <a:spAutoFit/>
+          </a:bodyPr>
+          <a:lstStyle/>
+          <a:p>
+            <a:r>
+              <a:rPr lang="en-US" sz="1800" dirty="0"/>
+              <a:t>Building age vs. ENERGY STAR score</a:t>
+            </a:r>
+          </a:p>
+          <a:p>
+            <a:endParaRPr lang="en-US" sz="1800" dirty="0"/>
+          </a:p>
+          <a:p>
+            <a:r>
+              <a:rPr lang="en-US" sz="1800" dirty="0"/>
+              <a:t>Building age vs. Total GHG emissions</a:t>
+            </a:r>
+          </a:p>
+        </p:txBody>
+      </p:sp>
+    </p:spTree>
+    <p:extLst>
+      <p:ext uri="{BB962C8B-B14F-4D97-AF65-F5344CB8AC3E}">
+        <p14:creationId xmlns:p14="http://schemas.microsoft.com/office/powerpoint/2010/main" val="368056739"/>
+      </p:ext>
+    </p:extLst>
+  </p:cSld>
+  <p:clrMapOvr>
+    <a:masterClrMapping/>
+  </p:clrMapOvr>
+</p:sld>
+</file>
+
+<file path=ppt/slides/slide13.xml><?xml version="1.0" encoding="utf-8"?>
+<p:sld xmlns:a="http://schemas.openxmlformats.org/drawingml/2006/main" xmlns:r="http://schemas.openxmlformats.org/officeDocument/2006/relationships" xmlns:p="http://schemas.openxmlformats.org/presentationml/2006/main">
+  <p:cSld>
+    <p:spTree>
+      <p:nvGrpSpPr>
+        <p:cNvPr id="1" name="">
+          <a:extLst>
+            <a:ext uri="{FF2B5EF4-FFF2-40B4-BE49-F238E27FC236}">
+              <a16:creationId xmlns:a16="http://schemas.microsoft.com/office/drawing/2014/main" id="{961544D5-CE23-E7C6-CA34-D7FD5B5119F3}"/>
+            </a:ext>
+          </a:extLst>
+        </p:cNvPr>
+        <p:cNvGrpSpPr/>
+        <p:nvPr/>
+      </p:nvGrpSpPr>
+      <p:grpSpPr>
+        <a:xfrm>
+          <a:off x="0" y="0"/>
+          <a:ext cx="0" cy="0"/>
+          <a:chOff x="0" y="0"/>
+          <a:chExt cx="0" cy="0"/>
+        </a:xfrm>
+      </p:grpSpPr>
+      <p:sp>
+        <p:nvSpPr>
+          <p:cNvPr id="2" name="Title 1">
+            <a:extLst>
+              <a:ext uri="{FF2B5EF4-FFF2-40B4-BE49-F238E27FC236}">
+                <a16:creationId xmlns:a16="http://schemas.microsoft.com/office/drawing/2014/main" id="{549C4302-CF90-1D46-6644-1A077788DCD3}"/>
+              </a:ext>
+            </a:extLst>
+          </p:cNvPr>
+          <p:cNvSpPr>
+            <a:spLocks noGrp="1"/>
+          </p:cNvSpPr>
+          <p:nvPr>
+            <p:ph type="title"/>
+          </p:nvPr>
+        </p:nvSpPr>
+        <p:spPr>
+          <a:xfrm>
+            <a:off x="468630" y="1773936"/>
+            <a:ext cx="10835640" cy="791926"/>
+          </a:xfrm>
+        </p:spPr>
+        <p:txBody>
+          <a:bodyPr>
+            <a:normAutofit/>
+          </a:bodyPr>
+          <a:lstStyle/>
+          <a:p>
+            <a:r>
+              <a:rPr lang="en-US" sz="3200" dirty="0"/>
+              <a:t>Further analysis needed</a:t>
+            </a:r>
+          </a:p>
+        </p:txBody>
+      </p:sp>
+      <p:sp>
+        <p:nvSpPr>
+          <p:cNvPr id="4" name="TextBox 3">
+            <a:extLst>
+              <a:ext uri="{FF2B5EF4-FFF2-40B4-BE49-F238E27FC236}">
+                <a16:creationId xmlns:a16="http://schemas.microsoft.com/office/drawing/2014/main" id="{A689F89E-F4F4-5B5B-B508-CDE64140E2C3}"/>
+              </a:ext>
+            </a:extLst>
+          </p:cNvPr>
+          <p:cNvSpPr txBox="1"/>
+          <p:nvPr/>
+        </p:nvSpPr>
+        <p:spPr>
+          <a:xfrm>
+            <a:off x="1502526" y="2912572"/>
+            <a:ext cx="10295313" cy="1508105"/>
+          </a:xfrm>
+          <a:prstGeom prst="rect">
+            <a:avLst/>
+          </a:prstGeom>
+          <a:noFill/>
+        </p:spPr>
+        <p:txBody>
+          <a:bodyPr wrap="square" rtlCol="0">
+            <a:spAutoFit/>
+          </a:bodyPr>
+          <a:lstStyle/>
+          <a:p>
+            <a:r>
+              <a:rPr lang="en-US" sz="2800" dirty="0"/>
+              <a:t>Explore more variables that may contribute to ENERGY STAR scores and try to find some stronger relationships.</a:t>
+            </a:r>
+          </a:p>
+          <a:p>
+            <a:endParaRPr lang="en-US" dirty="0"/>
+          </a:p>
+          <a:p>
+            <a:endParaRPr lang="en-US" dirty="0"/>
+          </a:p>
+        </p:txBody>
+      </p:sp>
+    </p:spTree>
+    <p:extLst>
+      <p:ext uri="{BB962C8B-B14F-4D97-AF65-F5344CB8AC3E}">
+        <p14:creationId xmlns:p14="http://schemas.microsoft.com/office/powerpoint/2010/main" val="3347390614"/>
+      </p:ext>
+    </p:extLst>
+  </p:cSld>
+  <p:clrMapOvr>
+    <a:masterClrMapping/>
+  </p:clrMapOvr>
+</p:sld>
+</file>
+
+<file path=ppt/slides/slide14.xml><?xml version="1.0" encoding="utf-8"?>
+<p:sld xmlns:a="http://schemas.openxmlformats.org/drawingml/2006/main" xmlns:r="http://schemas.openxmlformats.org/officeDocument/2006/relationships" xmlns:p="http://schemas.openxmlformats.org/presentationml/2006/main">
+  <p:cSld>
+    <p:spTree>
+      <p:nvGrpSpPr>
         <p:cNvPr id="1" name=""/>
         <p:cNvGrpSpPr/>
         <p:nvPr/>
@@ -11606,7 +12118,7 @@
 </p:sld>
 </file>
 
-<file path=ppt/slides/slide13.xml><?xml version="1.0" encoding="utf-8"?>
+<file path=ppt/slides/slide15.xml><?xml version="1.0" encoding="utf-8"?>
 <p:sld xmlns:a="http://schemas.openxmlformats.org/drawingml/2006/main" xmlns:r="http://schemas.openxmlformats.org/officeDocument/2006/relationships" xmlns:p="http://schemas.openxmlformats.org/presentationml/2006/main">
   <p:cSld>
     <p:spTree>
@@ -11784,7 +12296,12 @@
             <p:ph type="title"/>
           </p:nvPr>
         </p:nvSpPr>
-        <p:spPr/>
+        <p:spPr>
+          <a:xfrm>
+            <a:off x="217170" y="1213866"/>
+            <a:ext cx="10835640" cy="969264"/>
+          </a:xfrm>
+        </p:spPr>
         <p:txBody>
           <a:bodyPr>
             <a:normAutofit/>
@@ -11793,7 +12310,7 @@
           <a:p>
             <a:r>
               <a:rPr lang="en-US" sz="3200" dirty="0"/>
-              <a:t>Source Dataset</a:t>
+              <a:t>Source Dataset:</a:t>
             </a:r>
           </a:p>
         </p:txBody>
@@ -11812,7 +12329,7 @@
         </p:nvSpPr>
         <p:spPr>
           <a:xfrm>
-            <a:off x="1285212" y="2283229"/>
+            <a:off x="1330932" y="2626129"/>
             <a:ext cx="8127403" cy="2646878"/>
           </a:xfrm>
           <a:prstGeom prst="rect">
@@ -11911,7 +12428,7 @@
         </p:nvSpPr>
         <p:spPr>
           <a:xfrm>
-            <a:off x="3140481" y="2337815"/>
+            <a:off x="3277641" y="2692145"/>
             <a:ext cx="6415000" cy="1091185"/>
           </a:xfrm>
         </p:spPr>

--- a/project1/Proj1_Present_Energy_Ouspenskaia.pptx
+++ b/project1/Proj1_Present_Energy_Ouspenskaia.pptx
@@ -792,10 +792,27 @@
             </a:pPr>
             <a:r>
               <a:rPr lang="en-US" sz="2400" dirty="0"/>
-              <a:t>Building age vs. Total GHG emissions – a little correlation</a:t>
-            </a:r>
-          </a:p>
-          <a:p>
+              <a:t>Building age vs. Total GHG emissions </a:t>
+            </a:r>
+          </a:p>
+          <a:p>
+            <a:pPr marL="0" marR="0" lvl="0" indent="0" algn="l" defTabSz="914400" rtl="0" eaLnBrk="1" fontAlgn="auto" latinLnBrk="0" hangingPunct="1">
+              <a:lnSpc>
+                <a:spcPct val="100000"/>
+              </a:lnSpc>
+              <a:spcBef>
+                <a:spcPts val="0"/>
+              </a:spcBef>
+              <a:spcAft>
+                <a:spcPts val="0"/>
+              </a:spcAft>
+              <a:buClrTx/>
+              <a:buSzTx/>
+              <a:buFontTx/>
+              <a:buNone/>
+              <a:tabLst/>
+              <a:defRPr/>
+            </a:pPr>
             <a:r>
               <a:rPr lang="en-US" sz="2400" dirty="0"/>
               <a:t>Building age vs. ENERGY STAR score</a:t>
@@ -923,7 +940,10 @@
           <a:bodyPr/>
           <a:lstStyle/>
           <a:p>
-            <a:endParaRPr lang="en-US" dirty="0"/>
+            <a:r>
+              <a:rPr lang="en-US" sz="2400" dirty="0"/>
+              <a:t>Hopefully, 2024 data will be published soon. </a:t>
+            </a:r>
           </a:p>
         </p:txBody>
       </p:sp>
@@ -11713,10 +11733,10 @@
       </p:sp>
       <p:pic>
         <p:nvPicPr>
-          <p:cNvPr id="4" name="Picture 3">
-            <a:extLst>
-              <a:ext uri="{FF2B5EF4-FFF2-40B4-BE49-F238E27FC236}">
-                <a16:creationId xmlns:a16="http://schemas.microsoft.com/office/drawing/2014/main" id="{36276936-897C-AF4E-EF27-9AE5850BFC81}"/>
+          <p:cNvPr id="9" name="Picture 8">
+            <a:extLst>
+              <a:ext uri="{FF2B5EF4-FFF2-40B4-BE49-F238E27FC236}">
+                <a16:creationId xmlns:a16="http://schemas.microsoft.com/office/drawing/2014/main" id="{367BFA18-A1C8-5F3E-3202-B1F4C6C127CC}"/>
               </a:ext>
             </a:extLst>
           </p:cNvPr>
@@ -11733,58 +11753,14 @@
         </p:blipFill>
         <p:spPr>
           <a:xfrm>
-            <a:off x="971550" y="62865"/>
-            <a:ext cx="10641331" cy="6732270"/>
+            <a:off x="834390" y="100225"/>
+            <a:ext cx="10504170" cy="6645495"/>
           </a:xfrm>
           <a:prstGeom prst="rect">
             <a:avLst/>
           </a:prstGeom>
         </p:spPr>
       </p:pic>
-      <p:sp>
-        <p:nvSpPr>
-          <p:cNvPr id="7" name="TextBox 6">
-            <a:extLst>
-              <a:ext uri="{FF2B5EF4-FFF2-40B4-BE49-F238E27FC236}">
-                <a16:creationId xmlns:a16="http://schemas.microsoft.com/office/drawing/2014/main" id="{3C1A1C7A-D8E8-E4EF-C605-5BD1F1BFB7A1}"/>
-              </a:ext>
-            </a:extLst>
-          </p:cNvPr>
-          <p:cNvSpPr txBox="1"/>
-          <p:nvPr/>
-        </p:nvSpPr>
-        <p:spPr>
-          <a:xfrm>
-            <a:off x="3048953" y="2967335"/>
-            <a:ext cx="6097904" cy="923330"/>
-          </a:xfrm>
-          <a:prstGeom prst="rect">
-            <a:avLst/>
-          </a:prstGeom>
-          <a:noFill/>
-        </p:spPr>
-        <p:txBody>
-          <a:bodyPr wrap="square">
-            <a:spAutoFit/>
-          </a:bodyPr>
-          <a:lstStyle/>
-          <a:p>
-            <a:r>
-              <a:rPr lang="en-US" sz="1800" dirty="0"/>
-              <a:t>Building age vs. ENERGY STAR score</a:t>
-            </a:r>
-          </a:p>
-          <a:p>
-            <a:endParaRPr lang="en-US" sz="1800" dirty="0"/>
-          </a:p>
-          <a:p>
-            <a:r>
-              <a:rPr lang="en-US" sz="1800" dirty="0"/>
-              <a:t>Building age vs. Total GHG emissions</a:t>
-            </a:r>
-          </a:p>
-        </p:txBody>
-      </p:sp>
     </p:spTree>
     <p:extLst>
       <p:ext uri="{BB962C8B-B14F-4D97-AF65-F5344CB8AC3E}">
@@ -11851,7 +11827,7 @@
           <a:p>
             <a:r>
               <a:rPr lang="en-US" sz="3200" dirty="0"/>
-              <a:t>Further analysis needed</a:t>
+              <a:t>Further study</a:t>
             </a:r>
           </a:p>
         </p:txBody>
@@ -11871,7 +11847,7 @@
         <p:spPr>
           <a:xfrm>
             <a:off x="1502526" y="2912572"/>
-            <a:ext cx="10295313" cy="1508105"/>
+            <a:ext cx="10295313" cy="2369880"/>
           </a:xfrm>
           <a:prstGeom prst="rect">
             <a:avLst/>
@@ -11888,6 +11864,16 @@
               <a:rPr lang="en-US" sz="2800" dirty="0"/>
               <a:t>Explore more variables that may contribute to ENERGY STAR scores and try to find some stronger relationships.</a:t>
             </a:r>
+          </a:p>
+          <a:p>
+            <a:endParaRPr lang="en-US" sz="2800" dirty="0"/>
+          </a:p>
+          <a:p>
+            <a:r>
+              <a:rPr lang="en-US" sz="2800" dirty="0"/>
+              <a:t>Compare 2022 data with this 2023 data. </a:t>
+            </a:r>
+            <a:endParaRPr lang="en-US" dirty="0"/>
           </a:p>
           <a:p>
             <a:endParaRPr lang="en-US" dirty="0"/>
@@ -12552,8 +12538,8 @@
         </p:nvSpPr>
         <p:spPr>
           <a:xfrm>
-            <a:off x="1512101" y="1011382"/>
-            <a:ext cx="10295313" cy="5152308"/>
+            <a:off x="1512101" y="615419"/>
+            <a:ext cx="10295313" cy="5890972"/>
           </a:xfrm>
           <a:prstGeom prst="rect">
             <a:avLst/>
@@ -12574,6 +12560,17 @@
             <a:r>
               <a:rPr lang="en-US" sz="2400" dirty="0"/>
               <a:t>1846 rows, 27 columns </a:t>
+            </a:r>
+          </a:p>
+          <a:p>
+            <a:pPr>
+              <a:lnSpc>
+                <a:spcPct val="200000"/>
+              </a:lnSpc>
+            </a:pPr>
+            <a:r>
+              <a:rPr lang="en-US" sz="2400" dirty="0"/>
+              <a:t>Numerical and Categorical data</a:t>
             </a:r>
           </a:p>
           <a:p>
@@ -12818,10 +12815,10 @@
       </p:sp>
       <p:pic>
         <p:nvPicPr>
-          <p:cNvPr id="4" name="Picture 3">
-            <a:extLst>
-              <a:ext uri="{FF2B5EF4-FFF2-40B4-BE49-F238E27FC236}">
-                <a16:creationId xmlns:a16="http://schemas.microsoft.com/office/drawing/2014/main" id="{DE22ECB7-C120-0F9B-2934-4B425F713364}"/>
+          <p:cNvPr id="8" name="Picture 7">
+            <a:extLst>
+              <a:ext uri="{FF2B5EF4-FFF2-40B4-BE49-F238E27FC236}">
+                <a16:creationId xmlns:a16="http://schemas.microsoft.com/office/drawing/2014/main" id="{6AC4026C-0E39-3375-62E2-F37DFC178E45}"/>
               </a:ext>
             </a:extLst>
           </p:cNvPr>
@@ -12838,8 +12835,8 @@
         </p:blipFill>
         <p:spPr>
           <a:xfrm>
-            <a:off x="845820" y="55634"/>
-            <a:ext cx="10664190" cy="6746732"/>
+            <a:off x="877570" y="36753"/>
+            <a:ext cx="10723880" cy="6784494"/>
           </a:xfrm>
           <a:prstGeom prst="rect">
             <a:avLst/>

--- a/project1/Proj1_Present_Energy_Ouspenskaia.pptx
+++ b/project1/Proj1_Present_Energy_Ouspenskaia.pptx
@@ -1566,6 +1566,68 @@
         <p:txBody>
           <a:bodyPr/>
           <a:lstStyle/>
+          <a:p>
+            <a:pPr marL="0" marR="0" lvl="0" indent="0" algn="l" defTabSz="914400" rtl="0" eaLnBrk="1" fontAlgn="auto" latinLnBrk="0" hangingPunct="1">
+              <a:lnSpc>
+                <a:spcPct val="100000"/>
+              </a:lnSpc>
+              <a:spcBef>
+                <a:spcPts val="0"/>
+              </a:spcBef>
+              <a:spcAft>
+                <a:spcPts val="0"/>
+              </a:spcAft>
+              <a:buClrTx/>
+              <a:buSzTx/>
+              <a:buFontTx/>
+              <a:buNone/>
+              <a:tabLst/>
+              <a:defRPr/>
+            </a:pPr>
+            <a:r>
+              <a:rPr lang="en-US" sz="2400" b="0" kern="1200" dirty="0">
+                <a:solidFill>
+                  <a:schemeClr val="tx1"/>
+                </a:solidFill>
+                <a:effectLst/>
+                <a:latin typeface="+mn-lt"/>
+                <a:ea typeface="+mn-ea"/>
+                <a:cs typeface="+mn-cs"/>
+              </a:rPr>
+              <a:t>Top 9 categories:  all have &gt; 50 instances.  The rest grouped into “other”.</a:t>
+            </a:r>
+          </a:p>
+          <a:p>
+            <a:pPr marL="0" marR="0" lvl="0" indent="0" algn="l" defTabSz="914400" rtl="0" eaLnBrk="1" fontAlgn="auto" latinLnBrk="0" hangingPunct="1">
+              <a:lnSpc>
+                <a:spcPct val="100000"/>
+              </a:lnSpc>
+              <a:spcBef>
+                <a:spcPts val="0"/>
+              </a:spcBef>
+              <a:spcAft>
+                <a:spcPts val="0"/>
+              </a:spcAft>
+              <a:buClrTx/>
+              <a:buSzTx/>
+              <a:buFontTx/>
+              <a:buNone/>
+              <a:tabLst/>
+              <a:defRPr/>
+            </a:pPr>
+            <a:r>
+              <a:rPr lang="en-US" sz="2400" b="0" kern="1200" dirty="0">
+                <a:solidFill>
+                  <a:schemeClr val="tx1"/>
+                </a:solidFill>
+                <a:effectLst/>
+                <a:latin typeface="+mn-lt"/>
+                <a:ea typeface="+mn-ea"/>
+                <a:cs typeface="+mn-cs"/>
+              </a:rPr>
+              <a:t>58 categories total</a:t>
+            </a:r>
+          </a:p>
           <a:p>
             <a:pPr marL="0" marR="0" lvl="0" indent="0" algn="l" defTabSz="914400" rtl="0" eaLnBrk="1" fontAlgn="auto" latinLnBrk="0" hangingPunct="1">
               <a:lnSpc>
@@ -11337,7 +11399,7 @@
         </p:nvSpPr>
         <p:spPr>
           <a:xfrm>
-            <a:off x="451821" y="451821"/>
+            <a:off x="335280" y="1140444"/>
             <a:ext cx="11521440" cy="1731981"/>
           </a:xfrm>
         </p:spPr>
@@ -11347,19 +11409,21 @@
           </a:bodyPr>
           <a:lstStyle/>
           <a:p>
-            <a:r>
-              <a:rPr lang="en-US" sz="4400" dirty="0">
+            <a:pPr>
+              <a:lnSpc>
+                <a:spcPct val="150000"/>
+              </a:lnSpc>
+            </a:pPr>
+            <a:r>
+              <a:rPr lang="en-US" sz="3600" dirty="0">
                 <a:solidFill>
-                  <a:schemeClr val="tx1"/>
+                  <a:schemeClr val="tx1">
+                    <a:lumMod val="85000"/>
+                  </a:schemeClr>
                 </a:solidFill>
               </a:rPr>
-              <a:t>Which types of buildings in Montgomery County are Energy – Efficient?</a:t>
-            </a:r>
-            <a:endParaRPr lang="en-US" dirty="0">
-              <a:solidFill>
-                <a:schemeClr val="tx1"/>
-              </a:solidFill>
-            </a:endParaRPr>
+              <a:t>Which types of buildings in Montgomery County are more Energy – Efficient?</a:t>
+            </a:r>
           </a:p>
         </p:txBody>
       </p:sp>
@@ -11381,8 +11445,8 @@
         </p:nvSpPr>
         <p:spPr>
           <a:xfrm>
-            <a:off x="2420471" y="2635625"/>
-            <a:ext cx="7691717" cy="3227294"/>
+            <a:off x="2383283" y="3985576"/>
+            <a:ext cx="7425433" cy="2296226"/>
           </a:xfrm>
         </p:spPr>
         <p:txBody>
@@ -11392,9 +11456,11 @@
           <a:lstStyle/>
           <a:p>
             <a:r>
-              <a:rPr lang="en-US" sz="3200" dirty="0">
+              <a:rPr lang="en-US" sz="2800" dirty="0">
                 <a:solidFill>
-                  <a:schemeClr val="tx1"/>
+                  <a:schemeClr val="tx1">
+                    <a:lumMod val="85000"/>
+                  </a:schemeClr>
                 </a:solidFill>
               </a:rPr>
               <a:t>Alissa Ouspenskaia</a:t>
@@ -11402,9 +11468,11 @@
           </a:p>
           <a:p>
             <a:r>
-              <a:rPr lang="en-US" sz="3200" dirty="0">
+              <a:rPr lang="en-US" sz="2800" dirty="0">
                 <a:solidFill>
-                  <a:schemeClr val="tx1"/>
+                  <a:schemeClr val="tx1">
+                    <a:lumMod val="85000"/>
+                  </a:schemeClr>
                 </a:solidFill>
               </a:rPr>
               <a:t>DATA 110 </a:t>
@@ -11412,9 +11480,11 @@
           </a:p>
           <a:p>
             <a:r>
-              <a:rPr lang="en-US" sz="3200" dirty="0">
+              <a:rPr lang="en-US" sz="2800" dirty="0">
                 <a:solidFill>
-                  <a:schemeClr val="tx1"/>
+                  <a:schemeClr val="tx1">
+                    <a:lumMod val="85000"/>
+                  </a:schemeClr>
                 </a:solidFill>
               </a:rPr>
               <a:t>Montgomery College, Fall 2026</a:t>
@@ -11584,7 +11654,7 @@
         </p:nvSpPr>
         <p:spPr>
           <a:xfrm>
-            <a:off x="182880" y="219456"/>
+            <a:off x="295769" y="1325848"/>
             <a:ext cx="10835640" cy="791926"/>
           </a:xfrm>
         </p:spPr>
@@ -11595,8 +11665,14 @@
           <a:lstStyle/>
           <a:p>
             <a:r>
-              <a:rPr lang="en-US" sz="3200" dirty="0"/>
-              <a:t>Surprising findings: </a:t>
+              <a:rPr lang="en-US" sz="3200" dirty="0">
+                <a:solidFill>
+                  <a:schemeClr val="tx1">
+                    <a:lumMod val="85000"/>
+                  </a:schemeClr>
+                </a:solidFill>
+              </a:rPr>
+              <a:t>Surprising findings</a:t>
             </a:r>
           </a:p>
         </p:txBody>
@@ -11615,7 +11691,7 @@
         </p:nvSpPr>
         <p:spPr>
           <a:xfrm>
-            <a:off x="1816677" y="1952452"/>
+            <a:off x="1896687" y="2731385"/>
             <a:ext cx="10295313" cy="2800767"/>
           </a:xfrm>
           <a:prstGeom prst="rect">
@@ -11630,25 +11706,55 @@
           <a:lstStyle/>
           <a:p>
             <a:r>
-              <a:rPr lang="en-US" sz="2800" dirty="0"/>
+              <a:rPr lang="en-US" sz="2800" dirty="0">
+                <a:solidFill>
+                  <a:schemeClr val="tx1">
+                    <a:lumMod val="85000"/>
+                  </a:schemeClr>
+                </a:solidFill>
+              </a:rPr>
               <a:t>Building age vs. Total GHG emissions</a:t>
             </a:r>
           </a:p>
           <a:p>
-            <a:endParaRPr lang="en-US" sz="2800" dirty="0"/>
-          </a:p>
-          <a:p>
-            <a:r>
-              <a:rPr lang="en-US" sz="2800" dirty="0"/>
+            <a:endParaRPr lang="en-US" sz="2800" dirty="0">
+              <a:solidFill>
+                <a:schemeClr val="tx1">
+                  <a:lumMod val="85000"/>
+                </a:schemeClr>
+              </a:solidFill>
+            </a:endParaRPr>
+          </a:p>
+          <a:p>
+            <a:r>
+              <a:rPr lang="en-US" sz="2800" dirty="0">
+                <a:solidFill>
+                  <a:schemeClr val="tx1">
+                    <a:lumMod val="85000"/>
+                  </a:schemeClr>
+                </a:solidFill>
+              </a:rPr>
               <a:t>Building age vs. ENERGY STAR score</a:t>
             </a:r>
           </a:p>
           <a:p>
-            <a:endParaRPr lang="en-US" sz="2800" dirty="0"/>
-          </a:p>
-          <a:p>
-            <a:r>
-              <a:rPr lang="en-US" sz="2800" dirty="0"/>
+            <a:endParaRPr lang="en-US" sz="2800" dirty="0">
+              <a:solidFill>
+                <a:schemeClr val="tx1">
+                  <a:lumMod val="85000"/>
+                </a:schemeClr>
+              </a:solidFill>
+            </a:endParaRPr>
+          </a:p>
+          <a:p>
+            <a:r>
+              <a:rPr lang="en-US" sz="2800" dirty="0">
+                <a:solidFill>
+                  <a:schemeClr val="tx1">
+                    <a:lumMod val="85000"/>
+                  </a:schemeClr>
+                </a:solidFill>
+              </a:rPr>
               <a:t>ENERGY STAR score vs. Total GHG emissions</a:t>
             </a:r>
           </a:p>
@@ -11826,7 +11932,13 @@
           <a:lstStyle/>
           <a:p>
             <a:r>
-              <a:rPr lang="en-US" sz="3200" dirty="0"/>
+              <a:rPr lang="en-US" sz="3200" dirty="0">
+                <a:solidFill>
+                  <a:schemeClr val="tx1">
+                    <a:lumMod val="85000"/>
+                  </a:schemeClr>
+                </a:solidFill>
+              </a:rPr>
               <a:t>Further study</a:t>
             </a:r>
           </a:p>
@@ -11861,19 +11973,43 @@
           <a:lstStyle/>
           <a:p>
             <a:r>
-              <a:rPr lang="en-US" sz="2800" dirty="0"/>
+              <a:rPr lang="en-US" sz="2800" dirty="0">
+                <a:solidFill>
+                  <a:schemeClr val="tx1">
+                    <a:lumMod val="85000"/>
+                  </a:schemeClr>
+                </a:solidFill>
+              </a:rPr>
               <a:t>Explore more variables that may contribute to ENERGY STAR scores and try to find some stronger relationships.</a:t>
             </a:r>
           </a:p>
           <a:p>
-            <a:endParaRPr lang="en-US" sz="2800" dirty="0"/>
-          </a:p>
-          <a:p>
-            <a:r>
-              <a:rPr lang="en-US" sz="2800" dirty="0"/>
+            <a:endParaRPr lang="en-US" sz="2800" dirty="0">
+              <a:solidFill>
+                <a:schemeClr val="tx1">
+                  <a:lumMod val="85000"/>
+                </a:schemeClr>
+              </a:solidFill>
+            </a:endParaRPr>
+          </a:p>
+          <a:p>
+            <a:r>
+              <a:rPr lang="en-US" sz="2800" dirty="0">
+                <a:solidFill>
+                  <a:schemeClr val="tx1">
+                    <a:lumMod val="85000"/>
+                  </a:schemeClr>
+                </a:solidFill>
+              </a:rPr>
               <a:t>Compare 2022 data with this 2023 data. </a:t>
             </a:r>
-            <a:endParaRPr lang="en-US" dirty="0"/>
+            <a:endParaRPr lang="en-US" dirty="0">
+              <a:solidFill>
+                <a:schemeClr val="tx1">
+                  <a:lumMod val="85000"/>
+                </a:schemeClr>
+              </a:solidFill>
+            </a:endParaRPr>
           </a:p>
           <a:p>
             <a:endParaRPr lang="en-US" dirty="0"/>
@@ -11929,13 +12065,24 @@
             <p:ph type="title"/>
           </p:nvPr>
         </p:nvSpPr>
-        <p:spPr/>
+        <p:spPr>
+          <a:xfrm>
+            <a:off x="239325" y="738746"/>
+            <a:ext cx="10835640" cy="762677"/>
+          </a:xfrm>
+        </p:spPr>
         <p:txBody>
           <a:bodyPr/>
           <a:lstStyle/>
           <a:p>
             <a:r>
-              <a:rPr lang="en-US" dirty="0"/>
+              <a:rPr lang="en-US" dirty="0">
+                <a:solidFill>
+                  <a:schemeClr val="tx1">
+                    <a:lumMod val="85000"/>
+                  </a:schemeClr>
+                </a:solidFill>
+              </a:rPr>
               <a:t>Sources and Notes</a:t>
             </a:r>
           </a:p>
@@ -11970,38 +12117,70 @@
           <a:lstStyle/>
           <a:p>
             <a:r>
-              <a:rPr lang="en-US" dirty="0"/>
+              <a:rPr lang="en-US" dirty="0">
+                <a:solidFill>
+                  <a:schemeClr val="tx1">
+                    <a:lumMod val="85000"/>
+                  </a:schemeClr>
+                </a:solidFill>
+              </a:rPr>
               <a:t>2023 Energy Benchmarking All Sites</a:t>
             </a:r>
           </a:p>
           <a:p>
             <a:r>
-              <a:rPr lang="en-US" dirty="0"/>
+              <a:rPr lang="en-US" dirty="0">
+                <a:solidFill>
+                  <a:schemeClr val="tx1">
+                    <a:lumMod val="85000"/>
+                  </a:schemeClr>
+                </a:solidFill>
+              </a:rPr>
               <a:t>The Energy Benchmarking Law requires the County to make annually reported energy benchmarking information readily available to the public. This dataset reflects data received by the publish date and does not include individually attributable benchmarking data for buildings in Group 5, as CY 2023 was the first year that these buildings were required to report to DEP.</a:t>
             </a:r>
           </a:p>
           <a:p>
             <a:r>
-              <a:rPr lang="en-US" dirty="0"/>
+              <a:rPr lang="en-US" dirty="0">
+                <a:solidFill>
+                  <a:schemeClr val="tx1">
+                    <a:lumMod val="85000"/>
+                  </a:schemeClr>
+                </a:solidFill>
+              </a:rPr>
               <a:t>September 23, 2025</a:t>
             </a:r>
           </a:p>
           <a:p>
             <a:r>
-              <a:rPr lang="en-US" dirty="0"/>
+              <a:rPr lang="en-US" dirty="0">
+                <a:solidFill>
+                  <a:schemeClr val="tx1">
+                    <a:lumMod val="85000"/>
+                  </a:schemeClr>
+                </a:solidFill>
+              </a:rPr>
               <a:t>Dataset Owner: Kathy Luh</a:t>
             </a:r>
           </a:p>
           <a:p>
             <a:r>
-              <a:rPr lang="en-US" dirty="0"/>
+              <a:rPr lang="en-US" dirty="0">
+                <a:solidFill>
+                  <a:schemeClr val="tx1">
+                    <a:lumMod val="85000"/>
+                  </a:schemeClr>
+                </a:solidFill>
+              </a:rPr>
               <a:t>27 columns 1846 rows</a:t>
             </a:r>
           </a:p>
           <a:p>
             <a:endParaRPr lang="en-US" sz="1800" b="0" i="0" dirty="0">
               <a:solidFill>
-                <a:srgbClr val="9454C3"/>
+                <a:schemeClr val="tx1">
+                  <a:lumMod val="85000"/>
+                </a:schemeClr>
               </a:solidFill>
               <a:effectLst/>
               <a:latin typeface="+mn-lt"/>
@@ -12016,6 +12195,11 @@
           </a:p>
           <a:p>
             <a:endParaRPr lang="en-US" dirty="0">
+              <a:solidFill>
+                <a:schemeClr val="tx1">
+                  <a:lumMod val="85000"/>
+                </a:schemeClr>
+              </a:solidFill>
               <a:hlinkClick r:id="rId3">
                 <a:extLst>
                   <a:ext uri="{A12FA001-AC4F-418D-AE19-62706E023703}">
@@ -12028,6 +12212,11 @@
           <a:p>
             <a:r>
               <a:rPr lang="en-US" dirty="0">
+                <a:solidFill>
+                  <a:schemeClr val="tx1">
+                    <a:lumMod val="85000"/>
+                  </a:schemeClr>
+                </a:solidFill>
                 <a:hlinkClick r:id="rId3">
                   <a:extLst>
                     <a:ext uri="{A12FA001-AC4F-418D-AE19-62706E023703}">
@@ -12038,14 +12227,31 @@
               </a:rPr>
               <a:t>https://data.montgomerycountymd.gov/Environment/2023-Energy-Benchmarking-All-Sites/ensr-8pr2/about_data</a:t>
             </a:r>
-            <a:endParaRPr lang="en-US" dirty="0"/>
-          </a:p>
-          <a:p>
-            <a:endParaRPr lang="en-US" dirty="0"/>
+            <a:endParaRPr lang="en-US" dirty="0">
+              <a:solidFill>
+                <a:schemeClr val="tx1">
+                  <a:lumMod val="85000"/>
+                </a:schemeClr>
+              </a:solidFill>
+            </a:endParaRPr>
+          </a:p>
+          <a:p>
+            <a:endParaRPr lang="en-US" dirty="0">
+              <a:solidFill>
+                <a:schemeClr val="tx1">
+                  <a:lumMod val="85000"/>
+                </a:schemeClr>
+              </a:solidFill>
+            </a:endParaRPr>
           </a:p>
           <a:p>
             <a:r>
               <a:rPr lang="en-US" dirty="0">
+                <a:solidFill>
+                  <a:schemeClr val="tx1">
+                    <a:lumMod val="85000"/>
+                  </a:schemeClr>
+                </a:solidFill>
                 <a:hlinkClick r:id="rId4">
                   <a:extLst>
                     <a:ext uri="{A12FA001-AC4F-418D-AE19-62706E023703}">
@@ -12056,20 +12262,42 @@
               </a:rPr>
               <a:t>https://www.energystar.gov/buildings/benchmark</a:t>
             </a:r>
-            <a:endParaRPr lang="en-US" dirty="0"/>
+            <a:endParaRPr lang="en-US" dirty="0">
+              <a:solidFill>
+                <a:schemeClr val="tx1">
+                  <a:lumMod val="85000"/>
+                </a:schemeClr>
+              </a:solidFill>
+            </a:endParaRPr>
           </a:p>
           <a:p>
             <a:endParaRPr lang="en-US" sz="1800" b="0" i="0" dirty="0">
+              <a:solidFill>
+                <a:schemeClr val="tx1">
+                  <a:lumMod val="85000"/>
+                </a:schemeClr>
+              </a:solidFill>
               <a:effectLst/>
               <a:latin typeface="+mn-lt"/>
             </a:endParaRPr>
           </a:p>
           <a:p>
             <a:r>
-              <a:rPr lang="en-US" u="sng" dirty="0"/>
+              <a:rPr lang="en-US" u="sng" dirty="0">
+                <a:solidFill>
+                  <a:schemeClr val="tx1">
+                    <a:lumMod val="85000"/>
+                  </a:schemeClr>
+                </a:solidFill>
+              </a:rPr>
               <a:t>https://www.energystar.gov/buildings/about-us</a:t>
             </a:r>
             <a:endParaRPr lang="en-US" sz="1800" b="0" i="0" u="sng" dirty="0">
+              <a:solidFill>
+                <a:schemeClr val="tx1">
+                  <a:lumMod val="85000"/>
+                </a:schemeClr>
+              </a:solidFill>
               <a:effectLst/>
               <a:latin typeface="+mn-lt"/>
             </a:endParaRPr>
@@ -12156,7 +12384,13 @@
           <a:lstStyle/>
           <a:p>
             <a:r>
-              <a:rPr lang="en-US" sz="3200" dirty="0"/>
+              <a:rPr lang="en-US" sz="3200" dirty="0">
+                <a:solidFill>
+                  <a:schemeClr val="tx1">
+                    <a:lumMod val="85000"/>
+                  </a:schemeClr>
+                </a:solidFill>
+              </a:rPr>
               <a:t>Notes</a:t>
             </a:r>
           </a:p>
@@ -12177,7 +12411,7 @@
         <p:spPr>
           <a:xfrm>
             <a:off x="1159626" y="1198072"/>
-            <a:ext cx="10295313" cy="3693319"/>
+            <a:ext cx="10295313" cy="5539978"/>
           </a:xfrm>
           <a:prstGeom prst="rect">
             <a:avLst/>
@@ -12191,41 +12425,227 @@
           <a:lstStyle/>
           <a:p>
             <a:r>
-              <a:rPr lang="en-US" sz="2400" dirty="0"/>
+              <a:rPr lang="en-US" sz="2400" dirty="0">
+                <a:solidFill>
+                  <a:schemeClr val="tx1">
+                    <a:lumMod val="85000"/>
+                  </a:schemeClr>
+                </a:solidFill>
+              </a:rPr>
               <a:t>Btu:  the British thermal unit (Btu) is a unit of measure of heat.  </a:t>
             </a:r>
           </a:p>
           <a:p>
             <a:r>
-              <a:rPr lang="en-US" sz="2400" dirty="0"/>
+              <a:rPr lang="en-US" sz="2400" dirty="0">
+                <a:solidFill>
+                  <a:schemeClr val="tx1">
+                    <a:lumMod val="85000"/>
+                  </a:schemeClr>
+                </a:solidFill>
+              </a:rPr>
               <a:t>It’s the amount of heat required to raise the temperature of one </a:t>
             </a:r>
           </a:p>
           <a:p>
             <a:r>
-              <a:rPr lang="en-US" sz="2400" dirty="0"/>
+              <a:rPr lang="en-US" sz="2400" dirty="0">
+                <a:solidFill>
+                  <a:schemeClr val="tx1">
+                    <a:lumMod val="85000"/>
+                  </a:schemeClr>
+                </a:solidFill>
+              </a:rPr>
               <a:t>pound of water by one degree Fahrenheit.</a:t>
             </a:r>
           </a:p>
           <a:p>
             <a:r>
-              <a:rPr lang="en-US" sz="2400" dirty="0"/>
+              <a:rPr lang="en-US" sz="2400" dirty="0">
+                <a:solidFill>
+                  <a:schemeClr val="tx1">
+                    <a:lumMod val="85000"/>
+                  </a:schemeClr>
+                </a:solidFill>
+              </a:rPr>
               <a:t>One Btu equals about 1,055 joules. </a:t>
             </a:r>
           </a:p>
           <a:p>
-            <a:endParaRPr lang="en-US" sz="2400" dirty="0"/>
-          </a:p>
-          <a:p>
-            <a:endParaRPr lang="en-US" sz="2400" dirty="0"/>
+            <a:endParaRPr lang="en-US" sz="2400" dirty="0">
+              <a:solidFill>
+                <a:schemeClr val="tx1">
+                  <a:lumMod val="85000"/>
+                </a:schemeClr>
+              </a:solidFill>
+            </a:endParaRPr>
           </a:p>
           <a:p>
             <a:pPr lvl="0">
               <a:defRPr/>
             </a:pPr>
             <a:r>
-              <a:rPr lang="en-US" sz="2400" dirty="0"/>
+              <a:rPr lang="en-US" sz="2400" dirty="0">
+                <a:solidFill>
+                  <a:schemeClr val="tx1">
+                    <a:lumMod val="85000"/>
+                  </a:schemeClr>
+                </a:solidFill>
+              </a:rPr>
               <a:t>Energy Star: 1–100 score, which rates energy performance in comparison to similar buildings across the country</a:t>
+            </a:r>
+          </a:p>
+          <a:p>
+            <a:pPr lvl="0">
+              <a:defRPr/>
+            </a:pPr>
+            <a:endParaRPr lang="en-US" sz="2400" dirty="0">
+              <a:solidFill>
+                <a:schemeClr val="tx1">
+                  <a:lumMod val="85000"/>
+                </a:schemeClr>
+              </a:solidFill>
+            </a:endParaRPr>
+          </a:p>
+          <a:p>
+            <a:pPr>
+              <a:defRPr/>
+            </a:pPr>
+            <a:r>
+              <a:rPr lang="en-US" sz="2400" dirty="0">
+                <a:solidFill>
+                  <a:schemeClr val="tx1">
+                    <a:lumMod val="85000"/>
+                  </a:schemeClr>
+                </a:solidFill>
+              </a:rPr>
+              <a:t>Dataset:  </a:t>
+            </a:r>
+            <a:r>
+              <a:rPr lang="en-US" sz="2400" dirty="0">
+                <a:solidFill>
+                  <a:schemeClr val="tx1">
+                    <a:lumMod val="85000"/>
+                  </a:schemeClr>
+                </a:solidFill>
+                <a:hlinkClick r:id="rId3">
+                  <a:extLst>
+                    <a:ext uri="{A12FA001-AC4F-418D-AE19-62706E023703}">
+                      <ahyp:hlinkClr xmlns:ahyp="http://schemas.microsoft.com/office/drawing/2018/hyperlinkcolor" val="tx"/>
+                    </a:ext>
+                  </a:extLst>
+                </a:hlinkClick>
+              </a:rPr>
+              <a:t>https://raw.github.com/Alissa-Ouspen/data110_alissa/main/datasets/energy_2023_clean.csv</a:t>
+            </a:r>
+            <a:endParaRPr lang="en-US" sz="2400" dirty="0">
+              <a:solidFill>
+                <a:schemeClr val="tx1">
+                  <a:lumMod val="85000"/>
+                </a:schemeClr>
+              </a:solidFill>
+            </a:endParaRPr>
+          </a:p>
+          <a:p>
+            <a:pPr lvl="0">
+              <a:defRPr/>
+            </a:pPr>
+            <a:endParaRPr lang="en-US" sz="2400" dirty="0">
+              <a:solidFill>
+                <a:schemeClr val="tx1">
+                  <a:lumMod val="85000"/>
+                </a:schemeClr>
+              </a:solidFill>
+            </a:endParaRPr>
+          </a:p>
+          <a:p>
+            <a:pPr lvl="0">
+              <a:defRPr/>
+            </a:pPr>
+            <a:r>
+              <a:rPr lang="en-US" sz="2400" dirty="0">
+                <a:solidFill>
+                  <a:schemeClr val="tx1">
+                    <a:lumMod val="85000"/>
+                  </a:schemeClr>
+                </a:solidFill>
+              </a:rPr>
+              <a:t>Project folder in GitHub</a:t>
+            </a:r>
+            <a:r>
+              <a:rPr lang="en-US" sz="2400">
+                <a:solidFill>
+                  <a:schemeClr val="tx1">
+                    <a:lumMod val="85000"/>
+                  </a:schemeClr>
+                </a:solidFill>
+              </a:rPr>
+              <a:t>:  </a:t>
+            </a:r>
+          </a:p>
+          <a:p>
+            <a:pPr lvl="0">
+              <a:defRPr/>
+            </a:pPr>
+            <a:r>
+              <a:rPr lang="en-US" sz="2400">
+                <a:solidFill>
+                  <a:schemeClr val="tx1">
+                    <a:lumMod val="85000"/>
+                  </a:schemeClr>
+                </a:solidFill>
+              </a:rPr>
+              <a:t>https</a:t>
+            </a:r>
+            <a:r>
+              <a:rPr lang="en-US" sz="2400" dirty="0">
+                <a:solidFill>
+                  <a:schemeClr val="tx1">
+                    <a:lumMod val="85000"/>
+                  </a:schemeClr>
+                </a:solidFill>
+              </a:rPr>
+              <a:t>://</a:t>
+            </a:r>
+            <a:r>
+              <a:rPr lang="en-US" sz="2400" dirty="0" err="1">
+                <a:solidFill>
+                  <a:schemeClr val="tx1">
+                    <a:lumMod val="85000"/>
+                  </a:schemeClr>
+                </a:solidFill>
+              </a:rPr>
+              <a:t>github.com</a:t>
+            </a:r>
+            <a:r>
+              <a:rPr lang="en-US" sz="2400" dirty="0">
+                <a:solidFill>
+                  <a:schemeClr val="tx1">
+                    <a:lumMod val="85000"/>
+                  </a:schemeClr>
+                </a:solidFill>
+              </a:rPr>
+              <a:t>/Alissa-</a:t>
+            </a:r>
+            <a:r>
+              <a:rPr lang="en-US" sz="2400" dirty="0" err="1">
+                <a:solidFill>
+                  <a:schemeClr val="tx1">
+                    <a:lumMod val="85000"/>
+                  </a:schemeClr>
+                </a:solidFill>
+              </a:rPr>
+              <a:t>Ouspen</a:t>
+            </a:r>
+            <a:r>
+              <a:rPr lang="en-US" sz="2400" dirty="0">
+                <a:solidFill>
+                  <a:schemeClr val="tx1">
+                    <a:lumMod val="85000"/>
+                  </a:schemeClr>
+                </a:solidFill>
+              </a:rPr>
+              <a:t>/data110_alissa/tree/main/project1</a:t>
             </a:r>
           </a:p>
           <a:p>
@@ -12295,7 +12715,13 @@
           <a:lstStyle/>
           <a:p>
             <a:r>
-              <a:rPr lang="en-US" sz="3200" dirty="0"/>
+              <a:rPr lang="en-US" sz="3200" dirty="0">
+                <a:solidFill>
+                  <a:schemeClr val="tx1">
+                    <a:lumMod val="85000"/>
+                  </a:schemeClr>
+                </a:solidFill>
+              </a:rPr>
               <a:t>Source Dataset:</a:t>
             </a:r>
           </a:p>
@@ -12315,8 +12741,8 @@
         </p:nvSpPr>
         <p:spPr>
           <a:xfrm>
-            <a:off x="1330932" y="2626129"/>
-            <a:ext cx="8127403" cy="2646878"/>
+            <a:off x="1478844" y="2626129"/>
+            <a:ext cx="9369778" cy="3200876"/>
           </a:xfrm>
           <a:prstGeom prst="rect">
             <a:avLst/>
@@ -12330,19 +12756,24 @@
           <a:lstStyle/>
           <a:p>
             <a:r>
-              <a:rPr lang="en-US" sz="2800" dirty="0"/>
+              <a:rPr lang="en-US" sz="2400" dirty="0">
+                <a:solidFill>
+                  <a:schemeClr val="tx1">
+                    <a:lumMod val="85000"/>
+                  </a:schemeClr>
+                </a:solidFill>
+              </a:rPr>
               <a:t>2023 Energy Benchmarking All Sites</a:t>
             </a:r>
           </a:p>
           <a:p>
-            <a:endParaRPr lang="en-US" sz="2800" dirty="0"/>
-          </a:p>
-          <a:p>
-            <a:endParaRPr lang="en-US" sz="2800" dirty="0"/>
-          </a:p>
-          <a:p>
-            <a:r>
-              <a:rPr lang="en-US" sz="2800" u="sng" dirty="0">
+            <a:r>
+              <a:rPr lang="en-US" sz="2400" u="sng" dirty="0">
+                <a:solidFill>
+                  <a:schemeClr val="tx1">
+                    <a:lumMod val="85000"/>
+                  </a:schemeClr>
+                </a:solidFill>
                 <a:hlinkClick r:id="rId2">
                   <a:extLst>
                     <a:ext uri="{A12FA001-AC4F-418D-AE19-62706E023703}">
@@ -12353,10 +12784,100 @@
               </a:rPr>
               <a:t>https://data.montgomerycountymd.gov</a:t>
             </a:r>
-            <a:endParaRPr lang="en-US" sz="2800" u="sng" dirty="0"/>
-          </a:p>
-          <a:p>
-            <a:endParaRPr lang="en-US" dirty="0"/>
+            <a:endParaRPr lang="en-US" sz="2400" u="sng" dirty="0">
+              <a:solidFill>
+                <a:schemeClr val="tx1">
+                  <a:lumMod val="85000"/>
+                </a:schemeClr>
+              </a:solidFill>
+            </a:endParaRPr>
+          </a:p>
+          <a:p>
+            <a:endParaRPr lang="en-US" sz="2400" u="sng" dirty="0">
+              <a:solidFill>
+                <a:schemeClr val="tx1">
+                  <a:lumMod val="85000"/>
+                </a:schemeClr>
+              </a:solidFill>
+            </a:endParaRPr>
+          </a:p>
+          <a:p>
+            <a:r>
+              <a:rPr lang="en-US" sz="2400" dirty="0">
+                <a:solidFill>
+                  <a:schemeClr val="tx1">
+                    <a:lumMod val="85000"/>
+                  </a:schemeClr>
+                </a:solidFill>
+                <a:hlinkClick r:id="rId3">
+                  <a:extLst>
+                    <a:ext uri="{A12FA001-AC4F-418D-AE19-62706E023703}">
+                      <ahyp:hlinkClr xmlns:ahyp="http://schemas.microsoft.com/office/drawing/2018/hyperlinkcolor" val="tx"/>
+                    </a:ext>
+                  </a:extLst>
+                </a:hlinkClick>
+              </a:rPr>
+              <a:t>https://raw.github.com/Alissa-</a:t>
+            </a:r>
+            <a:r>
+              <a:rPr lang="en-US" sz="2400" dirty="0" err="1">
+                <a:solidFill>
+                  <a:schemeClr val="tx1">
+                    <a:lumMod val="85000"/>
+                  </a:schemeClr>
+                </a:solidFill>
+                <a:hlinkClick r:id="rId3">
+                  <a:extLst>
+                    <a:ext uri="{A12FA001-AC4F-418D-AE19-62706E023703}">
+                      <ahyp:hlinkClr xmlns:ahyp="http://schemas.microsoft.com/office/drawing/2018/hyperlinkcolor" val="tx"/>
+                    </a:ext>
+                  </a:extLst>
+                </a:hlinkClick>
+              </a:rPr>
+              <a:t>Ouspen</a:t>
+            </a:r>
+            <a:r>
+              <a:rPr lang="en-US" sz="2400" dirty="0">
+                <a:solidFill>
+                  <a:schemeClr val="tx1">
+                    <a:lumMod val="85000"/>
+                  </a:schemeClr>
+                </a:solidFill>
+                <a:hlinkClick r:id="rId3">
+                  <a:extLst>
+                    <a:ext uri="{A12FA001-AC4F-418D-AE19-62706E023703}">
+                      <ahyp:hlinkClr xmlns:ahyp="http://schemas.microsoft.com/office/drawing/2018/hyperlinkcolor" val="tx"/>
+                    </a:ext>
+                  </a:extLst>
+                </a:hlinkClick>
+              </a:rPr>
+              <a:t>/data110_alissa/main/datasets/energy_2023_clean.csv</a:t>
+            </a:r>
+            <a:endParaRPr lang="en-US" sz="2400" dirty="0">
+              <a:solidFill>
+                <a:schemeClr val="tx1">
+                  <a:lumMod val="85000"/>
+                </a:schemeClr>
+              </a:solidFill>
+            </a:endParaRPr>
+          </a:p>
+          <a:p>
+            <a:endParaRPr lang="en-US" sz="2800" u="sng" dirty="0">
+              <a:solidFill>
+                <a:schemeClr val="tx1">
+                  <a:lumMod val="85000"/>
+                </a:schemeClr>
+              </a:solidFill>
+            </a:endParaRPr>
+          </a:p>
+          <a:p>
+            <a:endParaRPr lang="en-US" dirty="0">
+              <a:solidFill>
+                <a:schemeClr val="tx1">
+                  <a:lumMod val="85000"/>
+                </a:schemeClr>
+              </a:solidFill>
+            </a:endParaRPr>
           </a:p>
           <a:p>
             <a:endParaRPr lang="en-US" sz="1800" dirty="0"/>
@@ -12425,7 +12946,13 @@
           <a:lstStyle/>
           <a:p>
             <a:r>
-              <a:rPr lang="en-US" sz="4000" dirty="0"/>
+              <a:rPr lang="en-US" sz="4000" dirty="0">
+                <a:solidFill>
+                  <a:schemeClr val="tx1">
+                    <a:lumMod val="85000"/>
+                  </a:schemeClr>
+                </a:solidFill>
+              </a:rPr>
               <a:t>What is Benchmarking?</a:t>
             </a:r>
             <a:br>
@@ -12518,7 +13045,13 @@
           <a:lstStyle/>
           <a:p>
             <a:r>
-              <a:rPr lang="en-US" sz="3200" dirty="0"/>
+              <a:rPr lang="en-US" sz="3200" dirty="0">
+                <a:solidFill>
+                  <a:schemeClr val="tx1">
+                    <a:lumMod val="85000"/>
+                  </a:schemeClr>
+                </a:solidFill>
+              </a:rPr>
               <a:t>Exploratory Analysis </a:t>
             </a:r>
           </a:p>
@@ -12558,7 +13091,13 @@
               </a:lnSpc>
             </a:pPr>
             <a:r>
-              <a:rPr lang="en-US" sz="2400" dirty="0"/>
+              <a:rPr lang="en-US" sz="2400" dirty="0">
+                <a:solidFill>
+                  <a:schemeClr val="tx1">
+                    <a:lumMod val="85000"/>
+                  </a:schemeClr>
+                </a:solidFill>
+              </a:rPr>
               <a:t>1846 rows, 27 columns </a:t>
             </a:r>
           </a:p>
@@ -12569,7 +13108,13 @@
               </a:lnSpc>
             </a:pPr>
             <a:r>
-              <a:rPr lang="en-US" sz="2400" dirty="0"/>
+              <a:rPr lang="en-US" sz="2400" dirty="0">
+                <a:solidFill>
+                  <a:schemeClr val="tx1">
+                    <a:lumMod val="85000"/>
+                  </a:schemeClr>
+                </a:solidFill>
+              </a:rPr>
               <a:t>Numerical and Categorical data</a:t>
             </a:r>
           </a:p>
@@ -12580,7 +13125,13 @@
               </a:lnSpc>
             </a:pPr>
             <a:r>
-              <a:rPr lang="en-US" sz="2400" dirty="0"/>
+              <a:rPr lang="en-US" sz="2400" dirty="0">
+                <a:solidFill>
+                  <a:schemeClr val="tx1">
+                    <a:lumMod val="85000"/>
+                  </a:schemeClr>
+                </a:solidFill>
+              </a:rPr>
               <a:t>25 duplicate entries</a:t>
             </a:r>
           </a:p>
@@ -12591,7 +13142,13 @@
               </a:lnSpc>
             </a:pPr>
             <a:r>
-              <a:rPr lang="en-US" sz="2400" dirty="0"/>
+              <a:rPr lang="en-US" sz="2400" dirty="0">
+                <a:solidFill>
+                  <a:schemeClr val="tx1">
+                    <a:lumMod val="85000"/>
+                  </a:schemeClr>
+                </a:solidFill>
+              </a:rPr>
               <a:t>1821 remaining</a:t>
             </a:r>
           </a:p>
@@ -12602,7 +13159,13 @@
               </a:lnSpc>
             </a:pPr>
             <a:r>
-              <a:rPr lang="en-US" sz="2400" dirty="0"/>
+              <a:rPr lang="en-US" sz="2400" dirty="0">
+                <a:solidFill>
+                  <a:schemeClr val="tx1">
+                    <a:lumMod val="85000"/>
+                  </a:schemeClr>
+                </a:solidFill>
+              </a:rPr>
               <a:t>Missing ID numbers and addresses</a:t>
             </a:r>
           </a:p>
@@ -12613,7 +13176,13 @@
               </a:lnSpc>
             </a:pPr>
             <a:r>
-              <a:rPr lang="en-US" sz="2400" dirty="0"/>
+              <a:rPr lang="en-US" sz="2400" dirty="0">
+                <a:solidFill>
+                  <a:schemeClr val="tx1">
+                    <a:lumMod val="85000"/>
+                  </a:schemeClr>
+                </a:solidFill>
+              </a:rPr>
               <a:t>Electricity (kWh) had the most unique entries:  	1716</a:t>
             </a:r>
           </a:p>
@@ -12624,7 +13193,13 @@
               </a:lnSpc>
             </a:pPr>
             <a:r>
-              <a:rPr lang="en-US" sz="2400" dirty="0"/>
+              <a:rPr lang="en-US" sz="2400" dirty="0">
+                <a:solidFill>
+                  <a:schemeClr val="tx1">
+                    <a:lumMod val="85000"/>
+                  </a:schemeClr>
+                </a:solidFill>
+              </a:rPr>
               <a:t>Reported Property Gross Floor Area unique: 		1672</a:t>
             </a:r>
           </a:p>
@@ -12635,7 +13210,13 @@
               </a:lnSpc>
             </a:pPr>
             <a:r>
-              <a:rPr lang="en-US" sz="2400" dirty="0"/>
+              <a:rPr lang="en-US" sz="2400" dirty="0">
+                <a:solidFill>
+                  <a:schemeClr val="tx1">
+                    <a:lumMod val="85000"/>
+                  </a:schemeClr>
+                </a:solidFill>
+              </a:rPr>
               <a:t>Total GHG Emissions (Metric Tons CO2e) unique:  	1619</a:t>
             </a:r>
           </a:p>
